--- a/slides/pptx/week12.pptx
+++ b/slides/pptx/week12.pptx
@@ -23,9 +23,15 @@
     <p:sldId id="271" r:id="rId17"/>
     <p:sldId id="272" r:id="rId18"/>
     <p:sldId id="273" r:id="rId19"/>
+    <p:sldId id="274" r:id="rId20"/>
+    <p:sldId id="275" r:id="rId21"/>
+    <p:sldId id="276" r:id="rId22"/>
+    <p:sldId id="277" r:id="rId23"/>
+    <p:sldId id="278" r:id="rId24"/>
+    <p:sldId id="279" r:id="rId25"/>
   </p:sldIdLst>
   <p:notesMasterIdLst>
-    <p:notesMasterId r:id="rId20"/>
+    <p:notesMasterId r:id="rId26"/>
   </p:notesMasterIdLst>
   <p:sldSz cx="9144000" cy="5143500"/>
   <p:notesSz cx="5143500" cy="9144000"/>
@@ -607,7 +613,8 @@
           <a:p>
             <a:r>
               <a:rPr lang="en-US" dirty="0"/>
-              <a:t>Demo the sign→verify loop. sign.sh runs both tools dockerized — match that here, not a bare local binary. Keyless (Sigstore) = identity-based signing via OIDC through Fulcio, logged in Rekor, no key to leak — name both by name, worksheet Q4 grades on the vocabulary. The deploy gate: refuse any image that doesn't verify → a tampered artifact can't ship. This is the lab's defend step. ~4 min.</a:t>
+              <a:t>Hands-on tooling (ties to W2 SCA). This lab is pure Python — no npm project — so it's trivy fs + pip-audit, not npm audit/dependency-check. Run trivy live on the project — it lists CVEs + the fixed version. The diagram's one job: SCA ≠ SAST. SAST = your code, your bugs; SCA = your versions, other people's known bugs, fix = bump the pin. Don't read the worklist rows aloud — they'll run it live; point at the "→ FIXED IN" column and say "that's the whole remediation, a version number." Q6 of the quiz asks for one real vulnerable dependency they found + remediation. ~4 min.
+Diagram: Software Composition Analysis turns requirements.txt into a remediation worklist: the pinned-but-outdated deps (Flask 1.1.4, Werkzeug 1.0.1, urllib3 1.26.4, requests 2.25.1) feed two scanners — trivy fs (matches versions to the CVE database) and pip-audit (checks PyPI advisories) — neither of which reads your code, both read your dependency list. The output is one row per vulnerable package with the version that fixes it: Flask → 2.3.2 (CVE-2023-30861, HIGH), Werkzeug → 3.0.3 (CVE-2024-34069, HIGH), urllib3 → 1.26.17 (CVE-2023-43804, HIGH). The contrast: SAST reads the code you wrote and finds your bugs; SCA reads the versions you depend on and finds other people's known, already-patched bugs, so the fix is a version bump, not a code change.</a:t>
             </a:r>
             <a:endParaRPr lang="en-US" dirty="0"/>
           </a:p>
@@ -695,7 +702,8 @@
           <a:p>
             <a:r>
               <a:rPr lang="en-US" dirty="0"/>
-              <a:t>Demo the sign→verify loop. sign.sh runs both tools dockerized — match that here, not a bare local binary. Keyless (Sigstore) = identity-based signing via OIDC through Fulcio, logged in Rekor, no key to leak — name both by name, worksheet Q4 grades on the vocabulary. The deploy gate: refuse any image that doesn't verify → a tampered artifact can't ship. This is the lab's defend step. ~4 min.</a:t>
+              <a:t>Hands-on tooling (ties to W2 SCA). This lab is pure Python — no npm project — so it's trivy fs + pip-audit, not npm audit/dependency-check. Run trivy live on the project — it lists CVEs + the fixed version. The diagram's one job: SCA ≠ SAST. SAST = your code, your bugs; SCA = your versions, other people's known bugs, fix = bump the pin. Don't read the worklist rows aloud — they'll run it live; point at the "→ FIXED IN" column and say "that's the whole remediation, a version number." Q6 of the quiz asks for one real vulnerable dependency they found + remediation. ~4 min.
+Diagram: Software Composition Analysis turns requirements.txt into a remediation worklist: the pinned-but-outdated deps (Flask 1.1.4, Werkzeug 1.0.1, urllib3 1.26.4, requests 2.25.1) feed two scanners — trivy fs (matches versions to the CVE database) and pip-audit (checks PyPI advisories) — neither of which reads your code, both read your dependency list. The output is one row per vulnerable package with the version that fixes it: Flask → 2.3.2 (CVE-2023-30861, HIGH), Werkzeug → 3.0.3 (CVE-2024-34069, HIGH), urllib3 → 1.26.17 (CVE-2023-43804, HIGH). The contrast: SAST reads the code you wrote and finds your bugs; SCA reads the versions you depend on and finds other people's known, already-patched bugs, so the fix is a version bump, not a code change.</a:t>
             </a:r>
             <a:endParaRPr lang="en-US" dirty="0"/>
           </a:p>
@@ -783,7 +791,7 @@
           <a:p>
             <a:r>
               <a:rPr lang="en-US" dirty="0"/>
-              <a:t>The managed option students will meet in industry. Dependabot is the practical supply-chain workhorse: it opens PRs bumping vulnerable deps automatically. Push protection stops secrets at push time — local commits with a secret are allowed, the block fires on push to the remote (recall W2). ~3 min.</a:t>
+              <a:t>SBOM = the food-label analogy: you can't manage what you can't list. When the next Log4Shell drops, an SBOM answers "are we affected?" in seconds. SLSA Build Track = levels L0–L3 of build provenance / tamper-resistance (L3 is the top; the old "1–4" numbering was v0.1 and is deprecated). ~5 min.</a:t>
             </a:r>
             <a:endParaRPr lang="en-US" dirty="0"/>
           </a:p>
@@ -871,7 +879,8 @@
           <a:p>
             <a:r>
               <a:rPr lang="en-US" dirty="0"/>
-              <a:t>The payoff checklist, now with the exact flags Task 4 grades. --require-hashes and single-index-url are what actually stops dependency confusion — "pin + scope" alone is too vague to reconstruct on the exam. Verify-before-deploy kills tampered artifacts; MFA on maintainer/CI accounts kills the xz/CircleCI vector. "Automate in CI" sets up W15. ~4 min.</a:t>
+              <a:t>SBOM = food label (know the ingredients, fast incident response); SLSA = the provenance ladder L0-L3 (prove how it was built). Two different questions, both integrity. Note the L0-L3 numbering replaces the deprecated 1-4. ~2 min.
+Diagram: Two integrity controls side by side. Left, an SBOM (CycloneDX / SPDX): the build's itemized ingredient list — every component and version — so when the next Log4Shell drops you search it and answer "are we affected?" in seconds, not weeks. Right, SLSA: a ladder of build-provenance levels from L0 to L3 — L0 no guarantees, L1 provenance exists but is forgeable, L2 hosted build and signed (tamper-evident), L3 hardened builds whose provenance cannot be forged. SBOM knows what is in it; SLSA proves how it was built. Both map to OWASP A08:2025 Software or Data Integrity Failures.</a:t>
             </a:r>
             <a:endParaRPr lang="en-US" dirty="0"/>
           </a:p>
@@ -959,8 +968,7 @@
           <a:p>
             <a:r>
               <a:rPr lang="en-US" dirty="0"/>
-              <a:t>The synthesis slide — everything from the last five slides (SAST/SCA, SBOM, Cosign, the defenses checklist) is one column each in this diagram, chained in the order a real dependency actually travels. Walk it left to right ONE time, don't re-teach each hop — the point is showing they were never separate tools, they're six links in the same chain. Land on the closing line before moving to the game. ~5 min.
-Diagram: Six hops a dependency crosses from a public registry into production, each with its own attack and the control that answers it: registry (typosquatting → one trusted index), resolver (dependency confusion → scope the namespace), fetch (compromised maintainer → lockfile with hashes), build (stale pins → SCA in CI), image (no inventory → SBOM), deploy (unsigned image → Sigstore keyless gate). "We scanned our code" covers none of this — SAST reads the code you wrote, all six hops are code you didn't.</a:t>
+              <a:t>Demo the sign→verify loop. sign.sh runs both tools dockerized — match that here, not a bare local binary. Keyless (Sigstore) = identity-based signing via OIDC through Fulcio, logged in Rekor, no key to leak — name both by name, worksheet Q4 grades on the vocabulary. The deploy gate: refuse any image that doesn't verify → a tampered artifact can't ship. This is the lab's defend step. ~4 min.</a:t>
             </a:r>
             <a:endParaRPr lang="en-US" dirty="0"/>
           </a:p>
@@ -1048,7 +1056,7 @@
           <a:p>
             <a:r>
               <a:rPr lang="en-US" dirty="0"/>
-              <a:t>Explain before lab — the resolver simulation stands in for a live registry (ethics: never publish a real typosquat). Defend side is graded. The SLSA self-assessment makes them reason about their own pipeline. ~3 min.</a:t>
+              <a:t>Demo the sign→verify loop. sign.sh runs both tools dockerized — match that here, not a bare local binary. Keyless (Sigstore) = identity-based signing via OIDC through Fulcio, logged in Rekor, no key to leak — name both by name, worksheet Q4 grades on the vocabulary. The deploy gate: refuse any image that doesn't verify → a tampered artifact can't ship. This is the lab's defend step. ~4 min.</a:t>
             </a:r>
             <a:endParaRPr lang="en-US" dirty="0"/>
           </a:p>
@@ -1136,7 +1144,8 @@
           <a:p>
             <a:r>
               <a:rPr lang="en-US" dirty="0"/>
-              <a:t>The SLSA self-assessment is the thinking part — they place their own build on the ladder and justify it. AI-resilient tasks count.</a:t>
+              <a:t>The mental model behind the bash on the previous slide — walk it once, left to right across the sign lane, then down to the verify gate. The one idea that lands: there is no key to protect because there is no long-lived key at all; trust is anchored to an OIDC identity and a public log, not a secret file. Fulcio = the short-lived-cert CA, Rekor = the transparency log — worksheet Q4 grades on naming both. Don't re-read every box; students have the diagram, spend the time on the "identity, not a key" punchline. ~3 min.
+Diagram: How Sigstore keyless signing works with no long-lived private key: cosign sign authenticates via an OIDC identity (GitHub/Google), Fulcio issues a short-lived (~10 min) certificate bound to that identity, cosign signs with an ephemeral key then discards it, and the signature + certificate are recorded in Rekor's public transparency log — so nothing long-lived is ever written to disk and there is no private key to leak (avoiding CWE-321). At deploy, cosign verify checks the signature against the expected identity and the Rekor log: a valid, matching signature is allowed to deploy; an unsigned or tampered image returns "no signatures found" and the gate blocks it.</a:t>
             </a:r>
             <a:endParaRPr lang="en-US" dirty="0"/>
           </a:p>
@@ -1224,7 +1233,7 @@
           <a:p>
             <a:r>
               <a:rPr lang="en-US" dirty="0"/>
-              <a:t>Recap with the three verbs. Cold-call: "the next Log4Shell drops at 2am — what artifact tells you if you're affected?" (the SBOM). ~2 min.</a:t>
+              <a:t>The interactive companion to the keyless-signing diagram: it runs cosign's VERIFY logic in the page, so students drive the deploy gate themselves. Walk the four image states: unsigned → "no signatures found"; tampered → the signature no longer matches the digest; our CI → deploys; signed by another identity → blocked ONLY if the policy pins the expected signer. The move that lands the lesson: flip "pin the expected signer" OFF (the lab command's own '.*') and the attacker's validly-signed image deploys — a valid signature is not a signature you should trust. That's why the two --certificate-*-regexp flags from the previous slide must name YOUR identity, not '.*'. Ties to Task 3's verify-before-deploy gate and worksheet Q4. ~3 min.</a:t>
             </a:r>
             <a:endParaRPr lang="en-US" dirty="0"/>
           </a:p>
@@ -1312,7 +1321,7 @@
           <a:p>
             <a:r>
               <a:rPr lang="en-US" dirty="0"/>
-              <a:t>Cliffhanger: "Next week — where your code runs. We'll hunt cloud/container misconfigs, the #1 real-world breach cause."</a:t>
+              <a:t>The managed option students will meet in industry. Dependabot is the practical supply-chain workhorse: it opens PRs bumping vulnerable deps automatically. Push protection stops secrets at push time — local commits with a secret are allowed, the block fires on push to the remote (recall W2). ~3 min.</a:t>
             </a:r>
             <a:endParaRPr lang="en-US" dirty="0"/>
           </a:p>
@@ -1336,6 +1345,94 @@
             <a:fld id="{F7021451-1387-4CA6-816F-3879F97B5CBC}" type="slidenum">
               <a:rPr lang="en-US"/>
               <a:t>18</a:t>
+            </a:fld>
+            <a:endParaRPr lang="en-US"/>
+          </a:p>
+        </p:txBody>
+      </p:sp>
+    </p:spTree>
+    <p:extLst>
+      <p:ext uri="{BB962C8B-B14F-4D97-AF65-F5344CB8AC3E}">
+        <p14:creationId xmlns:p14="http://schemas.microsoft.com/office/powerpoint/2010/main" val="1024086991"/>
+      </p:ext>
+    </p:extLst>
+  </p:cSld>
+  <p:clrMapOvr>
+    <a:masterClrMapping/>
+  </p:clrMapOvr>
+</p:notes>
+</file>
+
+<file path=ppt/notesSlides/notesSlide19.xml><?xml version="1.0" encoding="utf-8"?>
+<p:notes xmlns:a="http://schemas.openxmlformats.org/drawingml/2006/main" xmlns:r="http://schemas.openxmlformats.org/officeDocument/2006/relationships" xmlns:p="http://schemas.openxmlformats.org/presentationml/2006/main">
+  <p:cSld>
+    <p:spTree>
+      <p:nvGrpSpPr>
+        <p:cNvPr id="1" name=""/>
+        <p:cNvGrpSpPr/>
+        <p:nvPr/>
+      </p:nvGrpSpPr>
+      <p:grpSpPr>
+        <a:xfrm>
+          <a:off x="0" y="0"/>
+          <a:ext cx="0" cy="0"/>
+          <a:chOff x="0" y="0"/>
+          <a:chExt cx="0" cy="0"/>
+        </a:xfrm>
+      </p:grpSpPr>
+      <p:sp>
+        <p:nvSpPr>
+          <p:cNvPr id="2" name="Slide Image Placeholder 1"/>
+          <p:cNvSpPr>
+            <a:spLocks noGrp="1" noRot="1" noChangeAspect="1"/>
+          </p:cNvSpPr>
+          <p:nvPr>
+            <p:ph type="sldImg"/>
+          </p:nvPr>
+        </p:nvSpPr>
+        <p:spPr/>
+      </p:sp>
+      <p:sp>
+        <p:nvSpPr>
+          <p:cNvPr id="3" name="Notes Placeholder 2"/>
+          <p:cNvSpPr>
+            <a:spLocks noGrp="1"/>
+          </p:cNvSpPr>
+          <p:nvPr>
+            <p:ph type="body" idx="1"/>
+          </p:nvPr>
+        </p:nvSpPr>
+        <p:spPr/>
+        <p:txBody>
+          <a:bodyPr/>
+          <a:lstStyle/>
+          <a:p>
+            <a:r>
+              <a:rPr lang="en-US" dirty="0"/>
+              <a:t>The payoff checklist, now with the exact flags Task 4 grades. --require-hashes and single-index-url are what actually stops dependency confusion — "pin + scope" alone is too vague to reconstruct on the exam. Verify-before-deploy kills tampered artifacts; MFA on maintainer/CI accounts kills the xz/CircleCI vector. "Automate in CI" sets up W15. ~4 min.</a:t>
+            </a:r>
+            <a:endParaRPr lang="en-US" dirty="0"/>
+          </a:p>
+        </p:txBody>
+      </p:sp>
+      <p:sp>
+        <p:nvSpPr>
+          <p:cNvPr id="4" name="Slide Number Placeholder 3"/>
+          <p:cNvSpPr>
+            <a:spLocks noGrp="1"/>
+          </p:cNvSpPr>
+          <p:nvPr>
+            <p:ph type="sldNum" sz="quarter" idx="10"/>
+          </p:nvPr>
+        </p:nvSpPr>
+        <p:spPr/>
+        <p:txBody>
+          <a:bodyPr/>
+          <a:lstStyle/>
+          <a:p>
+            <a:fld id="{F7021451-1387-4CA6-816F-3879F97B5CBC}" type="slidenum">
+              <a:rPr lang="en-US"/>
+              <a:t>19</a:t>
             </a:fld>
             <a:endParaRPr lang="en-US"/>
           </a:p>
@@ -1442,6 +1539,447 @@
 </p:notes>
 </file>
 
+<file path=ppt/notesSlides/notesSlide20.xml><?xml version="1.0" encoding="utf-8"?>
+<p:notes xmlns:a="http://schemas.openxmlformats.org/drawingml/2006/main" xmlns:r="http://schemas.openxmlformats.org/officeDocument/2006/relationships" xmlns:p="http://schemas.openxmlformats.org/presentationml/2006/main">
+  <p:cSld>
+    <p:spTree>
+      <p:nvGrpSpPr>
+        <p:cNvPr id="1" name=""/>
+        <p:cNvGrpSpPr/>
+        <p:nvPr/>
+      </p:nvGrpSpPr>
+      <p:grpSpPr>
+        <a:xfrm>
+          <a:off x="0" y="0"/>
+          <a:ext cx="0" cy="0"/>
+          <a:chOff x="0" y="0"/>
+          <a:chExt cx="0" cy="0"/>
+        </a:xfrm>
+      </p:grpSpPr>
+      <p:sp>
+        <p:nvSpPr>
+          <p:cNvPr id="2" name="Slide Image Placeholder 1"/>
+          <p:cNvSpPr>
+            <a:spLocks noGrp="1" noRot="1" noChangeAspect="1"/>
+          </p:cNvSpPr>
+          <p:nvPr>
+            <p:ph type="sldImg"/>
+          </p:nvPr>
+        </p:nvSpPr>
+        <p:spPr/>
+      </p:sp>
+      <p:sp>
+        <p:nvSpPr>
+          <p:cNvPr id="3" name="Notes Placeholder 2"/>
+          <p:cNvSpPr>
+            <a:spLocks noGrp="1"/>
+          </p:cNvSpPr>
+          <p:nvPr>
+            <p:ph type="body" idx="1"/>
+          </p:nvPr>
+        </p:nvSpPr>
+        <p:spPr/>
+        <p:txBody>
+          <a:bodyPr/>
+          <a:lstStyle/>
+          <a:p>
+            <a:r>
+              <a:rPr lang="en-US" dirty="0"/>
+              <a:t>The synthesis slide — everything from the last five slides (SAST/SCA, SBOM, Cosign, the defenses checklist) is one column each in this diagram, chained in the order a real dependency actually travels. Walk it left to right ONE time, don't re-teach each hop — the point is showing they were never separate tools, they're six links in the same chain. Land on the closing line before moving to the game. ~5 min.
+Diagram: Six hops a dependency crosses from a public registry into production, each with its own attack and the control that answers it: registry (typosquatting → one trusted index), resolver (dependency confusion → scope the namespace), fetch (compromised maintainer → lockfile with hashes), build (stale pins → SCA in CI), image (no inventory → SBOM), deploy (unsigned image → Sigstore keyless gate). "We scanned our code" covers none of this — SAST reads the code you wrote, all six hops are code you didn't.</a:t>
+            </a:r>
+            <a:endParaRPr lang="en-US" dirty="0"/>
+          </a:p>
+        </p:txBody>
+      </p:sp>
+      <p:sp>
+        <p:nvSpPr>
+          <p:cNvPr id="4" name="Slide Number Placeholder 3"/>
+          <p:cNvSpPr>
+            <a:spLocks noGrp="1"/>
+          </p:cNvSpPr>
+          <p:nvPr>
+            <p:ph type="sldNum" sz="quarter" idx="10"/>
+          </p:nvPr>
+        </p:nvSpPr>
+        <p:spPr/>
+        <p:txBody>
+          <a:bodyPr/>
+          <a:lstStyle/>
+          <a:p>
+            <a:fld id="{F7021451-1387-4CA6-816F-3879F97B5CBC}" type="slidenum">
+              <a:rPr lang="en-US"/>
+              <a:t>20</a:t>
+            </a:fld>
+            <a:endParaRPr lang="en-US"/>
+          </a:p>
+        </p:txBody>
+      </p:sp>
+    </p:spTree>
+    <p:extLst>
+      <p:ext uri="{BB962C8B-B14F-4D97-AF65-F5344CB8AC3E}">
+        <p14:creationId xmlns:p14="http://schemas.microsoft.com/office/powerpoint/2010/main" val="1024086991"/>
+      </p:ext>
+    </p:extLst>
+  </p:cSld>
+  <p:clrMapOvr>
+    <a:masterClrMapping/>
+  </p:clrMapOvr>
+</p:notes>
+</file>
+
+<file path=ppt/notesSlides/notesSlide21.xml><?xml version="1.0" encoding="utf-8"?>
+<p:notes xmlns:a="http://schemas.openxmlformats.org/drawingml/2006/main" xmlns:r="http://schemas.openxmlformats.org/officeDocument/2006/relationships" xmlns:p="http://schemas.openxmlformats.org/presentationml/2006/main">
+  <p:cSld>
+    <p:spTree>
+      <p:nvGrpSpPr>
+        <p:cNvPr id="1" name=""/>
+        <p:cNvGrpSpPr/>
+        <p:nvPr/>
+      </p:nvGrpSpPr>
+      <p:grpSpPr>
+        <a:xfrm>
+          <a:off x="0" y="0"/>
+          <a:ext cx="0" cy="0"/>
+          <a:chOff x="0" y="0"/>
+          <a:chExt cx="0" cy="0"/>
+        </a:xfrm>
+      </p:grpSpPr>
+      <p:sp>
+        <p:nvSpPr>
+          <p:cNvPr id="2" name="Slide Image Placeholder 1"/>
+          <p:cNvSpPr>
+            <a:spLocks noGrp="1" noRot="1" noChangeAspect="1"/>
+          </p:cNvSpPr>
+          <p:nvPr>
+            <p:ph type="sldImg"/>
+          </p:nvPr>
+        </p:nvSpPr>
+        <p:spPr/>
+      </p:sp>
+      <p:sp>
+        <p:nvSpPr>
+          <p:cNvPr id="3" name="Notes Placeholder 2"/>
+          <p:cNvSpPr>
+            <a:spLocks noGrp="1"/>
+          </p:cNvSpPr>
+          <p:nvPr>
+            <p:ph type="body" idx="1"/>
+          </p:nvPr>
+        </p:nvSpPr>
+        <p:spPr/>
+        <p:txBody>
+          <a:bodyPr/>
+          <a:lstStyle/>
+          <a:p>
+            <a:r>
+              <a:rPr lang="en-US" dirty="0"/>
+              <a:t>Explain before lab — the resolver simulation stands in for a live registry (ethics: never publish a real typosquat). Defend side is graded. The SLSA self-assessment makes them reason about their own pipeline. ~3 min.</a:t>
+            </a:r>
+            <a:endParaRPr lang="en-US" dirty="0"/>
+          </a:p>
+        </p:txBody>
+      </p:sp>
+      <p:sp>
+        <p:nvSpPr>
+          <p:cNvPr id="4" name="Slide Number Placeholder 3"/>
+          <p:cNvSpPr>
+            <a:spLocks noGrp="1"/>
+          </p:cNvSpPr>
+          <p:nvPr>
+            <p:ph type="sldNum" sz="quarter" idx="10"/>
+          </p:nvPr>
+        </p:nvSpPr>
+        <p:spPr/>
+        <p:txBody>
+          <a:bodyPr/>
+          <a:lstStyle/>
+          <a:p>
+            <a:fld id="{F7021451-1387-4CA6-816F-3879F97B5CBC}" type="slidenum">
+              <a:rPr lang="en-US"/>
+              <a:t>21</a:t>
+            </a:fld>
+            <a:endParaRPr lang="en-US"/>
+          </a:p>
+        </p:txBody>
+      </p:sp>
+    </p:spTree>
+    <p:extLst>
+      <p:ext uri="{BB962C8B-B14F-4D97-AF65-F5344CB8AC3E}">
+        <p14:creationId xmlns:p14="http://schemas.microsoft.com/office/powerpoint/2010/main" val="1024086991"/>
+      </p:ext>
+    </p:extLst>
+  </p:cSld>
+  <p:clrMapOvr>
+    <a:masterClrMapping/>
+  </p:clrMapOvr>
+</p:notes>
+</file>
+
+<file path=ppt/notesSlides/notesSlide22.xml><?xml version="1.0" encoding="utf-8"?>
+<p:notes xmlns:a="http://schemas.openxmlformats.org/drawingml/2006/main" xmlns:r="http://schemas.openxmlformats.org/officeDocument/2006/relationships" xmlns:p="http://schemas.openxmlformats.org/presentationml/2006/main">
+  <p:cSld>
+    <p:spTree>
+      <p:nvGrpSpPr>
+        <p:cNvPr id="1" name=""/>
+        <p:cNvGrpSpPr/>
+        <p:nvPr/>
+      </p:nvGrpSpPr>
+      <p:grpSpPr>
+        <a:xfrm>
+          <a:off x="0" y="0"/>
+          <a:ext cx="0" cy="0"/>
+          <a:chOff x="0" y="0"/>
+          <a:chExt cx="0" cy="0"/>
+        </a:xfrm>
+      </p:grpSpPr>
+      <p:sp>
+        <p:nvSpPr>
+          <p:cNvPr id="2" name="Slide Image Placeholder 1"/>
+          <p:cNvSpPr>
+            <a:spLocks noGrp="1" noRot="1" noChangeAspect="1"/>
+          </p:cNvSpPr>
+          <p:nvPr>
+            <p:ph type="sldImg"/>
+          </p:nvPr>
+        </p:nvSpPr>
+        <p:spPr/>
+      </p:sp>
+      <p:sp>
+        <p:nvSpPr>
+          <p:cNvPr id="3" name="Notes Placeholder 2"/>
+          <p:cNvSpPr>
+            <a:spLocks noGrp="1"/>
+          </p:cNvSpPr>
+          <p:nvPr>
+            <p:ph type="body" idx="1"/>
+          </p:nvPr>
+        </p:nvSpPr>
+        <p:spPr/>
+        <p:txBody>
+          <a:bodyPr/>
+          <a:lstStyle/>
+          <a:p>
+            <a:r>
+              <a:rPr lang="en-US" dirty="0"/>
+              <a:t>The SLSA self-assessment is the thinking part — they place their own build on the ladder and justify it. AI-resilient tasks count.</a:t>
+            </a:r>
+            <a:endParaRPr lang="en-US" dirty="0"/>
+          </a:p>
+        </p:txBody>
+      </p:sp>
+      <p:sp>
+        <p:nvSpPr>
+          <p:cNvPr id="4" name="Slide Number Placeholder 3"/>
+          <p:cNvSpPr>
+            <a:spLocks noGrp="1"/>
+          </p:cNvSpPr>
+          <p:nvPr>
+            <p:ph type="sldNum" sz="quarter" idx="10"/>
+          </p:nvPr>
+        </p:nvSpPr>
+        <p:spPr/>
+        <p:txBody>
+          <a:bodyPr/>
+          <a:lstStyle/>
+          <a:p>
+            <a:fld id="{F7021451-1387-4CA6-816F-3879F97B5CBC}" type="slidenum">
+              <a:rPr lang="en-US"/>
+              <a:t>22</a:t>
+            </a:fld>
+            <a:endParaRPr lang="en-US"/>
+          </a:p>
+        </p:txBody>
+      </p:sp>
+    </p:spTree>
+    <p:extLst>
+      <p:ext uri="{BB962C8B-B14F-4D97-AF65-F5344CB8AC3E}">
+        <p14:creationId xmlns:p14="http://schemas.microsoft.com/office/powerpoint/2010/main" val="1024086991"/>
+      </p:ext>
+    </p:extLst>
+  </p:cSld>
+  <p:clrMapOvr>
+    <a:masterClrMapping/>
+  </p:clrMapOvr>
+</p:notes>
+</file>
+
+<file path=ppt/notesSlides/notesSlide23.xml><?xml version="1.0" encoding="utf-8"?>
+<p:notes xmlns:a="http://schemas.openxmlformats.org/drawingml/2006/main" xmlns:r="http://schemas.openxmlformats.org/officeDocument/2006/relationships" xmlns:p="http://schemas.openxmlformats.org/presentationml/2006/main">
+  <p:cSld>
+    <p:spTree>
+      <p:nvGrpSpPr>
+        <p:cNvPr id="1" name=""/>
+        <p:cNvGrpSpPr/>
+        <p:nvPr/>
+      </p:nvGrpSpPr>
+      <p:grpSpPr>
+        <a:xfrm>
+          <a:off x="0" y="0"/>
+          <a:ext cx="0" cy="0"/>
+          <a:chOff x="0" y="0"/>
+          <a:chExt cx="0" cy="0"/>
+        </a:xfrm>
+      </p:grpSpPr>
+      <p:sp>
+        <p:nvSpPr>
+          <p:cNvPr id="2" name="Slide Image Placeholder 1"/>
+          <p:cNvSpPr>
+            <a:spLocks noGrp="1" noRot="1" noChangeAspect="1"/>
+          </p:cNvSpPr>
+          <p:nvPr>
+            <p:ph type="sldImg"/>
+          </p:nvPr>
+        </p:nvSpPr>
+        <p:spPr/>
+      </p:sp>
+      <p:sp>
+        <p:nvSpPr>
+          <p:cNvPr id="3" name="Notes Placeholder 2"/>
+          <p:cNvSpPr>
+            <a:spLocks noGrp="1"/>
+          </p:cNvSpPr>
+          <p:nvPr>
+            <p:ph type="body" idx="1"/>
+          </p:nvPr>
+        </p:nvSpPr>
+        <p:spPr/>
+        <p:txBody>
+          <a:bodyPr/>
+          <a:lstStyle/>
+          <a:p>
+            <a:r>
+              <a:rPr lang="en-US" dirty="0"/>
+              <a:t>Recap with the three verbs. Cold-call: "the next Log4Shell drops at 2am — what artifact tells you if you're affected?" (the SBOM). ~2 min.</a:t>
+            </a:r>
+            <a:endParaRPr lang="en-US" dirty="0"/>
+          </a:p>
+        </p:txBody>
+      </p:sp>
+      <p:sp>
+        <p:nvSpPr>
+          <p:cNvPr id="4" name="Slide Number Placeholder 3"/>
+          <p:cNvSpPr>
+            <a:spLocks noGrp="1"/>
+          </p:cNvSpPr>
+          <p:nvPr>
+            <p:ph type="sldNum" sz="quarter" idx="10"/>
+          </p:nvPr>
+        </p:nvSpPr>
+        <p:spPr/>
+        <p:txBody>
+          <a:bodyPr/>
+          <a:lstStyle/>
+          <a:p>
+            <a:fld id="{F7021451-1387-4CA6-816F-3879F97B5CBC}" type="slidenum">
+              <a:rPr lang="en-US"/>
+              <a:t>23</a:t>
+            </a:fld>
+            <a:endParaRPr lang="en-US"/>
+          </a:p>
+        </p:txBody>
+      </p:sp>
+    </p:spTree>
+    <p:extLst>
+      <p:ext uri="{BB962C8B-B14F-4D97-AF65-F5344CB8AC3E}">
+        <p14:creationId xmlns:p14="http://schemas.microsoft.com/office/powerpoint/2010/main" val="1024086991"/>
+      </p:ext>
+    </p:extLst>
+  </p:cSld>
+  <p:clrMapOvr>
+    <a:masterClrMapping/>
+  </p:clrMapOvr>
+</p:notes>
+</file>
+
+<file path=ppt/notesSlides/notesSlide24.xml><?xml version="1.0" encoding="utf-8"?>
+<p:notes xmlns:a="http://schemas.openxmlformats.org/drawingml/2006/main" xmlns:r="http://schemas.openxmlformats.org/officeDocument/2006/relationships" xmlns:p="http://schemas.openxmlformats.org/presentationml/2006/main">
+  <p:cSld>
+    <p:spTree>
+      <p:nvGrpSpPr>
+        <p:cNvPr id="1" name=""/>
+        <p:cNvGrpSpPr/>
+        <p:nvPr/>
+      </p:nvGrpSpPr>
+      <p:grpSpPr>
+        <a:xfrm>
+          <a:off x="0" y="0"/>
+          <a:ext cx="0" cy="0"/>
+          <a:chOff x="0" y="0"/>
+          <a:chExt cx="0" cy="0"/>
+        </a:xfrm>
+      </p:grpSpPr>
+      <p:sp>
+        <p:nvSpPr>
+          <p:cNvPr id="2" name="Slide Image Placeholder 1"/>
+          <p:cNvSpPr>
+            <a:spLocks noGrp="1" noRot="1" noChangeAspect="1"/>
+          </p:cNvSpPr>
+          <p:nvPr>
+            <p:ph type="sldImg"/>
+          </p:nvPr>
+        </p:nvSpPr>
+        <p:spPr/>
+      </p:sp>
+      <p:sp>
+        <p:nvSpPr>
+          <p:cNvPr id="3" name="Notes Placeholder 2"/>
+          <p:cNvSpPr>
+            <a:spLocks noGrp="1"/>
+          </p:cNvSpPr>
+          <p:nvPr>
+            <p:ph type="body" idx="1"/>
+          </p:nvPr>
+        </p:nvSpPr>
+        <p:spPr/>
+        <p:txBody>
+          <a:bodyPr/>
+          <a:lstStyle/>
+          <a:p>
+            <a:r>
+              <a:rPr lang="en-US" dirty="0"/>
+              <a:t>Cliffhanger: "Next week — where your code runs. We'll hunt cloud/container misconfigs, the #1 real-world breach cause."</a:t>
+            </a:r>
+            <a:endParaRPr lang="en-US" dirty="0"/>
+          </a:p>
+        </p:txBody>
+      </p:sp>
+      <p:sp>
+        <p:nvSpPr>
+          <p:cNvPr id="4" name="Slide Number Placeholder 3"/>
+          <p:cNvSpPr>
+            <a:spLocks noGrp="1"/>
+          </p:cNvSpPr>
+          <p:nvPr>
+            <p:ph type="sldNum" sz="quarter" idx="10"/>
+          </p:nvPr>
+        </p:nvSpPr>
+        <p:spPr/>
+        <p:txBody>
+          <a:bodyPr/>
+          <a:lstStyle/>
+          <a:p>
+            <a:fld id="{F7021451-1387-4CA6-816F-3879F97B5CBC}" type="slidenum">
+              <a:rPr lang="en-US"/>
+              <a:t>24</a:t>
+            </a:fld>
+            <a:endParaRPr lang="en-US"/>
+          </a:p>
+        </p:txBody>
+      </p:sp>
+    </p:spTree>
+    <p:extLst>
+      <p:ext uri="{BB962C8B-B14F-4D97-AF65-F5344CB8AC3E}">
+        <p14:creationId xmlns:p14="http://schemas.microsoft.com/office/powerpoint/2010/main" val="1024086991"/>
+      </p:ext>
+    </p:extLst>
+  </p:cSld>
+  <p:clrMapOvr>
+    <a:masterClrMapping/>
+  </p:clrMapOvr>
+</p:notes>
+</file>
+
 <file path=ppt/notesSlides/notesSlide3.xml><?xml version="1.0" encoding="utf-8"?>
 <p:notes xmlns:a="http://schemas.openxmlformats.org/drawingml/2006/main" xmlns:r="http://schemas.openxmlformats.org/officeDocument/2006/relationships" xmlns:p="http://schemas.openxmlformats.org/presentationml/2006/main">
   <p:cSld>
@@ -1576,7 +2114,8 @@
           <a:p>
             <a:r>
               <a:rPr lang="en-US" dirty="0"/>
-              <a:t>Spend time on xz (2024): a patient attacker became a trusted maintainer over years, then planted a backdoor caught only by luck (a 0.5s SSH delay). The lesson: trust in maintainers is itself attackable. ~5 min.</a:t>
+              <a:t>The 10/90 ratio made visual — land it hard, then the blast radius (one publish → thousands), then the A03:2025 promotion. The closing line is the week's thesis. ~2 min.
+Diagram: Why the supply chain is now the top-tier risk: you write about 10% of what you ship and dependencies are the other ~90%, so every bug in that 90% ships under your name; one poisoned package fans out to thousands of downstream victims (xz-utils 2024, event-stream 2018, SolarWinds 2020); and OWASP promoted this up the list to A03:2025 Software Supply Chain Failures. You can write perfect code and still be owned through a dependency you never read.</a:t>
             </a:r>
             <a:endParaRPr lang="en-US" dirty="0"/>
           </a:p>
@@ -1752,7 +2291,7 @@
           <a:p>
             <a:r>
               <a:rPr lang="en-US" dirty="0"/>
-              <a:t>Define dependency confusion clearly (it's the game): if your internal pkg "acme-utils" isn't scoped, a public "acme-utils" with a higher version number can get pulled instead. Transitive = you vet your 10 deps, but they pull 800 you never saw. Stress the install-time-execution point — it's why "I never imported it" isn't a defense, and it's exactly what the lab's PWNED.txt marker proves. ~5 min.</a:t>
+              <a:t>Spend time on xz (2024): a patient attacker became a trusted maintainer over years, then planted a backdoor caught only by luck (a 0.5s SSH delay). The lesson: trust in maintainers is itself attackable. ~5 min.</a:t>
             </a:r>
             <a:endParaRPr lang="en-US" dirty="0"/>
           </a:p>
@@ -1840,7 +2379,7 @@
           <a:p>
             <a:r>
               <a:rPr lang="en-US" dirty="0"/>
-              <a:t>Let them find the uncomfortable case themselves: merged mode with the private version numerically HIGHER also happens to be "safe" — but say explicitly that this is not a defense, just luck, since the attacker picks their own version number and will publish something higher. The only real fix in this sim is switching to single-index mode. Ties directly to Task 2 and Task 4's defense #2. ~4 min.</a:t>
+              <a:t>Define dependency confusion clearly (it's the game): if your internal pkg "acme-utils" isn't scoped, a public "acme-utils" with a higher version number can get pulled instead. Transitive = you vet your 10 deps, but they pull 800 you never saw. Stress the install-time-execution point — it's why "I never imported it" isn't a defense, and it's exactly what the lab's PWNED.txt marker proves. ~5 min.</a:t>
             </a:r>
             <a:endParaRPr lang="en-US" dirty="0"/>
           </a:p>
@@ -1928,7 +2467,8 @@
           <a:p>
             <a:r>
               <a:rPr lang="en-US" dirty="0"/>
-              <a:t>Hands-on tooling (ties to W2 SCA). This lab is pure Python — no npm project — so it's trivy fs + pip-audit, not npm audit/dependency-check. Run trivy live on the project — it lists CVEs + the fixed version. Q6 of the quiz asks for one real vulnerable dependency they found + remediation. ~4 min.</a:t>
+              <a:t>The four vectors as cards — the one to hammer is install-time execution (typosquat setup.py), because it kills the "I never imported it" defense and is exactly what the lab's PWNED.txt proves. Dependency confusion is the game. ~2 min.
+Diagram: The four supply-chain attack vectors as a taxonomy: typosquatting (a malicious package named like one you use — reqeusts for requests — whose setup.py runs at install time, before any import, so a single typo is enough to be owned); dependency confusion (CWE-1357, a public package with a higher version shadows your internal name and is pulled instead); malicious updates (a hijacked or compromised maintainer ships a bad version of a package you already trust); and transitive risk (the dependencies of your dependencies, code you never chose or reviewed but still ship). The trust boundary is bigger than your requirements.txt.</a:t>
             </a:r>
             <a:endParaRPr lang="en-US" dirty="0"/>
           </a:p>
@@ -2016,7 +2556,7 @@
           <a:p>
             <a:r>
               <a:rPr lang="en-US" dirty="0"/>
-              <a:t>SBOM = the food-label analogy: you can't manage what you can't list. When the next Log4Shell drops, an SBOM answers "are we affected?" in seconds. SLSA Build Track = levels L0–L3 of build provenance / tamper-resistance (L3 is the top; the old "1–4" numbering was v0.1 and is deprecated). ~5 min.</a:t>
+              <a:t>Let them find the uncomfortable case themselves: merged mode with the private version numerically HIGHER also happens to be "safe" — but say explicitly that this is not a defense, just luck, since the attacker picks their own version number and will publish something higher. The only real fix in this sim is switching to single-index mode. Ties directly to Task 2 and Task 4's defense #2. ~4 min.</a:t>
             </a:r>
             <a:endParaRPr lang="en-US" dirty="0"/>
           </a:p>
@@ -2391,7 +2931,7 @@
       </p:grpSpPr>
       <p:pic>
         <p:nvPicPr>
-          <p:cNvPr id="2" name="Image 0" descr="/private/tmp/claude-501/-Users-pop7-Library-CloudStorage-OneDrive-MonsterConnectCo--Ltd-Lecture-KOSEN69---software-security/e6d6556f-17de-403d-a9a0-cf2f846149b4/scratchpad/tree/slides/pptx/assets/logo-small.png">    </p:cNvPr>
+          <p:cNvPr id="2" name="Image 0" descr="/private/tmp/claude-501/-Users-pop7-Library-CloudStorage-OneDrive-MonsterConnectCo--Ltd-Lecture-KOSEN69---software-security/f63a82af-e1ad-40ed-89c4-03c6ca776e3f/scratchpad/tzfix/slides/pptx/assets/logo-small.png">    </p:cNvPr>
           <p:cNvPicPr>
             <a:picLocks noChangeAspect="1"/>
           </p:cNvPicPr>
@@ -2649,7 +3189,7 @@
                 <a:ea typeface="Arial" pitchFamily="34" charset="-122"/>
                 <a:cs typeface="Arial" pitchFamily="34" charset="-120"/>
               </a:rPr>
-              <a:t>Signing with Cosign (keyless)</a:t>
+              <a:t>SCA — find vulnerable deps</a:t>
             </a:r>
             <a:endParaRPr lang="en-US" sz="2600" dirty="0"/>
           </a:p>
@@ -2664,11 +3204,11 @@
         <p:spPr>
           <a:xfrm>
             <a:off x="457200" y="1325880"/>
-            <a:ext cx="8229600" cy="2907792"/>
+            <a:ext cx="8229600" cy="713232"/>
           </a:xfrm>
           <a:prstGeom prst="roundRect">
             <a:avLst>
-              <a:gd name="adj" fmla="val 1887"/>
+              <a:gd name="adj" fmla="val 7692"/>
             </a:avLst>
           </a:prstGeom>
           <a:solidFill>
@@ -2691,7 +3231,7 @@
         <p:spPr>
           <a:xfrm>
             <a:off x="640080" y="1399032"/>
-            <a:ext cx="7863840" cy="2761488"/>
+            <a:ext cx="7863840" cy="566928"/>
           </a:xfrm>
           <a:prstGeom prst="rect">
             <a:avLst/>
@@ -2717,7 +3257,7 @@
                 <a:ea typeface="Courier New" pitchFamily="34" charset="-122"/>
                 <a:cs typeface="Courier New" pitchFamily="34" charset="-120"/>
               </a:rPr>
-              <a:t>IMG=week12-supplychain:lab</a:t>
+              <a:t>docker run --rm -v "$PWD:/src" aquasec/trivy fs /src   # this lab's Python deps</a:t>
             </a:r>
             <a:endParaRPr lang="en-US" sz="1150" dirty="0"/>
           </a:p>
@@ -2734,192 +3274,51 @@
                 <a:ea typeface="Courier New" pitchFamily="34" charset="-122"/>
                 <a:cs typeface="Courier New" pitchFamily="34" charset="-120"/>
               </a:rPr>
-              <a:t>docker run --rm -v "$PWD:/src" -v /var/run/docker.sock:/var/run/docker.sock \</a:t>
+              <a:t>pip-audit                                                          # vs PyPI advisories</a:t>
             </a:r>
             <a:endParaRPr lang="en-US" sz="1150" dirty="0"/>
           </a:p>
-          <a:p>
-            <a:pPr indent="0" marL="0">
-              <a:buNone/>
-            </a:pPr>
-            <a:r>
-              <a:rPr lang="en-US" sz="1150" dirty="0">
-                <a:solidFill>
-                  <a:srgbClr val="9FE7D6"/>
-                </a:solidFill>
-                <a:latin typeface="Courier New" pitchFamily="34" charset="0"/>
-                <a:ea typeface="Courier New" pitchFamily="34" charset="-122"/>
-                <a:cs typeface="Courier New" pitchFamily="34" charset="-120"/>
-              </a:rPr>
-              <a:t>  aquasec/trivy:latest image --format cyclonedx \</a:t>
-            </a:r>
-            <a:endParaRPr lang="en-US" sz="1150" dirty="0"/>
-          </a:p>
-          <a:p>
-            <a:pPr indent="0" marL="0">
-              <a:buNone/>
-            </a:pPr>
-            <a:r>
-              <a:rPr lang="en-US" sz="1150" dirty="0">
-                <a:solidFill>
-                  <a:srgbClr val="9FE7D6"/>
-                </a:solidFill>
-                <a:latin typeface="Courier New" pitchFamily="34" charset="0"/>
-                <a:ea typeface="Courier New" pitchFamily="34" charset="-122"/>
-                <a:cs typeface="Courier New" pitchFamily="34" charset="-120"/>
-              </a:rPr>
-              <a:t>  --output /src/sbom.cdx.json "$IMG"                          # SBOM</a:t>
-            </a:r>
-            <a:endParaRPr lang="en-US" sz="1150" dirty="0"/>
-          </a:p>
-          <a:p>
-            <a:pPr indent="0" marL="0">
-              <a:buNone/>
-            </a:pPr>
-            <a:r>
-              <a:rPr lang="en-US" sz="1150" dirty="0">
-                <a:solidFill>
-                  <a:srgbClr val="9FE7D6"/>
-                </a:solidFill>
-                <a:latin typeface="Courier New" pitchFamily="34" charset="0"/>
-                <a:ea typeface="Courier New" pitchFamily="34" charset="-122"/>
-                <a:cs typeface="Courier New" pitchFamily="34" charset="-120"/>
-              </a:rPr>
-              <a:t>docker run --rm -e COSIGN_EXPERIMENTAL=1 \</a:t>
-            </a:r>
-            <a:endParaRPr lang="en-US" sz="1150" dirty="0"/>
-          </a:p>
-          <a:p>
-            <a:pPr indent="0" marL="0">
-              <a:buNone/>
-            </a:pPr>
-            <a:r>
-              <a:rPr lang="en-US" sz="1150" dirty="0">
-                <a:solidFill>
-                  <a:srgbClr val="9FE7D6"/>
-                </a:solidFill>
-                <a:latin typeface="Courier New" pitchFamily="34" charset="0"/>
-                <a:ea typeface="Courier New" pitchFamily="34" charset="-122"/>
-                <a:cs typeface="Courier New" pitchFamily="34" charset="-120"/>
-              </a:rPr>
-              <a:t>  -v /var/run/docker.sock:/var/run/docker.sock \</a:t>
-            </a:r>
-            <a:endParaRPr lang="en-US" sz="1150" dirty="0"/>
-          </a:p>
-          <a:p>
-            <a:pPr indent="0" marL="0">
-              <a:buNone/>
-            </a:pPr>
-            <a:r>
-              <a:rPr lang="en-US" sz="1150" dirty="0">
-                <a:solidFill>
-                  <a:srgbClr val="9FE7D6"/>
-                </a:solidFill>
-                <a:latin typeface="Courier New" pitchFamily="34" charset="0"/>
-                <a:ea typeface="Courier New" pitchFamily="34" charset="-122"/>
-                <a:cs typeface="Courier New" pitchFamily="34" charset="-120"/>
-              </a:rPr>
-              <a:t>  gcr.io/projectsigstore/cosign:latest sign --yes "$IMG"       # sign (OIDC)</a:t>
-            </a:r>
-            <a:endParaRPr lang="en-US" sz="1150" dirty="0"/>
-          </a:p>
-          <a:p>
-            <a:pPr indent="0" marL="0">
-              <a:buNone/>
-            </a:pPr>
-            <a:r>
-              <a:rPr lang="en-US" sz="1150" dirty="0">
-                <a:solidFill>
-                  <a:srgbClr val="9FE7D6"/>
-                </a:solidFill>
-                <a:latin typeface="Courier New" pitchFamily="34" charset="0"/>
-                <a:ea typeface="Courier New" pitchFamily="34" charset="-122"/>
-                <a:cs typeface="Courier New" pitchFamily="34" charset="-120"/>
-              </a:rPr>
-              <a:t>docker run --rm -e COSIGN_EXPERIMENTAL=1 \</a:t>
-            </a:r>
-            <a:endParaRPr lang="en-US" sz="1150" dirty="0"/>
-          </a:p>
-          <a:p>
-            <a:pPr indent="0" marL="0">
-              <a:buNone/>
-            </a:pPr>
-            <a:r>
-              <a:rPr lang="en-US" sz="1150" dirty="0">
-                <a:solidFill>
-                  <a:srgbClr val="9FE7D6"/>
-                </a:solidFill>
-                <a:latin typeface="Courier New" pitchFamily="34" charset="0"/>
-                <a:ea typeface="Courier New" pitchFamily="34" charset="-122"/>
-                <a:cs typeface="Courier New" pitchFamily="34" charset="-120"/>
-              </a:rPr>
-              <a:t>  -v /var/run/docker.sock:/var/run/docker.sock \</a:t>
-            </a:r>
-            <a:endParaRPr lang="en-US" sz="1150" dirty="0"/>
-          </a:p>
-          <a:p>
-            <a:pPr indent="0" marL="0">
-              <a:buNone/>
-            </a:pPr>
-            <a:r>
-              <a:rPr lang="en-US" sz="1150" dirty="0">
-                <a:solidFill>
-                  <a:srgbClr val="9FE7D6"/>
-                </a:solidFill>
-                <a:latin typeface="Courier New" pitchFamily="34" charset="0"/>
-                <a:ea typeface="Courier New" pitchFamily="34" charset="-122"/>
-                <a:cs typeface="Courier New" pitchFamily="34" charset="-120"/>
-              </a:rPr>
-              <a:t>  gcr.io/projectsigstore/cosign:latest verify \</a:t>
-            </a:r>
-            <a:endParaRPr lang="en-US" sz="1150" dirty="0"/>
-          </a:p>
-          <a:p>
-            <a:pPr indent="0" marL="0">
-              <a:buNone/>
-            </a:pPr>
-            <a:r>
-              <a:rPr lang="en-US" sz="1150" dirty="0">
-                <a:solidFill>
-                  <a:srgbClr val="9FE7D6"/>
-                </a:solidFill>
-                <a:latin typeface="Courier New" pitchFamily="34" charset="0"/>
-                <a:ea typeface="Courier New" pitchFamily="34" charset="-122"/>
-                <a:cs typeface="Courier New" pitchFamily="34" charset="-120"/>
-              </a:rPr>
-              <a:t>  --certificate-identity-regexp ".*" \</a:t>
-            </a:r>
-            <a:endParaRPr lang="en-US" sz="1150" dirty="0"/>
-          </a:p>
-          <a:p>
-            <a:pPr indent="0" marL="0">
-              <a:buNone/>
-            </a:pPr>
-            <a:r>
-              <a:rPr lang="en-US" sz="1150" dirty="0">
-                <a:solidFill>
-                  <a:srgbClr val="9FE7D6"/>
-                </a:solidFill>
-                <a:latin typeface="Courier New" pitchFamily="34" charset="0"/>
-                <a:ea typeface="Courier New" pitchFamily="34" charset="-122"/>
-                <a:cs typeface="Courier New" pitchFamily="34" charset="-120"/>
-              </a:rPr>
-              <a:t>  --certificate-oidc-issuer-regexp ".*" "$IMG"                 # verify</a:t>
-            </a:r>
-            <a:endParaRPr lang="en-US" sz="1150" dirty="0"/>
-          </a:p>
-        </p:txBody>
-      </p:sp>
-      <p:sp>
-        <p:nvSpPr>
-          <p:cNvPr id="7" name="Text 4"/>
+        </p:txBody>
+      </p:sp>
+      <p:sp>
+        <p:nvSpPr>
+          <p:cNvPr id="7" name="Shape 4"/>
           <p:cNvSpPr/>
           <p:nvPr/>
         </p:nvSpPr>
         <p:spPr>
           <a:xfrm>
-            <a:off x="457200" y="4800600"/>
-            <a:ext cx="6949440" cy="274320"/>
+            <a:off x="457200" y="2203704"/>
+            <a:ext cx="8229600" cy="1097280"/>
+          </a:xfrm>
+          <a:prstGeom prst="roundRect">
+            <a:avLst>
+              <a:gd name="adj" fmla="val 6667"/>
+            </a:avLst>
+          </a:prstGeom>
+          <a:solidFill>
+            <a:srgbClr val="F1F5F9"/>
+          </a:solidFill>
+          <a:ln/>
+          <a:effectLst>
+            <a:outerShdw sx="100000" sy="100000" kx="0" ky="0" algn="bl" rotWithShape="0" blurRad="76200" dist="25400" dir="5400000">
+              <a:srgbClr val="000000">
+                <a:alpha val="12000"/>
+              </a:srgbClr>
+            </a:outerShdw>
+          </a:effectLst>
+        </p:spPr>
+      </p:sp>
+      <p:sp>
+        <p:nvSpPr>
+          <p:cNvPr id="8" name="Text 5"/>
+          <p:cNvSpPr/>
+          <p:nvPr/>
+        </p:nvSpPr>
+        <p:spPr>
+          <a:xfrm>
+            <a:off x="731520" y="2313432"/>
+            <a:ext cx="7680960" cy="877824"/>
           </a:xfrm>
           <a:prstGeom prst="rect">
             <a:avLst/>
@@ -2928,21 +3327,87 @@
           <a:ln/>
         </p:spPr>
         <p:txBody>
-          <a:bodyPr wrap="square" lIns="0" tIns="0" rIns="0" bIns="0" rtlCol="0" anchor="ctr"/>
-          <a:lstStyle/>
-          <a:p>
-            <a:pPr indent="0" marL="0">
-              <a:buNone/>
-            </a:pPr>
-            <a:r>
-              <a:rPr lang="en-US" sz="900" dirty="0">
-                <a:solidFill>
-                  <a:srgbClr val="64748B"/>
+          <a:bodyPr wrap="square" lIns="0" tIns="0" rIns="0" bIns="0" rtlCol="0" anchor="t">
+            <a:normAutofit/>
+          </a:bodyPr>
+          <a:lstStyle/>
+          <a:p>
+            <a:pPr marL="342900" indent="-342900">
+              <a:spcAft>
+                <a:spcPts val="600"/>
+              </a:spcAft>
+              <a:buSzPct val="100000"/>
+              <a:buChar char="•"/>
+            </a:pPr>
+            <a:r>
+              <a:rPr lang="en-US" sz="1400" dirty="0">
+                <a:solidFill>
+                  <a:srgbClr val="1F2937"/>
                 </a:solidFill>
                 <a:latin typeface="Calibri" pitchFamily="34" charset="0"/>
                 <a:ea typeface="Calibri" pitchFamily="34" charset="-122"/>
                 <a:cs typeface="Calibri" pitchFamily="34" charset="-120"/>
               </a:rPr>
+              <a:t>Produces CVEs + fix versions</a:t>
+            </a:r>
+            <a:endParaRPr lang="en-US" sz="1400" dirty="0"/>
+          </a:p>
+          <a:p>
+            <a:pPr marL="342900" indent="-342900">
+              <a:spcAft>
+                <a:spcPts val="600"/>
+              </a:spcAft>
+              <a:buSzPct val="100000"/>
+              <a:buChar char="•"/>
+            </a:pPr>
+            <a:r>
+              <a:rPr lang="en-US" sz="1400" dirty="0">
+                <a:solidFill>
+                  <a:srgbClr val="1F2937"/>
+                </a:solidFill>
+                <a:latin typeface="Calibri" pitchFamily="34" charset="0"/>
+                <a:ea typeface="Calibri" pitchFamily="34" charset="-122"/>
+                <a:cs typeface="Calibri" pitchFamily="34" charset="-120"/>
+              </a:rPr>
+              <a:t>CWE-1104 (unmaintained), CWE-829 (untrusted inclusion), CWE-1395 (known-vulnerable 3rd-party dependency)</a:t>
+            </a:r>
+            <a:endParaRPr lang="en-US" sz="1400" dirty="0"/>
+          </a:p>
+        </p:txBody>
+      </p:sp>
+      <p:sp>
+        <p:nvSpPr>
+          <p:cNvPr id="9" name="Text 6"/>
+          <p:cNvSpPr/>
+          <p:nvPr/>
+        </p:nvSpPr>
+        <p:spPr>
+          <a:xfrm>
+            <a:off x="457200" y="4800600"/>
+            <a:ext cx="6949440" cy="274320"/>
+          </a:xfrm>
+          <a:prstGeom prst="rect">
+            <a:avLst/>
+          </a:prstGeom>
+          <a:noFill/>
+          <a:ln/>
+        </p:spPr>
+        <p:txBody>
+          <a:bodyPr wrap="square" lIns="0" tIns="0" rIns="0" bIns="0" rtlCol="0" anchor="ctr"/>
+          <a:lstStyle/>
+          <a:p>
+            <a:pPr indent="0" marL="0">
+              <a:buNone/>
+            </a:pPr>
+            <a:r>
+              <a:rPr lang="en-US" sz="900" dirty="0">
+                <a:solidFill>
+                  <a:srgbClr val="64748B"/>
+                </a:solidFill>
+                <a:latin typeface="Calibri" pitchFamily="34" charset="0"/>
+                <a:ea typeface="Calibri" pitchFamily="34" charset="-122"/>
+                <a:cs typeface="Calibri" pitchFamily="34" charset="-120"/>
+              </a:rPr>
               <a:t>Software Security · Week 12</a:t>
             </a:r>
             <a:endParaRPr lang="en-US" sz="900" dirty="0"/>
@@ -2951,7 +3416,7 @@
       </p:sp>
       <p:pic>
         <p:nvPicPr>
-          <p:cNvPr id="8" name="Image 1" descr="/private/tmp/claude-501/-Users-pop7-Library-CloudStorage-OneDrive-MonsterConnectCo--Ltd-Lecture-KOSEN69---software-security/e6d6556f-17de-403d-a9a0-cf2f846149b4/scratchpad/tree/slides/pptx/assets/logo-small.png">    </p:cNvPr>
+          <p:cNvPr id="10" name="Image 1" descr="/private/tmp/claude-501/-Users-pop7-Library-CloudStorage-OneDrive-MonsterConnectCo--Ltd-Lecture-KOSEN69---software-security/f63a82af-e1ad-40ed-89c4-03c6ca776e3f/scratchpad/tzfix/slides/pptx/assets/logo-small.png">    </p:cNvPr>
           <p:cNvPicPr>
             <a:picLocks noChangeAspect="1"/>
           </p:cNvPicPr>
@@ -3089,51 +3554,46 @@
                 <a:ea typeface="Arial" pitchFamily="34" charset="-122"/>
                 <a:cs typeface="Arial" pitchFamily="34" charset="-120"/>
               </a:rPr>
-              <a:t>Signing with Cosign (keyless) (cont.)</a:t>
+              <a:t>SCA — find vulnerable deps (cont.)</a:t>
             </a:r>
             <a:endParaRPr lang="en-US" sz="2600" dirty="0"/>
           </a:p>
         </p:txBody>
       </p:sp>
-      <p:sp>
-        <p:nvSpPr>
-          <p:cNvPr id="5" name="Shape 2"/>
+      <p:pic>
+        <p:nvPicPr>
+          <p:cNvPr id="5" name="Image 1" descr="Software Composition Analysis turns requirements.txt into a remediation worklist: the pinned-but-outdated deps (Flask 1.1.4, Werkzeug 1.0.1, urllib3 1.26.4, requests 2.25.1) feed two scanners — trivy fs (matches versions to the CVE database) and pip-audit (checks PyPI advisories) — neither of which reads your code, both read your dependency list. The output is one row per vulnerable package with the version that fixes it: Flask → 2.3.2 (CVE-2023-30861, HIGH), Werkzeug → 3.0.3 (CVE-2024-34069, HIGH), urllib3 → 1.26.17 (CVE-2023-43804, HIGH). The contrast: SAST reads the code you wrote and finds your bugs; SCA reads the versions you depend on and finds other people's known, already-patched bugs, so the fix is a version bump, not a code change.">    </p:cNvPr>
+          <p:cNvPicPr>
+            <a:picLocks noChangeAspect="1"/>
+          </p:cNvPicPr>
+          <p:nvPr/>
+        </p:nvPicPr>
+        <p:blipFill>
+          <a:blip r:embed="rId2"/>
+          <a:stretch>
+            <a:fillRect/>
+          </a:stretch>
+        </p:blipFill>
+        <p:spPr>
+          <a:xfrm>
+            <a:off x="1730438" y="1097280"/>
+            <a:ext cx="5683124" cy="3566160"/>
+          </a:xfrm>
+          <a:prstGeom prst="rect">
+            <a:avLst/>
+          </a:prstGeom>
+        </p:spPr>
+      </p:pic>
+      <p:sp>
+        <p:nvSpPr>
+          <p:cNvPr id="6" name="Text 2"/>
           <p:cNvSpPr/>
           <p:nvPr/>
         </p:nvSpPr>
         <p:spPr>
           <a:xfrm>
-            <a:off x="457200" y="1325880"/>
-            <a:ext cx="8229600" cy="2523744"/>
-          </a:xfrm>
-          <a:prstGeom prst="roundRect">
-            <a:avLst>
-              <a:gd name="adj" fmla="val 2899"/>
-            </a:avLst>
-          </a:prstGeom>
-          <a:solidFill>
-            <a:srgbClr val="F1F5F9"/>
-          </a:solidFill>
-          <a:ln/>
-          <a:effectLst>
-            <a:outerShdw sx="100000" sy="100000" kx="0" ky="0" algn="bl" rotWithShape="0" blurRad="76200" dist="25400" dir="5400000">
-              <a:srgbClr val="000000">
-                <a:alpha val="12000"/>
-              </a:srgbClr>
-            </a:outerShdw>
-          </a:effectLst>
-        </p:spPr>
-      </p:sp>
-      <p:sp>
-        <p:nvSpPr>
-          <p:cNvPr id="6" name="Text 3"/>
-          <p:cNvSpPr/>
-          <p:nvPr/>
-        </p:nvSpPr>
-        <p:spPr>
-          <a:xfrm>
-            <a:off x="731520" y="1435608"/>
-            <a:ext cx="7680960" cy="2304288"/>
+            <a:off x="457200" y="4800600"/>
+            <a:ext cx="6949440" cy="274320"/>
           </a:xfrm>
           <a:prstGeom prst="rect">
             <a:avLst/>
@@ -3142,129 +3602,21 @@
           <a:ln/>
         </p:spPr>
         <p:txBody>
-          <a:bodyPr wrap="square" lIns="0" tIns="0" rIns="0" bIns="0" rtlCol="0" anchor="t">
-            <a:normAutofit/>
-          </a:bodyPr>
-          <a:lstStyle/>
-          <a:p>
-            <a:pPr marL="342900" indent="-342900">
-              <a:spcAft>
-                <a:spcPts val="600"/>
-              </a:spcAft>
-              <a:buSzPct val="100000"/>
-              <a:buChar char="•"/>
-            </a:pPr>
-            <a:r>
-              <a:rPr lang="en-US" sz="1400" dirty="0">
-                <a:solidFill>
-                  <a:srgbClr val="1F2937"/>
+          <a:bodyPr wrap="square" lIns="0" tIns="0" rIns="0" bIns="0" rtlCol="0" anchor="ctr"/>
+          <a:lstStyle/>
+          <a:p>
+            <a:pPr indent="0" marL="0">
+              <a:buNone/>
+            </a:pPr>
+            <a:r>
+              <a:rPr lang="en-US" sz="900" dirty="0">
+                <a:solidFill>
+                  <a:srgbClr val="64748B"/>
                 </a:solidFill>
                 <a:latin typeface="Calibri" pitchFamily="34" charset="0"/>
                 <a:ea typeface="Calibri" pitchFamily="34" charset="-122"/>
                 <a:cs typeface="Calibri" pitchFamily="34" charset="-120"/>
               </a:rPr>
-              <a:t>Unsigned/tampered image → verification fails</a:t>
-            </a:r>
-            <a:endParaRPr lang="en-US" sz="1400" dirty="0"/>
-          </a:p>
-          <a:p>
-            <a:pPr marL="342900" indent="-342900">
-              <a:spcAft>
-                <a:spcPts val="600"/>
-              </a:spcAft>
-              <a:buSzPct val="100000"/>
-              <a:buChar char="•"/>
-            </a:pPr>
-            <a:r>
-              <a:rPr lang="en-US" sz="1400" dirty="0">
-                <a:solidFill>
-                  <a:srgbClr val="1F2937"/>
-                </a:solidFill>
-                <a:latin typeface="Calibri" pitchFamily="34" charset="0"/>
-                <a:ea typeface="Calibri" pitchFamily="34" charset="-122"/>
-                <a:cs typeface="Calibri" pitchFamily="34" charset="-120"/>
-              </a:rPr>
-              <a:t>Every step needs the docker-socket mount (trivy has to reach the local image, not just a local dir) — the SBOM step is a common copy-paste failure if it's dropped</a:t>
-            </a:r>
-            <a:endParaRPr lang="en-US" sz="1400" dirty="0"/>
-          </a:p>
-          <a:p>
-            <a:pPr marL="342900" indent="-342900">
-              <a:spcAft>
-                <a:spcPts val="600"/>
-              </a:spcAft>
-              <a:buSzPct val="100000"/>
-              <a:buChar char="•"/>
-            </a:pPr>
-            <a:r>
-              <a:rPr lang="en-US" sz="1400" dirty="0">
-                <a:solidFill>
-                  <a:srgbClr val="1F2937"/>
-                </a:solidFill>
-                <a:latin typeface="Calibri" pitchFamily="34" charset="0"/>
-                <a:ea typeface="Calibri" pitchFamily="34" charset="-122"/>
-                <a:cs typeface="Calibri" pitchFamily="34" charset="-120"/>
-              </a:rPr>
-              <a:t>cosign verify needs the two --certificate-*-regexp flags in keyless mode — without them it errors, it doesn't just "fail closed"</a:t>
-            </a:r>
-            <a:endParaRPr lang="en-US" sz="1400" dirty="0"/>
-          </a:p>
-          <a:p>
-            <a:pPr marL="342900" indent="-342900">
-              <a:spcAft>
-                <a:spcPts val="600"/>
-              </a:spcAft>
-              <a:buSzPct val="100000"/>
-              <a:buChar char="•"/>
-            </a:pPr>
-            <a:r>
-              <a:rPr lang="en-US" sz="1400" dirty="0">
-                <a:solidFill>
-                  <a:srgbClr val="1F2937"/>
-                </a:solidFill>
-                <a:latin typeface="Calibri" pitchFamily="34" charset="0"/>
-                <a:ea typeface="Calibri" pitchFamily="34" charset="-122"/>
-                <a:cs typeface="Calibri" pitchFamily="34" charset="-120"/>
-              </a:rPr>
-              <a:t>Keyless signing is backed by Fulcio (short-lived cert authority) + Rekor (public transparency log) — no long-lived private key sitting on disk to leak (CWE-321)</a:t>
-            </a:r>
-            <a:endParaRPr lang="en-US" sz="1400" dirty="0"/>
-          </a:p>
-        </p:txBody>
-      </p:sp>
-      <p:sp>
-        <p:nvSpPr>
-          <p:cNvPr id="7" name="Text 4"/>
-          <p:cNvSpPr/>
-          <p:nvPr/>
-        </p:nvSpPr>
-        <p:spPr>
-          <a:xfrm>
-            <a:off x="457200" y="4800600"/>
-            <a:ext cx="6949440" cy="274320"/>
-          </a:xfrm>
-          <a:prstGeom prst="rect">
-            <a:avLst/>
-          </a:prstGeom>
-          <a:noFill/>
-          <a:ln/>
-        </p:spPr>
-        <p:txBody>
-          <a:bodyPr wrap="square" lIns="0" tIns="0" rIns="0" bIns="0" rtlCol="0" anchor="ctr"/>
-          <a:lstStyle/>
-          <a:p>
-            <a:pPr indent="0" marL="0">
-              <a:buNone/>
-            </a:pPr>
-            <a:r>
-              <a:rPr lang="en-US" sz="900" dirty="0">
-                <a:solidFill>
-                  <a:srgbClr val="64748B"/>
-                </a:solidFill>
-                <a:latin typeface="Calibri" pitchFamily="34" charset="0"/>
-                <a:ea typeface="Calibri" pitchFamily="34" charset="-122"/>
-                <a:cs typeface="Calibri" pitchFamily="34" charset="-120"/>
-              </a:rPr>
               <a:t>Software Security · Week 12</a:t>
             </a:r>
             <a:endParaRPr lang="en-US" sz="900" dirty="0"/>
@@ -3273,14 +3625,14 @@
       </p:sp>
       <p:pic>
         <p:nvPicPr>
-          <p:cNvPr id="8" name="Image 1" descr="/private/tmp/claude-501/-Users-pop7-Library-CloudStorage-OneDrive-MonsterConnectCo--Ltd-Lecture-KOSEN69---software-security/e6d6556f-17de-403d-a9a0-cf2f846149b4/scratchpad/tree/slides/pptx/assets/logo-small.png">    </p:cNvPr>
+          <p:cNvPr id="7" name="Image 2" descr="/private/tmp/claude-501/-Users-pop7-Library-CloudStorage-OneDrive-MonsterConnectCo--Ltd-Lecture-KOSEN69---software-security/f63a82af-e1ad-40ed-89c4-03c6ca776e3f/scratchpad/tzfix/slides/pptx/assets/logo-small.png">    </p:cNvPr>
           <p:cNvPicPr>
             <a:picLocks noChangeAspect="1"/>
           </p:cNvPicPr>
           <p:nvPr/>
         </p:nvPicPr>
         <p:blipFill>
-          <a:blip r:embed="rId2"/>
+          <a:blip r:embed="rId3"/>
           <a:stretch>
             <a:fillRect/>
           </a:stretch>
@@ -3411,7 +3763,7 @@
                 <a:ea typeface="Arial" pitchFamily="34" charset="-122"/>
                 <a:cs typeface="Arial" pitchFamily="34" charset="-120"/>
               </a:rPr>
-              <a:t>Tooling — GitHub Advanced Security (GHAS)</a:t>
+              <a:t>Integrity: prove what you shipped</a:t>
             </a:r>
             <a:endParaRPr lang="en-US" sz="2600" dirty="0"/>
           </a:p>
@@ -3426,11 +3778,11 @@
         <p:spPr>
           <a:xfrm>
             <a:off x="457200" y="1325880"/>
-            <a:ext cx="8229600" cy="1719072"/>
+            <a:ext cx="8229600" cy="1207008"/>
           </a:xfrm>
           <a:prstGeom prst="roundRect">
             <a:avLst>
-              <a:gd name="adj" fmla="val 4255"/>
+              <a:gd name="adj" fmla="val 6061"/>
             </a:avLst>
           </a:prstGeom>
           <a:solidFill>
@@ -3455,7 +3807,7 @@
         <p:spPr>
           <a:xfrm>
             <a:off x="731520" y="1435608"/>
-            <a:ext cx="7680960" cy="1499616"/>
+            <a:ext cx="7680960" cy="987552"/>
           </a:xfrm>
           <a:prstGeom prst="rect">
             <a:avLst/>
@@ -3485,7 +3837,7 @@
                 <a:ea typeface="Calibri" pitchFamily="34" charset="-122"/>
                 <a:cs typeface="Calibri" pitchFamily="34" charset="-120"/>
               </a:rPr>
-              <a:t>Secret scanning + push protection — block secrets at push time (before they reach the remote)</a:t>
+              <a:t>SBOM (CycloneDX/SPDX) — ingredient list of the build</a:t>
             </a:r>
             <a:endParaRPr lang="en-US" sz="1400" dirty="0"/>
           </a:p>
@@ -3506,7 +3858,7 @@
                 <a:ea typeface="Calibri" pitchFamily="34" charset="-122"/>
                 <a:cs typeface="Calibri" pitchFamily="34" charset="-120"/>
               </a:rPr>
-              <a:t>CodeQL code scanning — semantic SAST queries</a:t>
+              <a:t>SLSA — levels of build provenance &amp; tamper-resistance</a:t>
             </a:r>
             <a:endParaRPr lang="en-US" sz="1400" dirty="0"/>
           </a:p>
@@ -3527,66 +3879,45 @@
                 <a:ea typeface="Calibri" pitchFamily="34" charset="-122"/>
                 <a:cs typeface="Calibri" pitchFamily="34" charset="-120"/>
               </a:rPr>
-              <a:t>Dependabot — alerts + auto-PRs for vulnerable deps</a:t>
+              <a:t>A08:2025 Software/Data Integrity Failures</a:t>
             </a:r>
             <a:endParaRPr lang="en-US" sz="1400" dirty="0"/>
           </a:p>
-          <a:p>
-            <a:pPr marL="342900" indent="-342900">
-              <a:spcAft>
-                <a:spcPts val="600"/>
-              </a:spcAft>
-              <a:buSzPct val="100000"/>
-              <a:buChar char="•"/>
-            </a:pPr>
-            <a:r>
-              <a:rPr lang="en-US" sz="1400" dirty="0">
-                <a:solidFill>
-                  <a:srgbClr val="1F2937"/>
+        </p:txBody>
+      </p:sp>
+      <p:sp>
+        <p:nvSpPr>
+          <p:cNvPr id="7" name="Text 4"/>
+          <p:cNvSpPr/>
+          <p:nvPr/>
+        </p:nvSpPr>
+        <p:spPr>
+          <a:xfrm>
+            <a:off x="457200" y="4800600"/>
+            <a:ext cx="6949440" cy="274320"/>
+          </a:xfrm>
+          <a:prstGeom prst="rect">
+            <a:avLst/>
+          </a:prstGeom>
+          <a:noFill/>
+          <a:ln/>
+        </p:spPr>
+        <p:txBody>
+          <a:bodyPr wrap="square" lIns="0" tIns="0" rIns="0" bIns="0" rtlCol="0" anchor="ctr"/>
+          <a:lstStyle/>
+          <a:p>
+            <a:pPr indent="0" marL="0">
+              <a:buNone/>
+            </a:pPr>
+            <a:r>
+              <a:rPr lang="en-US" sz="900" dirty="0">
+                <a:solidFill>
+                  <a:srgbClr val="64748B"/>
                 </a:solidFill>
                 <a:latin typeface="Calibri" pitchFamily="34" charset="0"/>
                 <a:ea typeface="Calibri" pitchFamily="34" charset="-122"/>
                 <a:cs typeface="Calibri" pitchFamily="34" charset="-120"/>
               </a:rPr>
-              <a:t>Native in the repo → results in the Security tab</a:t>
-            </a:r>
-            <a:endParaRPr lang="en-US" sz="1400" dirty="0"/>
-          </a:p>
-        </p:txBody>
-      </p:sp>
-      <p:sp>
-        <p:nvSpPr>
-          <p:cNvPr id="7" name="Text 4"/>
-          <p:cNvSpPr/>
-          <p:nvPr/>
-        </p:nvSpPr>
-        <p:spPr>
-          <a:xfrm>
-            <a:off x="457200" y="4800600"/>
-            <a:ext cx="6949440" cy="274320"/>
-          </a:xfrm>
-          <a:prstGeom prst="rect">
-            <a:avLst/>
-          </a:prstGeom>
-          <a:noFill/>
-          <a:ln/>
-        </p:spPr>
-        <p:txBody>
-          <a:bodyPr wrap="square" lIns="0" tIns="0" rIns="0" bIns="0" rtlCol="0" anchor="ctr"/>
-          <a:lstStyle/>
-          <a:p>
-            <a:pPr indent="0" marL="0">
-              <a:buNone/>
-            </a:pPr>
-            <a:r>
-              <a:rPr lang="en-US" sz="900" dirty="0">
-                <a:solidFill>
-                  <a:srgbClr val="64748B"/>
-                </a:solidFill>
-                <a:latin typeface="Calibri" pitchFamily="34" charset="0"/>
-                <a:ea typeface="Calibri" pitchFamily="34" charset="-122"/>
-                <a:cs typeface="Calibri" pitchFamily="34" charset="-120"/>
-              </a:rPr>
               <a:t>Software Security · Week 12</a:t>
             </a:r>
             <a:endParaRPr lang="en-US" sz="900" dirty="0"/>
@@ -3595,7 +3926,7 @@
       </p:sp>
       <p:pic>
         <p:nvPicPr>
-          <p:cNvPr id="8" name="Image 1" descr="/private/tmp/claude-501/-Users-pop7-Library-CloudStorage-OneDrive-MonsterConnectCo--Ltd-Lecture-KOSEN69---software-security/e6d6556f-17de-403d-a9a0-cf2f846149b4/scratchpad/tree/slides/pptx/assets/logo-small.png">    </p:cNvPr>
+          <p:cNvPr id="8" name="Image 1" descr="/private/tmp/claude-501/-Users-pop7-Library-CloudStorage-OneDrive-MonsterConnectCo--Ltd-Lecture-KOSEN69---software-security/f63a82af-e1ad-40ed-89c4-03c6ca776e3f/scratchpad/tzfix/slides/pptx/assets/logo-small.png">    </p:cNvPr>
           <p:cNvPicPr>
             <a:picLocks noChangeAspect="1"/>
           </p:cNvPicPr>
@@ -3733,51 +4064,46 @@
                 <a:ea typeface="Arial" pitchFamily="34" charset="-122"/>
                 <a:cs typeface="Arial" pitchFamily="34" charset="-120"/>
               </a:rPr>
-              <a:t>Defenses</a:t>
+              <a:t>Know what's in it, prove how it was built</a:t>
             </a:r>
             <a:endParaRPr lang="en-US" sz="2600" dirty="0"/>
           </a:p>
         </p:txBody>
       </p:sp>
-      <p:sp>
-        <p:nvSpPr>
-          <p:cNvPr id="5" name="Shape 2"/>
+      <p:pic>
+        <p:nvPicPr>
+          <p:cNvPr id="5" name="Image 1" descr="Two integrity controls side by side. Left, an SBOM (CycloneDX / SPDX): the build's itemized ingredient list — every component and version — so when the next Log4Shell drops you search it and answer &quot;are we affected?&quot; in seconds, not weeks. Right, SLSA: a ladder of build-provenance levels from L0 to L3 — L0 no guarantees, L1 provenance exists but is forgeable, L2 hosted build and signed (tamper-evident), L3 hardened builds whose provenance cannot be forged. SBOM knows what is in it; SLSA proves how it was built. Both map to OWASP A08:2025 Software or Data Integrity Failures.">    </p:cNvPr>
+          <p:cNvPicPr>
+            <a:picLocks noChangeAspect="1"/>
+          </p:cNvPicPr>
+          <p:nvPr/>
+        </p:nvPicPr>
+        <p:blipFill>
+          <a:blip r:embed="rId2"/>
+          <a:stretch>
+            <a:fillRect/>
+          </a:stretch>
+        </p:blipFill>
+        <p:spPr>
+          <a:xfrm>
+            <a:off x="2045049" y="1097280"/>
+            <a:ext cx="5053903" cy="3566160"/>
+          </a:xfrm>
+          <a:prstGeom prst="rect">
+            <a:avLst/>
+          </a:prstGeom>
+        </p:spPr>
+      </p:pic>
+      <p:sp>
+        <p:nvSpPr>
+          <p:cNvPr id="6" name="Text 2"/>
           <p:cNvSpPr/>
           <p:nvPr/>
         </p:nvSpPr>
         <p:spPr>
           <a:xfrm>
-            <a:off x="457200" y="1325880"/>
-            <a:ext cx="8229600" cy="2743200"/>
-          </a:xfrm>
-          <a:prstGeom prst="roundRect">
-            <a:avLst>
-              <a:gd name="adj" fmla="val 2667"/>
-            </a:avLst>
-          </a:prstGeom>
-          <a:solidFill>
-            <a:srgbClr val="F1F5F9"/>
-          </a:solidFill>
-          <a:ln/>
-          <a:effectLst>
-            <a:outerShdw sx="100000" sy="100000" kx="0" ky="0" algn="bl" rotWithShape="0" blurRad="76200" dist="25400" dir="5400000">
-              <a:srgbClr val="000000">
-                <a:alpha val="12000"/>
-              </a:srgbClr>
-            </a:outerShdw>
-          </a:effectLst>
-        </p:spPr>
-      </p:sp>
-      <p:sp>
-        <p:nvSpPr>
-          <p:cNvPr id="6" name="Text 3"/>
-          <p:cNvSpPr/>
-          <p:nvPr/>
-        </p:nvSpPr>
-        <p:spPr>
-          <a:xfrm>
-            <a:off x="731520" y="1435608"/>
-            <a:ext cx="7680960" cy="2523744"/>
+            <a:off x="457200" y="4800600"/>
+            <a:ext cx="6949440" cy="274320"/>
           </a:xfrm>
           <a:prstGeom prst="rect">
             <a:avLst/>
@@ -3786,171 +4112,21 @@
           <a:ln/>
         </p:spPr>
         <p:txBody>
-          <a:bodyPr wrap="square" lIns="0" tIns="0" rIns="0" bIns="0" rtlCol="0" anchor="t">
-            <a:normAutofit/>
-          </a:bodyPr>
-          <a:lstStyle/>
-          <a:p>
-            <a:pPr marL="342900" indent="-342900">
-              <a:spcAft>
-                <a:spcPts val="600"/>
-              </a:spcAft>
-              <a:buSzPct val="100000"/>
-              <a:buChar char="•"/>
-            </a:pPr>
-            <a:r>
-              <a:rPr lang="en-US" sz="1400" dirty="0">
-                <a:solidFill>
-                  <a:srgbClr val="1F2937"/>
+          <a:bodyPr wrap="square" lIns="0" tIns="0" rIns="0" bIns="0" rtlCol="0" anchor="ctr"/>
+          <a:lstStyle/>
+          <a:p>
+            <a:pPr indent="0" marL="0">
+              <a:buNone/>
+            </a:pPr>
+            <a:r>
+              <a:rPr lang="en-US" sz="900" dirty="0">
+                <a:solidFill>
+                  <a:srgbClr val="64748B"/>
                 </a:solidFill>
                 <a:latin typeface="Calibri" pitchFamily="34" charset="0"/>
                 <a:ea typeface="Calibri" pitchFamily="34" charset="-122"/>
                 <a:cs typeface="Calibri" pitchFamily="34" charset="-120"/>
               </a:rPr>
-              <a:t>pip install --require-hashes — a substituted package's hash won't match; install refuses</a:t>
-            </a:r>
-            <a:endParaRPr lang="en-US" sz="1400" dirty="0"/>
-          </a:p>
-          <a:p>
-            <a:pPr marL="342900" indent="-342900">
-              <a:spcAft>
-                <a:spcPts val="600"/>
-              </a:spcAft>
-              <a:buSzPct val="100000"/>
-              <a:buChar char="•"/>
-            </a:pPr>
-            <a:r>
-              <a:rPr lang="en-US" sz="1400" dirty="0">
-                <a:solidFill>
-                  <a:srgbClr val="1F2937"/>
-                </a:solidFill>
-                <a:latin typeface="Calibri" pitchFamily="34" charset="0"/>
-                <a:ea typeface="Calibri" pitchFamily="34" charset="-122"/>
-                <a:cs typeface="Calibri" pitchFamily="34" charset="-120"/>
-              </a:rPr>
-              <a:t>Single --index-url, not --extra-index-url — one trusted index; the resolver won't "shop around" and pick a higher-versioned public package over your internal one</a:t>
-            </a:r>
-            <a:endParaRPr lang="en-US" sz="1400" dirty="0"/>
-          </a:p>
-          <a:p>
-            <a:pPr marL="342900" indent="-342900">
-              <a:spcAft>
-                <a:spcPts val="600"/>
-              </a:spcAft>
-              <a:buSzPct val="100000"/>
-              <a:buChar char="•"/>
-            </a:pPr>
-            <a:r>
-              <a:rPr lang="en-US" sz="1400" dirty="0">
-                <a:solidFill>
-                  <a:srgbClr val="1F2937"/>
-                </a:solidFill>
-                <a:latin typeface="Calibri" pitchFamily="34" charset="0"/>
-                <a:ea typeface="Calibri" pitchFamily="34" charset="-122"/>
-                <a:cs typeface="Calibri" pitchFamily="34" charset="-120"/>
-              </a:rPr>
-              <a:t>Verify signatures before deploy (admission policy)</a:t>
-            </a:r>
-            <a:endParaRPr lang="en-US" sz="1400" dirty="0"/>
-          </a:p>
-          <a:p>
-            <a:pPr marL="342900" indent="-342900">
-              <a:spcAft>
-                <a:spcPts val="600"/>
-              </a:spcAft>
-              <a:buSzPct val="100000"/>
-              <a:buChar char="•"/>
-            </a:pPr>
-            <a:r>
-              <a:rPr lang="en-US" sz="1400" dirty="0">
-                <a:solidFill>
-                  <a:srgbClr val="1F2937"/>
-                </a:solidFill>
-                <a:latin typeface="Calibri" pitchFamily="34" charset="0"/>
-                <a:ea typeface="Calibri" pitchFamily="34" charset="-122"/>
-                <a:cs typeface="Calibri" pitchFamily="34" charset="-120"/>
-              </a:rPr>
-              <a:t>Generate + store SBOMs per release</a:t>
-            </a:r>
-            <a:endParaRPr lang="en-US" sz="1400" dirty="0"/>
-          </a:p>
-          <a:p>
-            <a:pPr marL="342900" indent="-342900">
-              <a:spcAft>
-                <a:spcPts val="600"/>
-              </a:spcAft>
-              <a:buSzPct val="100000"/>
-              <a:buChar char="•"/>
-            </a:pPr>
-            <a:r>
-              <a:rPr lang="en-US" sz="1400" dirty="0">
-                <a:solidFill>
-                  <a:srgbClr val="1F2937"/>
-                </a:solidFill>
-                <a:latin typeface="Calibri" pitchFamily="34" charset="0"/>
-                <a:ea typeface="Calibri" pitchFamily="34" charset="-122"/>
-                <a:cs typeface="Calibri" pitchFamily="34" charset="-120"/>
-              </a:rPr>
-              <a:t>2FA/MFA on dev/CI/cloud accounts; least privilege</a:t>
-            </a:r>
-            <a:endParaRPr lang="en-US" sz="1400" dirty="0"/>
-          </a:p>
-          <a:p>
-            <a:pPr marL="342900" indent="-342900">
-              <a:spcAft>
-                <a:spcPts val="600"/>
-              </a:spcAft>
-              <a:buSzPct val="100000"/>
-              <a:buChar char="•"/>
-            </a:pPr>
-            <a:r>
-              <a:rPr lang="en-US" sz="1400" dirty="0">
-                <a:solidFill>
-                  <a:srgbClr val="1F2937"/>
-                </a:solidFill>
-                <a:latin typeface="Calibri" pitchFamily="34" charset="0"/>
-                <a:ea typeface="Calibri" pitchFamily="34" charset="-122"/>
-                <a:cs typeface="Calibri" pitchFamily="34" charset="-120"/>
-              </a:rPr>
-              <a:t>Automate SCA in CI (next week)</a:t>
-            </a:r>
-            <a:endParaRPr lang="en-US" sz="1400" dirty="0"/>
-          </a:p>
-        </p:txBody>
-      </p:sp>
-      <p:sp>
-        <p:nvSpPr>
-          <p:cNvPr id="7" name="Text 4"/>
-          <p:cNvSpPr/>
-          <p:nvPr/>
-        </p:nvSpPr>
-        <p:spPr>
-          <a:xfrm>
-            <a:off x="457200" y="4800600"/>
-            <a:ext cx="6949440" cy="274320"/>
-          </a:xfrm>
-          <a:prstGeom prst="rect">
-            <a:avLst/>
-          </a:prstGeom>
-          <a:noFill/>
-          <a:ln/>
-        </p:spPr>
-        <p:txBody>
-          <a:bodyPr wrap="square" lIns="0" tIns="0" rIns="0" bIns="0" rtlCol="0" anchor="ctr"/>
-          <a:lstStyle/>
-          <a:p>
-            <a:pPr indent="0" marL="0">
-              <a:buNone/>
-            </a:pPr>
-            <a:r>
-              <a:rPr lang="en-US" sz="900" dirty="0">
-                <a:solidFill>
-                  <a:srgbClr val="64748B"/>
-                </a:solidFill>
-                <a:latin typeface="Calibri" pitchFamily="34" charset="0"/>
-                <a:ea typeface="Calibri" pitchFamily="34" charset="-122"/>
-                <a:cs typeface="Calibri" pitchFamily="34" charset="-120"/>
-              </a:rPr>
               <a:t>Software Security · Week 12</a:t>
             </a:r>
             <a:endParaRPr lang="en-US" sz="900" dirty="0"/>
@@ -3959,14 +4135,14 @@
       </p:sp>
       <p:pic>
         <p:nvPicPr>
-          <p:cNvPr id="8" name="Image 1" descr="/private/tmp/claude-501/-Users-pop7-Library-CloudStorage-OneDrive-MonsterConnectCo--Ltd-Lecture-KOSEN69---software-security/e6d6556f-17de-403d-a9a0-cf2f846149b4/scratchpad/tree/slides/pptx/assets/logo-small.png">    </p:cNvPr>
+          <p:cNvPr id="7" name="Image 2" descr="/private/tmp/claude-501/-Users-pop7-Library-CloudStorage-OneDrive-MonsterConnectCo--Ltd-Lecture-KOSEN69---software-security/f63a82af-e1ad-40ed-89c4-03c6ca776e3f/scratchpad/tzfix/slides/pptx/assets/logo-small.png">    </p:cNvPr>
           <p:cNvPicPr>
             <a:picLocks noChangeAspect="1"/>
           </p:cNvPicPr>
           <p:nvPr/>
         </p:nvPicPr>
         <p:blipFill>
-          <a:blip r:embed="rId2"/>
+          <a:blip r:embed="rId3"/>
           <a:stretch>
             <a:fillRect/>
           </a:stretch>
@@ -4097,15 +4273,309 @@
                 <a:ea typeface="Arial" pitchFamily="34" charset="-122"/>
                 <a:cs typeface="Arial" pitchFamily="34" charset="-120"/>
               </a:rPr>
-              <a:t>The whole journey, one dependency</a:t>
+              <a:t>Signing with Cosign (keyless)</a:t>
             </a:r>
             <a:endParaRPr lang="en-US" sz="2600" dirty="0"/>
+          </a:p>
+        </p:txBody>
+      </p:sp>
+      <p:sp>
+        <p:nvSpPr>
+          <p:cNvPr id="5" name="Shape 2"/>
+          <p:cNvSpPr/>
+          <p:nvPr/>
+        </p:nvSpPr>
+        <p:spPr>
+          <a:xfrm>
+            <a:off x="457200" y="1325880"/>
+            <a:ext cx="8229600" cy="2907792"/>
+          </a:xfrm>
+          <a:prstGeom prst="roundRect">
+            <a:avLst>
+              <a:gd name="adj" fmla="val 1887"/>
+            </a:avLst>
+          </a:prstGeom>
+          <a:solidFill>
+            <a:srgbClr val="0A1020"/>
+          </a:solidFill>
+          <a:ln w="12700">
+            <a:solidFill>
+              <a:srgbClr val="E8EDF3"/>
+            </a:solidFill>
+            <a:prstDash val="solid"/>
+          </a:ln>
+        </p:spPr>
+      </p:sp>
+      <p:sp>
+        <p:nvSpPr>
+          <p:cNvPr id="6" name="Text 3"/>
+          <p:cNvSpPr/>
+          <p:nvPr/>
+        </p:nvSpPr>
+        <p:spPr>
+          <a:xfrm>
+            <a:off x="640080" y="1399032"/>
+            <a:ext cx="7863840" cy="2761488"/>
+          </a:xfrm>
+          <a:prstGeom prst="rect">
+            <a:avLst/>
+          </a:prstGeom>
+          <a:noFill/>
+          <a:ln/>
+        </p:spPr>
+        <p:txBody>
+          <a:bodyPr wrap="square" lIns="0" tIns="0" rIns="0" bIns="0" rtlCol="0" anchor="t">
+            <a:normAutofit/>
+          </a:bodyPr>
+          <a:lstStyle/>
+          <a:p>
+            <a:pPr indent="0" marL="0">
+              <a:buNone/>
+            </a:pPr>
+            <a:r>
+              <a:rPr lang="en-US" sz="1150" dirty="0">
+                <a:solidFill>
+                  <a:srgbClr val="9FE7D6"/>
+                </a:solidFill>
+                <a:latin typeface="Courier New" pitchFamily="34" charset="0"/>
+                <a:ea typeface="Courier New" pitchFamily="34" charset="-122"/>
+                <a:cs typeface="Courier New" pitchFamily="34" charset="-120"/>
+              </a:rPr>
+              <a:t>IMG=week12-supplychain:lab</a:t>
+            </a:r>
+            <a:endParaRPr lang="en-US" sz="1150" dirty="0"/>
+          </a:p>
+          <a:p>
+            <a:pPr indent="0" marL="0">
+              <a:buNone/>
+            </a:pPr>
+            <a:r>
+              <a:rPr lang="en-US" sz="1150" dirty="0">
+                <a:solidFill>
+                  <a:srgbClr val="9FE7D6"/>
+                </a:solidFill>
+                <a:latin typeface="Courier New" pitchFamily="34" charset="0"/>
+                <a:ea typeface="Courier New" pitchFamily="34" charset="-122"/>
+                <a:cs typeface="Courier New" pitchFamily="34" charset="-120"/>
+              </a:rPr>
+              <a:t>docker run --rm -v "$PWD:/src" -v /var/run/docker.sock:/var/run/docker.sock \</a:t>
+            </a:r>
+            <a:endParaRPr lang="en-US" sz="1150" dirty="0"/>
+          </a:p>
+          <a:p>
+            <a:pPr indent="0" marL="0">
+              <a:buNone/>
+            </a:pPr>
+            <a:r>
+              <a:rPr lang="en-US" sz="1150" dirty="0">
+                <a:solidFill>
+                  <a:srgbClr val="9FE7D6"/>
+                </a:solidFill>
+                <a:latin typeface="Courier New" pitchFamily="34" charset="0"/>
+                <a:ea typeface="Courier New" pitchFamily="34" charset="-122"/>
+                <a:cs typeface="Courier New" pitchFamily="34" charset="-120"/>
+              </a:rPr>
+              <a:t>  aquasec/trivy:latest image --format cyclonedx \</a:t>
+            </a:r>
+            <a:endParaRPr lang="en-US" sz="1150" dirty="0"/>
+          </a:p>
+          <a:p>
+            <a:pPr indent="0" marL="0">
+              <a:buNone/>
+            </a:pPr>
+            <a:r>
+              <a:rPr lang="en-US" sz="1150" dirty="0">
+                <a:solidFill>
+                  <a:srgbClr val="9FE7D6"/>
+                </a:solidFill>
+                <a:latin typeface="Courier New" pitchFamily="34" charset="0"/>
+                <a:ea typeface="Courier New" pitchFamily="34" charset="-122"/>
+                <a:cs typeface="Courier New" pitchFamily="34" charset="-120"/>
+              </a:rPr>
+              <a:t>  --output /src/sbom.cdx.json "$IMG"                          # SBOM</a:t>
+            </a:r>
+            <a:endParaRPr lang="en-US" sz="1150" dirty="0"/>
+          </a:p>
+          <a:p>
+            <a:pPr indent="0" marL="0">
+              <a:buNone/>
+            </a:pPr>
+            <a:r>
+              <a:rPr lang="en-US" sz="1150" dirty="0">
+                <a:solidFill>
+                  <a:srgbClr val="9FE7D6"/>
+                </a:solidFill>
+                <a:latin typeface="Courier New" pitchFamily="34" charset="0"/>
+                <a:ea typeface="Courier New" pitchFamily="34" charset="-122"/>
+                <a:cs typeface="Courier New" pitchFamily="34" charset="-120"/>
+              </a:rPr>
+              <a:t>docker run --rm -e COSIGN_EXPERIMENTAL=1 \</a:t>
+            </a:r>
+            <a:endParaRPr lang="en-US" sz="1150" dirty="0"/>
+          </a:p>
+          <a:p>
+            <a:pPr indent="0" marL="0">
+              <a:buNone/>
+            </a:pPr>
+            <a:r>
+              <a:rPr lang="en-US" sz="1150" dirty="0">
+                <a:solidFill>
+                  <a:srgbClr val="9FE7D6"/>
+                </a:solidFill>
+                <a:latin typeface="Courier New" pitchFamily="34" charset="0"/>
+                <a:ea typeface="Courier New" pitchFamily="34" charset="-122"/>
+                <a:cs typeface="Courier New" pitchFamily="34" charset="-120"/>
+              </a:rPr>
+              <a:t>  -v /var/run/docker.sock:/var/run/docker.sock \</a:t>
+            </a:r>
+            <a:endParaRPr lang="en-US" sz="1150" dirty="0"/>
+          </a:p>
+          <a:p>
+            <a:pPr indent="0" marL="0">
+              <a:buNone/>
+            </a:pPr>
+            <a:r>
+              <a:rPr lang="en-US" sz="1150" dirty="0">
+                <a:solidFill>
+                  <a:srgbClr val="9FE7D6"/>
+                </a:solidFill>
+                <a:latin typeface="Courier New" pitchFamily="34" charset="0"/>
+                <a:ea typeface="Courier New" pitchFamily="34" charset="-122"/>
+                <a:cs typeface="Courier New" pitchFamily="34" charset="-120"/>
+              </a:rPr>
+              <a:t>  gcr.io/projectsigstore/cosign:latest sign --yes "$IMG"       # sign (OIDC)</a:t>
+            </a:r>
+            <a:endParaRPr lang="en-US" sz="1150" dirty="0"/>
+          </a:p>
+          <a:p>
+            <a:pPr indent="0" marL="0">
+              <a:buNone/>
+            </a:pPr>
+            <a:r>
+              <a:rPr lang="en-US" sz="1150" dirty="0">
+                <a:solidFill>
+                  <a:srgbClr val="9FE7D6"/>
+                </a:solidFill>
+                <a:latin typeface="Courier New" pitchFamily="34" charset="0"/>
+                <a:ea typeface="Courier New" pitchFamily="34" charset="-122"/>
+                <a:cs typeface="Courier New" pitchFamily="34" charset="-120"/>
+              </a:rPr>
+              <a:t>docker run --rm -e COSIGN_EXPERIMENTAL=1 \</a:t>
+            </a:r>
+            <a:endParaRPr lang="en-US" sz="1150" dirty="0"/>
+          </a:p>
+          <a:p>
+            <a:pPr indent="0" marL="0">
+              <a:buNone/>
+            </a:pPr>
+            <a:r>
+              <a:rPr lang="en-US" sz="1150" dirty="0">
+                <a:solidFill>
+                  <a:srgbClr val="9FE7D6"/>
+                </a:solidFill>
+                <a:latin typeface="Courier New" pitchFamily="34" charset="0"/>
+                <a:ea typeface="Courier New" pitchFamily="34" charset="-122"/>
+                <a:cs typeface="Courier New" pitchFamily="34" charset="-120"/>
+              </a:rPr>
+              <a:t>  -v /var/run/docker.sock:/var/run/docker.sock \</a:t>
+            </a:r>
+            <a:endParaRPr lang="en-US" sz="1150" dirty="0"/>
+          </a:p>
+          <a:p>
+            <a:pPr indent="0" marL="0">
+              <a:buNone/>
+            </a:pPr>
+            <a:r>
+              <a:rPr lang="en-US" sz="1150" dirty="0">
+                <a:solidFill>
+                  <a:srgbClr val="9FE7D6"/>
+                </a:solidFill>
+                <a:latin typeface="Courier New" pitchFamily="34" charset="0"/>
+                <a:ea typeface="Courier New" pitchFamily="34" charset="-122"/>
+                <a:cs typeface="Courier New" pitchFamily="34" charset="-120"/>
+              </a:rPr>
+              <a:t>  gcr.io/projectsigstore/cosign:latest verify \</a:t>
+            </a:r>
+            <a:endParaRPr lang="en-US" sz="1150" dirty="0"/>
+          </a:p>
+          <a:p>
+            <a:pPr indent="0" marL="0">
+              <a:buNone/>
+            </a:pPr>
+            <a:r>
+              <a:rPr lang="en-US" sz="1150" dirty="0">
+                <a:solidFill>
+                  <a:srgbClr val="9FE7D6"/>
+                </a:solidFill>
+                <a:latin typeface="Courier New" pitchFamily="34" charset="0"/>
+                <a:ea typeface="Courier New" pitchFamily="34" charset="-122"/>
+                <a:cs typeface="Courier New" pitchFamily="34" charset="-120"/>
+              </a:rPr>
+              <a:t>  --certificate-identity-regexp ".*" \</a:t>
+            </a:r>
+            <a:endParaRPr lang="en-US" sz="1150" dirty="0"/>
+          </a:p>
+          <a:p>
+            <a:pPr indent="0" marL="0">
+              <a:buNone/>
+            </a:pPr>
+            <a:r>
+              <a:rPr lang="en-US" sz="1150" dirty="0">
+                <a:solidFill>
+                  <a:srgbClr val="9FE7D6"/>
+                </a:solidFill>
+                <a:latin typeface="Courier New" pitchFamily="34" charset="0"/>
+                <a:ea typeface="Courier New" pitchFamily="34" charset="-122"/>
+                <a:cs typeface="Courier New" pitchFamily="34" charset="-120"/>
+              </a:rPr>
+              <a:t>  --certificate-oidc-issuer-regexp ".*" "$IMG"                 # verify</a:t>
+            </a:r>
+            <a:endParaRPr lang="en-US" sz="1150" dirty="0"/>
+          </a:p>
+        </p:txBody>
+      </p:sp>
+      <p:sp>
+        <p:nvSpPr>
+          <p:cNvPr id="7" name="Text 4"/>
+          <p:cNvSpPr/>
+          <p:nvPr/>
+        </p:nvSpPr>
+        <p:spPr>
+          <a:xfrm>
+            <a:off x="457200" y="4800600"/>
+            <a:ext cx="6949440" cy="274320"/>
+          </a:xfrm>
+          <a:prstGeom prst="rect">
+            <a:avLst/>
+          </a:prstGeom>
+          <a:noFill/>
+          <a:ln/>
+        </p:spPr>
+        <p:txBody>
+          <a:bodyPr wrap="square" lIns="0" tIns="0" rIns="0" bIns="0" rtlCol="0" anchor="ctr"/>
+          <a:lstStyle/>
+          <a:p>
+            <a:pPr indent="0" marL="0">
+              <a:buNone/>
+            </a:pPr>
+            <a:r>
+              <a:rPr lang="en-US" sz="900" dirty="0">
+                <a:solidFill>
+                  <a:srgbClr val="64748B"/>
+                </a:solidFill>
+                <a:latin typeface="Calibri" pitchFamily="34" charset="0"/>
+                <a:ea typeface="Calibri" pitchFamily="34" charset="-122"/>
+                <a:cs typeface="Calibri" pitchFamily="34" charset="-120"/>
+              </a:rPr>
+              <a:t>Software Security · Week 12</a:t>
+            </a:r>
+            <a:endParaRPr lang="en-US" sz="900" dirty="0"/>
           </a:p>
         </p:txBody>
       </p:sp>
       <p:pic>
         <p:nvPicPr>
-          <p:cNvPr id="5" name="Image 1" descr="Six hops a dependency crosses from a public registry into production, each with its own attack and the control that answers it: registry (typosquatting → one trusted index), resolver (dependency confusion → scope the namespace), fetch (compromised maintainer → lockfile with hashes), build (stale pins → SCA in CI), image (no inventory → SBOM), deploy (unsigned image → Sigstore keyless gate). &quot;We scanned our code&quot; covers none of this — SAST reads the code you wrote, all six hops are code you didn't.">    </p:cNvPr>
+          <p:cNvPr id="8" name="Image 1" descr="/private/tmp/claude-501/-Users-pop7-Library-CloudStorage-OneDrive-MonsterConnectCo--Ltd-Lecture-KOSEN69---software-security/f63a82af-e1ad-40ed-89c4-03c6ca776e3f/scratchpad/tzfix/slides/pptx/assets/logo-small.png">    </p:cNvPr>
           <p:cNvPicPr>
             <a:picLocks noChangeAspect="1"/>
           </p:cNvPicPr>
@@ -4113,69 +4583,6 @@
         </p:nvPicPr>
         <p:blipFill>
           <a:blip r:embed="rId2"/>
-          <a:stretch>
-            <a:fillRect/>
-          </a:stretch>
-        </p:blipFill>
-        <p:spPr>
-          <a:xfrm>
-            <a:off x="2778833" y="1097280"/>
-            <a:ext cx="3586333" cy="3566160"/>
-          </a:xfrm>
-          <a:prstGeom prst="rect">
-            <a:avLst/>
-          </a:prstGeom>
-        </p:spPr>
-      </p:pic>
-      <p:sp>
-        <p:nvSpPr>
-          <p:cNvPr id="6" name="Text 2"/>
-          <p:cNvSpPr/>
-          <p:nvPr/>
-        </p:nvSpPr>
-        <p:spPr>
-          <a:xfrm>
-            <a:off x="457200" y="4800600"/>
-            <a:ext cx="6949440" cy="274320"/>
-          </a:xfrm>
-          <a:prstGeom prst="rect">
-            <a:avLst/>
-          </a:prstGeom>
-          <a:noFill/>
-          <a:ln/>
-        </p:spPr>
-        <p:txBody>
-          <a:bodyPr wrap="square" lIns="0" tIns="0" rIns="0" bIns="0" rtlCol="0" anchor="ctr"/>
-          <a:lstStyle/>
-          <a:p>
-            <a:pPr indent="0" marL="0">
-              <a:buNone/>
-            </a:pPr>
-            <a:r>
-              <a:rPr lang="en-US" sz="900" dirty="0">
-                <a:solidFill>
-                  <a:srgbClr val="64748B"/>
-                </a:solidFill>
-                <a:latin typeface="Calibri" pitchFamily="34" charset="0"/>
-                <a:ea typeface="Calibri" pitchFamily="34" charset="-122"/>
-                <a:cs typeface="Calibri" pitchFamily="34" charset="-120"/>
-              </a:rPr>
-              <a:t>Software Security · Week 12</a:t>
-            </a:r>
-            <a:endParaRPr lang="en-US" sz="900" dirty="0"/>
-          </a:p>
-        </p:txBody>
-      </p:sp>
-      <p:pic>
-        <p:nvPicPr>
-          <p:cNvPr id="7" name="Image 2" descr="/private/tmp/claude-501/-Users-pop7-Library-CloudStorage-OneDrive-MonsterConnectCo--Ltd-Lecture-KOSEN69---software-security/e6d6556f-17de-403d-a9a0-cf2f846149b4/scratchpad/tree/slides/pptx/assets/logo-small.png">    </p:cNvPr>
-          <p:cNvPicPr>
-            <a:picLocks noChangeAspect="1"/>
-          </p:cNvPicPr>
-          <p:nvPr/>
-        </p:nvPicPr>
-        <p:blipFill>
-          <a:blip r:embed="rId3"/>
           <a:stretch>
             <a:fillRect/>
           </a:stretch>
@@ -4306,7 +4713,7 @@
                 <a:ea typeface="Arial" pitchFamily="34" charset="-122"/>
                 <a:cs typeface="Arial" pitchFamily="34" charset="-120"/>
               </a:rPr>
-              <a:t>📦 Game — Dependency Confusion Heist</a:t>
+              <a:t>Signing with Cosign (keyless) (cont.)</a:t>
             </a:r>
             <a:endParaRPr lang="en-US" sz="2600" dirty="0"/>
           </a:p>
@@ -4320,16 +4727,25 @@
         </p:nvSpPr>
         <p:spPr>
           <a:xfrm>
-            <a:off x="502920" y="1325880"/>
-            <a:ext cx="384048" cy="384048"/>
-          </a:xfrm>
-          <a:prstGeom prst="ellipse">
-            <a:avLst/>
+            <a:off x="457200" y="1325880"/>
+            <a:ext cx="8229600" cy="2523744"/>
+          </a:xfrm>
+          <a:prstGeom prst="roundRect">
+            <a:avLst>
+              <a:gd name="adj" fmla="val 2899"/>
+            </a:avLst>
           </a:prstGeom>
           <a:solidFill>
-            <a:srgbClr val="E35205"/>
+            <a:srgbClr val="F1F5F9"/>
           </a:solidFill>
           <a:ln/>
+          <a:effectLst>
+            <a:outerShdw sx="100000" sy="100000" kx="0" ky="0" algn="bl" rotWithShape="0" blurRad="76200" dist="25400" dir="5400000">
+              <a:srgbClr val="000000">
+                <a:alpha val="12000"/>
+              </a:srgbClr>
+            </a:outerShdw>
+          </a:effectLst>
         </p:spPr>
       </p:sp>
       <p:sp>
@@ -4340,8 +4756,8 @@
         </p:nvSpPr>
         <p:spPr>
           <a:xfrm>
-            <a:off x="502920" y="1325880"/>
-            <a:ext cx="384048" cy="384048"/>
+            <a:off x="731520" y="1435608"/>
+            <a:ext cx="7680960" cy="2304288"/>
           </a:xfrm>
           <a:prstGeom prst="rect">
             <a:avLst/>
@@ -4350,55 +4766,20 @@
           <a:ln/>
         </p:spPr>
         <p:txBody>
-          <a:bodyPr wrap="square" lIns="0" tIns="0" rIns="0" bIns="0" rtlCol="0" anchor="ctr"/>
-          <a:lstStyle/>
-          <a:p>
-            <a:pPr algn="ctr" indent="0" marL="0">
-              <a:buNone/>
-            </a:pPr>
-            <a:r>
-              <a:rPr lang="en-US" sz="1500" b="1" dirty="0">
-                <a:solidFill>
-                  <a:srgbClr val="0E1726"/>
-                </a:solidFill>
-                <a:latin typeface="Arial" pitchFamily="34" charset="0"/>
-                <a:ea typeface="Arial" pitchFamily="34" charset="-122"/>
-                <a:cs typeface="Arial" pitchFamily="34" charset="-120"/>
-              </a:rPr>
-              <a:t>1</a:t>
-            </a:r>
-            <a:endParaRPr lang="en-US" sz="1500" dirty="0"/>
-          </a:p>
-        </p:txBody>
-      </p:sp>
-      <p:sp>
-        <p:nvSpPr>
-          <p:cNvPr id="7" name="Text 4"/>
-          <p:cNvSpPr/>
-          <p:nvPr/>
-        </p:nvSpPr>
-        <p:spPr>
-          <a:xfrm>
-            <a:off x="1051560" y="1325880"/>
-            <a:ext cx="7589520" cy="658368"/>
-          </a:xfrm>
-          <a:prstGeom prst="rect">
-            <a:avLst/>
-          </a:prstGeom>
-          <a:noFill/>
-          <a:ln/>
-        </p:spPr>
-        <p:txBody>
-          <a:bodyPr wrap="square" lIns="0" tIns="0" rIns="0" bIns="0" rtlCol="0" anchor="ctr">
+          <a:bodyPr wrap="square" lIns="0" tIns="0" rIns="0" bIns="0" rtlCol="0" anchor="t">
             <a:normAutofit/>
           </a:bodyPr>
           <a:lstStyle/>
           <a:p>
-            <a:pPr indent="0" marL="0">
-              <a:buNone/>
-            </a:pPr>
-            <a:r>
-              <a:rPr lang="en-US" sz="1350" dirty="0">
+            <a:pPr marL="342900" indent="-342900">
+              <a:spcAft>
+                <a:spcPts val="600"/>
+              </a:spcAft>
+              <a:buSzPct val="100000"/>
+              <a:buChar char="•"/>
+            </a:pPr>
+            <a:r>
+              <a:rPr lang="en-US" sz="1400" dirty="0">
                 <a:solidFill>
                   <a:srgbClr val="1F2937"/>
                 </a:solidFill>
@@ -4406,99 +4787,20 @@
                 <a:ea typeface="Calibri" pitchFamily="34" charset="-122"/>
                 <a:cs typeface="Calibri" pitchFamily="34" charset="-120"/>
               </a:rPr>
-              <a:t>Attack: no live registry in this lab — use the resolver simulation to watch a higher-version public pkg beat the private one</a:t>
-            </a:r>
-            <a:endParaRPr lang="en-US" sz="1350" dirty="0"/>
-          </a:p>
-        </p:txBody>
-      </p:sp>
-      <p:sp>
-        <p:nvSpPr>
-          <p:cNvPr id="8" name="Shape 5"/>
-          <p:cNvSpPr/>
-          <p:nvPr/>
-        </p:nvSpPr>
-        <p:spPr>
-          <a:xfrm>
-            <a:off x="502920" y="2057400"/>
-            <a:ext cx="384048" cy="384048"/>
-          </a:xfrm>
-          <a:prstGeom prst="ellipse">
-            <a:avLst/>
-          </a:prstGeom>
-          <a:solidFill>
-            <a:srgbClr val="E35205"/>
-          </a:solidFill>
-          <a:ln/>
-        </p:spPr>
-      </p:sp>
-      <p:sp>
-        <p:nvSpPr>
-          <p:cNvPr id="9" name="Text 6"/>
-          <p:cNvSpPr/>
-          <p:nvPr/>
-        </p:nvSpPr>
-        <p:spPr>
-          <a:xfrm>
-            <a:off x="502920" y="2057400"/>
-            <a:ext cx="384048" cy="384048"/>
-          </a:xfrm>
-          <a:prstGeom prst="rect">
-            <a:avLst/>
-          </a:prstGeom>
-          <a:noFill/>
-          <a:ln/>
-        </p:spPr>
-        <p:txBody>
-          <a:bodyPr wrap="square" lIns="0" tIns="0" rIns="0" bIns="0" rtlCol="0" anchor="ctr"/>
-          <a:lstStyle/>
-          <a:p>
-            <a:pPr algn="ctr" indent="0" marL="0">
-              <a:buNone/>
-            </a:pPr>
-            <a:r>
-              <a:rPr lang="en-US" sz="1500" b="1" dirty="0">
-                <a:solidFill>
-                  <a:srgbClr val="0E1726"/>
-                </a:solidFill>
-                <a:latin typeface="Arial" pitchFamily="34" charset="0"/>
-                <a:ea typeface="Arial" pitchFamily="34" charset="-122"/>
-                <a:cs typeface="Arial" pitchFamily="34" charset="-120"/>
-              </a:rPr>
-              <a:t>2</a:t>
-            </a:r>
-            <a:endParaRPr lang="en-US" sz="1500" dirty="0"/>
-          </a:p>
-        </p:txBody>
-      </p:sp>
-      <p:sp>
-        <p:nvSpPr>
-          <p:cNvPr id="10" name="Text 7"/>
-          <p:cNvSpPr/>
-          <p:nvPr/>
-        </p:nvSpPr>
-        <p:spPr>
-          <a:xfrm>
-            <a:off x="1051560" y="2057400"/>
-            <a:ext cx="7589520" cy="402336"/>
-          </a:xfrm>
-          <a:prstGeom prst="rect">
-            <a:avLst/>
-          </a:prstGeom>
-          <a:noFill/>
-          <a:ln/>
-        </p:spPr>
-        <p:txBody>
-          <a:bodyPr wrap="square" lIns="0" tIns="0" rIns="0" bIns="0" rtlCol="0" anchor="ctr">
-            <a:normAutofit/>
-          </a:bodyPr>
-          <a:lstStyle/>
-          <a:p>
-            <a:pPr indent="0" marL="0">
-              <a:buNone/>
-            </a:pPr>
-            <a:r>
-              <a:rPr lang="en-US" sz="1350" dirty="0">
+              <a:t>Unsigned/tampered image → verification fails</a:t>
+            </a:r>
+            <a:endParaRPr lang="en-US" sz="1400" dirty="0"/>
+          </a:p>
+          <a:p>
+            <a:pPr marL="342900" indent="-342900">
+              <a:spcAft>
+                <a:spcPts val="600"/>
+              </a:spcAft>
+              <a:buSzPct val="100000"/>
+              <a:buChar char="•"/>
+            </a:pPr>
+            <a:r>
+              <a:rPr lang="en-US" sz="1400" dirty="0">
                 <a:solidFill>
                   <a:srgbClr val="1F2937"/>
                 </a:solidFill>
@@ -4506,45 +4808,87 @@
                 <a:ea typeface="Calibri" pitchFamily="34" charset="-122"/>
                 <a:cs typeface="Calibri" pitchFamily="34" charset="-120"/>
               </a:rPr>
-              <a:t>Defend: pin + scope; generate SBOM; sign &amp; verify with Cosign; add a provenance gate</a:t>
-            </a:r>
-            <a:endParaRPr lang="en-US" sz="1350" dirty="0"/>
-          </a:p>
-        </p:txBody>
-      </p:sp>
-      <p:sp>
-        <p:nvSpPr>
-          <p:cNvPr id="11" name="Text 8"/>
-          <p:cNvSpPr/>
-          <p:nvPr/>
-        </p:nvSpPr>
-        <p:spPr>
-          <a:xfrm>
-            <a:off x="457200" y="4800600"/>
-            <a:ext cx="6949440" cy="274320"/>
-          </a:xfrm>
-          <a:prstGeom prst="rect">
-            <a:avLst/>
-          </a:prstGeom>
-          <a:noFill/>
-          <a:ln/>
-        </p:spPr>
-        <p:txBody>
-          <a:bodyPr wrap="square" lIns="0" tIns="0" rIns="0" bIns="0" rtlCol="0" anchor="ctr"/>
-          <a:lstStyle/>
-          <a:p>
-            <a:pPr indent="0" marL="0">
-              <a:buNone/>
-            </a:pPr>
-            <a:r>
-              <a:rPr lang="en-US" sz="900" dirty="0">
-                <a:solidFill>
-                  <a:srgbClr val="64748B"/>
+              <a:t>Every step needs the docker-socket mount (trivy has to reach the local image, not just a local dir) — the SBOM step is a common copy-paste failure if it's dropped</a:t>
+            </a:r>
+            <a:endParaRPr lang="en-US" sz="1400" dirty="0"/>
+          </a:p>
+          <a:p>
+            <a:pPr marL="342900" indent="-342900">
+              <a:spcAft>
+                <a:spcPts val="600"/>
+              </a:spcAft>
+              <a:buSzPct val="100000"/>
+              <a:buChar char="•"/>
+            </a:pPr>
+            <a:r>
+              <a:rPr lang="en-US" sz="1400" dirty="0">
+                <a:solidFill>
+                  <a:srgbClr val="1F2937"/>
                 </a:solidFill>
                 <a:latin typeface="Calibri" pitchFamily="34" charset="0"/>
                 <a:ea typeface="Calibri" pitchFamily="34" charset="-122"/>
                 <a:cs typeface="Calibri" pitchFamily="34" charset="-120"/>
               </a:rPr>
+              <a:t>cosign verify needs the two --certificate-*-regexp flags in keyless mode — without them it errors, it doesn't just "fail closed"</a:t>
+            </a:r>
+            <a:endParaRPr lang="en-US" sz="1400" dirty="0"/>
+          </a:p>
+          <a:p>
+            <a:pPr marL="342900" indent="-342900">
+              <a:spcAft>
+                <a:spcPts val="600"/>
+              </a:spcAft>
+              <a:buSzPct val="100000"/>
+              <a:buChar char="•"/>
+            </a:pPr>
+            <a:r>
+              <a:rPr lang="en-US" sz="1400" dirty="0">
+                <a:solidFill>
+                  <a:srgbClr val="1F2937"/>
+                </a:solidFill>
+                <a:latin typeface="Calibri" pitchFamily="34" charset="0"/>
+                <a:ea typeface="Calibri" pitchFamily="34" charset="-122"/>
+                <a:cs typeface="Calibri" pitchFamily="34" charset="-120"/>
+              </a:rPr>
+              <a:t>Keyless signing is backed by Fulcio (short-lived cert authority) + Rekor (public transparency log) — no long-lived private key sitting on disk to leak (CWE-321)</a:t>
+            </a:r>
+            <a:endParaRPr lang="en-US" sz="1400" dirty="0"/>
+          </a:p>
+        </p:txBody>
+      </p:sp>
+      <p:sp>
+        <p:nvSpPr>
+          <p:cNvPr id="7" name="Text 4"/>
+          <p:cNvSpPr/>
+          <p:nvPr/>
+        </p:nvSpPr>
+        <p:spPr>
+          <a:xfrm>
+            <a:off x="457200" y="4800600"/>
+            <a:ext cx="6949440" cy="274320"/>
+          </a:xfrm>
+          <a:prstGeom prst="rect">
+            <a:avLst/>
+          </a:prstGeom>
+          <a:noFill/>
+          <a:ln/>
+        </p:spPr>
+        <p:txBody>
+          <a:bodyPr wrap="square" lIns="0" tIns="0" rIns="0" bIns="0" rtlCol="0" anchor="ctr"/>
+          <a:lstStyle/>
+          <a:p>
+            <a:pPr indent="0" marL="0">
+              <a:buNone/>
+            </a:pPr>
+            <a:r>
+              <a:rPr lang="en-US" sz="900" dirty="0">
+                <a:solidFill>
+                  <a:srgbClr val="64748B"/>
+                </a:solidFill>
+                <a:latin typeface="Calibri" pitchFamily="34" charset="0"/>
+                <a:ea typeface="Calibri" pitchFamily="34" charset="-122"/>
+                <a:cs typeface="Calibri" pitchFamily="34" charset="-120"/>
+              </a:rPr>
               <a:t>Software Security · Week 12</a:t>
             </a:r>
             <a:endParaRPr lang="en-US" sz="900" dirty="0"/>
@@ -4553,7 +4897,7 @@
       </p:sp>
       <p:pic>
         <p:nvPicPr>
-          <p:cNvPr id="12" name="Image 1" descr="/private/tmp/claude-501/-Users-pop7-Library-CloudStorage-OneDrive-MonsterConnectCo--Ltd-Lecture-KOSEN69---software-security/e6d6556f-17de-403d-a9a0-cf2f846149b4/scratchpad/tree/slides/pptx/assets/logo-small.png">    </p:cNvPr>
+          <p:cNvPr id="8" name="Image 1" descr="/private/tmp/claude-501/-Users-pop7-Library-CloudStorage-OneDrive-MonsterConnectCo--Ltd-Lecture-KOSEN69---software-security/f63a82af-e1ad-40ed-89c4-03c6ca776e3f/scratchpad/tzfix/slides/pptx/assets/logo-small.png">    </p:cNvPr>
           <p:cNvPicPr>
             <a:picLocks noChangeAspect="1"/>
           </p:cNvPicPr>
@@ -4691,44 +5035,46 @@
                 <a:ea typeface="Arial" pitchFamily="34" charset="-122"/>
                 <a:cs typeface="Arial" pitchFamily="34" charset="-120"/>
               </a:rPr>
-              <a:t>Deliverable</a:t>
+              <a:t>Keyless signing — the flow</a:t>
             </a:r>
             <a:endParaRPr lang="en-US" sz="2600" dirty="0"/>
           </a:p>
         </p:txBody>
       </p:sp>
-      <p:sp>
-        <p:nvSpPr>
-          <p:cNvPr id="5" name="Shape 2"/>
+      <p:pic>
+        <p:nvPicPr>
+          <p:cNvPr id="5" name="Image 1" descr="How Sigstore keyless signing works with no long-lived private key: cosign sign authenticates via an OIDC identity (GitHub/Google), Fulcio issues a short-lived (~10 min) certificate bound to that identity, cosign signs with an ephemeral key then discards it, and the signature + certificate are recorded in Rekor's public transparency log — so nothing long-lived is ever written to disk and there is no private key to leak (avoiding CWE-321). At deploy, cosign verify checks the signature against the expected identity and the Rekor log: a valid, matching signature is allowed to deploy; an unsigned or tampered image returns &quot;no signatures found&quot; and the gate blocks it.">    </p:cNvPr>
+          <p:cNvPicPr>
+            <a:picLocks noChangeAspect="1"/>
+          </p:cNvPicPr>
+          <p:nvPr/>
+        </p:nvPicPr>
+        <p:blipFill>
+          <a:blip r:embed="rId2"/>
+          <a:stretch>
+            <a:fillRect/>
+          </a:stretch>
+        </p:blipFill>
+        <p:spPr>
+          <a:xfrm>
+            <a:off x="2004108" y="1097280"/>
+            <a:ext cx="5135784" cy="3566160"/>
+          </a:xfrm>
+          <a:prstGeom prst="rect">
+            <a:avLst/>
+          </a:prstGeom>
+        </p:spPr>
+      </p:pic>
+      <p:sp>
+        <p:nvSpPr>
+          <p:cNvPr id="6" name="Text 2"/>
           <p:cNvSpPr/>
           <p:nvPr/>
         </p:nvSpPr>
         <p:spPr>
           <a:xfrm>
-            <a:off x="457200" y="1325880"/>
-            <a:ext cx="8229600" cy="822960"/>
-          </a:xfrm>
-          <a:prstGeom prst="roundRect">
-            <a:avLst>
-              <a:gd name="adj" fmla="val 8889"/>
-            </a:avLst>
-          </a:prstGeom>
-          <a:solidFill>
-            <a:srgbClr val="E8EDF3"/>
-          </a:solidFill>
-          <a:ln/>
-        </p:spPr>
-      </p:sp>
-      <p:sp>
-        <p:nvSpPr>
-          <p:cNvPr id="6" name="Text 3"/>
-          <p:cNvSpPr/>
-          <p:nvPr/>
-        </p:nvSpPr>
-        <p:spPr>
-          <a:xfrm>
-            <a:off x="731520" y="1325880"/>
-            <a:ext cx="7680960" cy="822960"/>
+            <a:off x="457200" y="4800600"/>
+            <a:ext cx="6949440" cy="274320"/>
           </a:xfrm>
           <a:prstGeom prst="rect">
             <a:avLst/>
@@ -4737,199 +5083,21 @@
           <a:ln/>
         </p:spPr>
         <p:txBody>
-          <a:bodyPr wrap="square" lIns="0" tIns="0" rIns="0" bIns="0" rtlCol="0" anchor="ctr">
-            <a:normAutofit/>
-          </a:bodyPr>
+          <a:bodyPr wrap="square" lIns="0" tIns="0" rIns="0" bIns="0" rtlCol="0" anchor="ctr"/>
           <a:lstStyle/>
           <a:p>
             <a:pPr indent="0" marL="0">
               <a:buNone/>
             </a:pPr>
             <a:r>
-              <a:rPr lang="en-US" sz="1400" i="1" dirty="0">
-                <a:solidFill>
-                  <a:srgbClr val="E35205"/>
+              <a:rPr lang="en-US" sz="900" dirty="0">
+                <a:solidFill>
+                  <a:srgbClr val="64748B"/>
                 </a:solidFill>
                 <a:latin typeface="Calibri" pitchFamily="34" charset="0"/>
                 <a:ea typeface="Calibri" pitchFamily="34" charset="-122"/>
                 <a:cs typeface="Calibri" pitchFamily="34" charset="-120"/>
               </a:rPr>
-              <a:t>📋 Worksheet 12 — labs/week12-supply-chain/worksheet.md (Parts 1–4) · kickoff: bash sca_scan.sh (trivy fs + pip-audit)</a:t>
-            </a:r>
-            <a:endParaRPr lang="en-US" sz="1400" dirty="0"/>
-          </a:p>
-        </p:txBody>
-      </p:sp>
-      <p:sp>
-        <p:nvSpPr>
-          <p:cNvPr id="7" name="Shape 4"/>
-          <p:cNvSpPr/>
-          <p:nvPr/>
-        </p:nvSpPr>
-        <p:spPr>
-          <a:xfrm>
-            <a:off x="457200" y="2313432"/>
-            <a:ext cx="8229600" cy="1517904"/>
-          </a:xfrm>
-          <a:prstGeom prst="roundRect">
-            <a:avLst>
-              <a:gd name="adj" fmla="val 4819"/>
-            </a:avLst>
-          </a:prstGeom>
-          <a:solidFill>
-            <a:srgbClr val="F1F5F9"/>
-          </a:solidFill>
-          <a:ln/>
-          <a:effectLst>
-            <a:outerShdw sx="100000" sy="100000" kx="0" ky="0" algn="bl" rotWithShape="0" blurRad="76200" dist="25400" dir="5400000">
-              <a:srgbClr val="000000">
-                <a:alpha val="12000"/>
-              </a:srgbClr>
-            </a:outerShdw>
-          </a:effectLst>
-        </p:spPr>
-      </p:sp>
-      <p:sp>
-        <p:nvSpPr>
-          <p:cNvPr id="8" name="Text 5"/>
-          <p:cNvSpPr/>
-          <p:nvPr/>
-        </p:nvSpPr>
-        <p:spPr>
-          <a:xfrm>
-            <a:off x="731520" y="2423160"/>
-            <a:ext cx="7680960" cy="1298448"/>
-          </a:xfrm>
-          <a:prstGeom prst="rect">
-            <a:avLst/>
-          </a:prstGeom>
-          <a:noFill/>
-          <a:ln/>
-        </p:spPr>
-        <p:txBody>
-          <a:bodyPr wrap="square" lIns="0" tIns="0" rIns="0" bIns="0" rtlCol="0" anchor="t">
-            <a:normAutofit/>
-          </a:bodyPr>
-          <a:lstStyle/>
-          <a:p>
-            <a:pPr marL="342900" indent="-342900">
-              <a:spcAft>
-                <a:spcPts val="600"/>
-              </a:spcAft>
-              <a:buSzPct val="100000"/>
-              <a:buChar char="•"/>
-            </a:pPr>
-            <a:r>
-              <a:rPr lang="en-US" sz="1400" dirty="0">
-                <a:solidFill>
-                  <a:srgbClr val="1F2937"/>
-                </a:solidFill>
-                <a:latin typeface="Calibri" pitchFamily="34" charset="0"/>
-                <a:ea typeface="Calibri" pitchFamily="34" charset="-122"/>
-                <a:cs typeface="Calibri" pitchFamily="34" charset="-120"/>
-              </a:rPr>
-              <a:t>SCA report + remediation plan (Part 3)</a:t>
-            </a:r>
-            <a:endParaRPr lang="en-US" sz="1400" dirty="0"/>
-          </a:p>
-          <a:p>
-            <a:pPr marL="342900" indent="-342900">
-              <a:spcAft>
-                <a:spcPts val="600"/>
-              </a:spcAft>
-              <a:buSzPct val="100000"/>
-              <a:buChar char="•"/>
-            </a:pPr>
-            <a:r>
-              <a:rPr lang="en-US" sz="1400" dirty="0">
-                <a:solidFill>
-                  <a:srgbClr val="1F2937"/>
-                </a:solidFill>
-                <a:latin typeface="Calibri" pitchFamily="34" charset="0"/>
-                <a:ea typeface="Calibri" pitchFamily="34" charset="-122"/>
-                <a:cs typeface="Calibri" pitchFamily="34" charset="-120"/>
-              </a:rPr>
-              <a:t>SBOM file + sign/verify transcript (Part 3)</a:t>
-            </a:r>
-            <a:endParaRPr lang="en-US" sz="1400" dirty="0"/>
-          </a:p>
-          <a:p>
-            <a:pPr marL="342900" indent="-342900">
-              <a:spcAft>
-                <a:spcPts val="600"/>
-              </a:spcAft>
-              <a:buSzPct val="100000"/>
-              <a:buChar char="•"/>
-            </a:pPr>
-            <a:r>
-              <a:rPr lang="en-US" sz="1400" dirty="0">
-                <a:solidFill>
-                  <a:srgbClr val="1F2937"/>
-                </a:solidFill>
-                <a:latin typeface="Calibri" pitchFamily="34" charset="0"/>
-                <a:ea typeface="Calibri" pitchFamily="34" charset="-122"/>
-                <a:cs typeface="Calibri" pitchFamily="34" charset="-120"/>
-              </a:rPr>
-              <a:t>One-paragraph SLSA self-assessment + XZ Utils case analysis (Part 4)</a:t>
-            </a:r>
-            <a:endParaRPr lang="en-US" sz="1400" dirty="0"/>
-          </a:p>
-          <a:p>
-            <a:pPr marL="342900" indent="-342900">
-              <a:spcAft>
-                <a:spcPts val="600"/>
-              </a:spcAft>
-              <a:buSzPct val="100000"/>
-              <a:buChar char="•"/>
-            </a:pPr>
-            <a:r>
-              <a:rPr lang="en-US" sz="1400" dirty="0">
-                <a:solidFill>
-                  <a:srgbClr val="1F2937"/>
-                </a:solidFill>
-                <a:latin typeface="Calibri" pitchFamily="34" charset="0"/>
-                <a:ea typeface="Calibri" pitchFamily="34" charset="-122"/>
-                <a:cs typeface="Calibri" pitchFamily="34" charset="-120"/>
-              </a:rPr>
-              <a:t>+ Audit the AI / EiPE / Prompt Problem (required, after Part 4 — see worksheet)</a:t>
-            </a:r>
-            <a:endParaRPr lang="en-US" sz="1400" dirty="0"/>
-          </a:p>
-        </p:txBody>
-      </p:sp>
-      <p:sp>
-        <p:nvSpPr>
-          <p:cNvPr id="9" name="Text 6"/>
-          <p:cNvSpPr/>
-          <p:nvPr/>
-        </p:nvSpPr>
-        <p:spPr>
-          <a:xfrm>
-            <a:off x="457200" y="4800600"/>
-            <a:ext cx="6949440" cy="274320"/>
-          </a:xfrm>
-          <a:prstGeom prst="rect">
-            <a:avLst/>
-          </a:prstGeom>
-          <a:noFill/>
-          <a:ln/>
-        </p:spPr>
-        <p:txBody>
-          <a:bodyPr wrap="square" lIns="0" tIns="0" rIns="0" bIns="0" rtlCol="0" anchor="ctr"/>
-          <a:lstStyle/>
-          <a:p>
-            <a:pPr indent="0" marL="0">
-              <a:buNone/>
-            </a:pPr>
-            <a:r>
-              <a:rPr lang="en-US" sz="900" dirty="0">
-                <a:solidFill>
-                  <a:srgbClr val="64748B"/>
-                </a:solidFill>
-                <a:latin typeface="Calibri" pitchFamily="34" charset="0"/>
-                <a:ea typeface="Calibri" pitchFamily="34" charset="-122"/>
-                <a:cs typeface="Calibri" pitchFamily="34" charset="-120"/>
-              </a:rPr>
               <a:t>Software Security · Week 12</a:t>
             </a:r>
             <a:endParaRPr lang="en-US" sz="900" dirty="0"/>
@@ -4938,14 +5106,14 @@
       </p:sp>
       <p:pic>
         <p:nvPicPr>
-          <p:cNvPr id="10" name="Image 1" descr="/private/tmp/claude-501/-Users-pop7-Library-CloudStorage-OneDrive-MonsterConnectCo--Ltd-Lecture-KOSEN69---software-security/e6d6556f-17de-403d-a9a0-cf2f846149b4/scratchpad/tree/slides/pptx/assets/logo-small.png">    </p:cNvPr>
+          <p:cNvPr id="7" name="Image 2" descr="/private/tmp/claude-501/-Users-pop7-Library-CloudStorage-OneDrive-MonsterConnectCo--Ltd-Lecture-KOSEN69---software-security/f63a82af-e1ad-40ed-89c4-03c6ca776e3f/scratchpad/tzfix/slides/pptx/assets/logo-small.png">    </p:cNvPr>
           <p:cNvPicPr>
             <a:picLocks noChangeAspect="1"/>
           </p:cNvPicPr>
           <p:nvPr/>
         </p:nvPicPr>
         <p:blipFill>
-          <a:blip r:embed="rId2"/>
+          <a:blip r:embed="rId3"/>
           <a:stretch>
             <a:fillRect/>
           </a:stretch>
@@ -5076,7 +5244,7 @@
                 <a:ea typeface="Arial" pitchFamily="34" charset="-122"/>
                 <a:cs typeface="Arial" pitchFamily="34" charset="-120"/>
               </a:rPr>
-              <a:t>Key takeaways</a:t>
+              <a:t>Verify the signature — does it deploy?</a:t>
             </a:r>
             <a:endParaRPr lang="en-US" sz="2600" dirty="0"/>
           </a:p>
@@ -5084,43 +5252,14 @@
       </p:sp>
       <p:sp>
         <p:nvSpPr>
-          <p:cNvPr id="5" name="Shape 2"/>
+          <p:cNvPr id="5" name="Text 2"/>
           <p:cNvSpPr/>
           <p:nvPr/>
         </p:nvSpPr>
         <p:spPr>
           <a:xfrm>
-            <a:off x="457200" y="1325880"/>
-            <a:ext cx="8229600" cy="1207008"/>
-          </a:xfrm>
-          <a:prstGeom prst="roundRect">
-            <a:avLst>
-              <a:gd name="adj" fmla="val 6061"/>
-            </a:avLst>
-          </a:prstGeom>
-          <a:solidFill>
-            <a:srgbClr val="F1F5F9"/>
-          </a:solidFill>
-          <a:ln/>
-          <a:effectLst>
-            <a:outerShdw sx="100000" sy="100000" kx="0" ky="0" algn="bl" rotWithShape="0" blurRad="76200" dist="25400" dir="5400000">
-              <a:srgbClr val="000000">
-                <a:alpha val="12000"/>
-              </a:srgbClr>
-            </a:outerShdw>
-          </a:effectLst>
-        </p:spPr>
-      </p:sp>
-      <p:sp>
-        <p:nvSpPr>
-          <p:cNvPr id="6" name="Text 3"/>
-          <p:cNvSpPr/>
-          <p:nvPr/>
-        </p:nvSpPr>
-        <p:spPr>
-          <a:xfrm>
-            <a:off x="731520" y="1435608"/>
-            <a:ext cx="7680960" cy="987552"/>
+            <a:off x="548640" y="1325880"/>
+            <a:ext cx="8046720" cy="822960"/>
           </a:xfrm>
           <a:prstGeom prst="rect">
             <a:avLst/>
@@ -5134,12 +5273,8 @@
           </a:bodyPr>
           <a:lstStyle/>
           <a:p>
-            <a:pPr marL="342900" indent="-342900">
-              <a:spcAft>
-                <a:spcPts val="600"/>
-              </a:spcAft>
-              <a:buSzPct val="100000"/>
-              <a:buChar char="•"/>
+            <a:pPr indent="0" marL="0">
+              <a:buNone/>
             </a:pPr>
             <a:r>
               <a:rPr lang="en-US" sz="1400" dirty="0">
@@ -5150,17 +5285,13 @@
                 <a:ea typeface="Calibri" pitchFamily="34" charset="-122"/>
                 <a:cs typeface="Calibri" pitchFamily="34" charset="-120"/>
               </a:rPr>
-              <a:t>Most of your attack surface is other people's code</a:t>
+              <a:t>Signed, unsigned, tampered, or signed by someone else. Run the gate and watch.</a:t>
             </a:r>
             <a:endParaRPr lang="en-US" sz="1400" dirty="0"/>
           </a:p>
           <a:p>
-            <a:pPr marL="342900" indent="-342900">
-              <a:spcAft>
-                <a:spcPts val="600"/>
-              </a:spcAft>
-              <a:buSzPct val="100000"/>
-              <a:buChar char="•"/>
+            <a:pPr indent="0" marL="0">
+              <a:buNone/>
             </a:pPr>
             <a:r>
               <a:rPr lang="en-US" sz="1400" dirty="0">
@@ -5171,66 +5302,45 @@
                 <a:ea typeface="Calibri" pitchFamily="34" charset="-122"/>
                 <a:cs typeface="Calibri" pitchFamily="34" charset="-120"/>
               </a:rPr>
-              <a:t>Know your ingredients (SBOM), prove your build (SLSA), sign your artifacts</a:t>
+              <a:t>Try it live: /sim/cosign-verify (interactive simulation, web only)</a:t>
             </a:r>
             <a:endParaRPr lang="en-US" sz="1400" dirty="0"/>
           </a:p>
-          <a:p>
-            <a:pPr marL="342900" indent="-342900">
-              <a:spcAft>
-                <a:spcPts val="600"/>
-              </a:spcAft>
-              <a:buSzPct val="100000"/>
-              <a:buChar char="•"/>
-            </a:pPr>
-            <a:r>
-              <a:rPr lang="en-US" sz="1400" dirty="0">
-                <a:solidFill>
-                  <a:srgbClr val="1F2937"/>
+        </p:txBody>
+      </p:sp>
+      <p:sp>
+        <p:nvSpPr>
+          <p:cNvPr id="6" name="Text 3"/>
+          <p:cNvSpPr/>
+          <p:nvPr/>
+        </p:nvSpPr>
+        <p:spPr>
+          <a:xfrm>
+            <a:off x="457200" y="4800600"/>
+            <a:ext cx="6949440" cy="274320"/>
+          </a:xfrm>
+          <a:prstGeom prst="rect">
+            <a:avLst/>
+          </a:prstGeom>
+          <a:noFill/>
+          <a:ln/>
+        </p:spPr>
+        <p:txBody>
+          <a:bodyPr wrap="square" lIns="0" tIns="0" rIns="0" bIns="0" rtlCol="0" anchor="ctr"/>
+          <a:lstStyle/>
+          <a:p>
+            <a:pPr indent="0" marL="0">
+              <a:buNone/>
+            </a:pPr>
+            <a:r>
+              <a:rPr lang="en-US" sz="900" dirty="0">
+                <a:solidFill>
+                  <a:srgbClr val="64748B"/>
                 </a:solidFill>
                 <a:latin typeface="Calibri" pitchFamily="34" charset="0"/>
                 <a:ea typeface="Calibri" pitchFamily="34" charset="-122"/>
                 <a:cs typeface="Calibri" pitchFamily="34" charset="-120"/>
               </a:rPr>
-              <a:t>Verify before you trust</a:t>
-            </a:r>
-            <a:endParaRPr lang="en-US" sz="1400" dirty="0"/>
-          </a:p>
-        </p:txBody>
-      </p:sp>
-      <p:sp>
-        <p:nvSpPr>
-          <p:cNvPr id="7" name="Text 4"/>
-          <p:cNvSpPr/>
-          <p:nvPr/>
-        </p:nvSpPr>
-        <p:spPr>
-          <a:xfrm>
-            <a:off x="457200" y="4800600"/>
-            <a:ext cx="6949440" cy="274320"/>
-          </a:xfrm>
-          <a:prstGeom prst="rect">
-            <a:avLst/>
-          </a:prstGeom>
-          <a:noFill/>
-          <a:ln/>
-        </p:spPr>
-        <p:txBody>
-          <a:bodyPr wrap="square" lIns="0" tIns="0" rIns="0" bIns="0" rtlCol="0" anchor="ctr"/>
-          <a:lstStyle/>
-          <a:p>
-            <a:pPr indent="0" marL="0">
-              <a:buNone/>
-            </a:pPr>
-            <a:r>
-              <a:rPr lang="en-US" sz="900" dirty="0">
-                <a:solidFill>
-                  <a:srgbClr val="64748B"/>
-                </a:solidFill>
-                <a:latin typeface="Calibri" pitchFamily="34" charset="0"/>
-                <a:ea typeface="Calibri" pitchFamily="34" charset="-122"/>
-                <a:cs typeface="Calibri" pitchFamily="34" charset="-120"/>
-              </a:rPr>
               <a:t>Software Security · Week 12</a:t>
             </a:r>
             <a:endParaRPr lang="en-US" sz="900" dirty="0"/>
@@ -5239,7 +5349,7 @@
       </p:sp>
       <p:pic>
         <p:nvPicPr>
-          <p:cNvPr id="8" name="Image 1" descr="/private/tmp/claude-501/-Users-pop7-Library-CloudStorage-OneDrive-MonsterConnectCo--Ltd-Lecture-KOSEN69---software-security/e6d6556f-17de-403d-a9a0-cf2f846149b4/scratchpad/tree/slides/pptx/assets/logo-small.png">    </p:cNvPr>
+          <p:cNvPr id="7" name="Image 1" descr="/private/tmp/claude-501/-Users-pop7-Library-CloudStorage-OneDrive-MonsterConnectCo--Ltd-Lecture-KOSEN69---software-security/f63a82af-e1ad-40ed-89c4-03c6ca776e3f/scratchpad/tzfix/slides/pptx/assets/logo-small.png">    </p:cNvPr>
           <p:cNvPicPr>
             <a:picLocks noChangeAspect="1"/>
           </p:cNvPicPr>
@@ -5295,14 +5405,65 @@
       </p:grpSpPr>
       <p:sp>
         <p:nvSpPr>
-          <p:cNvPr id="2" name="Text 0"/>
+          <p:cNvPr id="2" name="Shape 0"/>
           <p:cNvSpPr/>
           <p:nvPr/>
         </p:nvSpPr>
         <p:spPr>
           <a:xfrm>
-            <a:off x="640080" y="1737360"/>
-            <a:ext cx="7863840" cy="1097280"/>
+            <a:off x="457200" y="384048"/>
+            <a:ext cx="530352" cy="530352"/>
+          </a:xfrm>
+          <a:prstGeom prst="ellipse">
+            <a:avLst/>
+          </a:prstGeom>
+          <a:solidFill>
+            <a:srgbClr val="E35205"/>
+          </a:solidFill>
+          <a:ln/>
+          <a:effectLst>
+            <a:outerShdw sx="100000" sy="100000" kx="0" ky="0" algn="bl" rotWithShape="0" blurRad="76200" dist="25400" dir="5400000">
+              <a:srgbClr val="000000">
+                <a:alpha val="12000"/>
+              </a:srgbClr>
+            </a:outerShdw>
+          </a:effectLst>
+        </p:spPr>
+      </p:sp>
+      <p:pic>
+        <p:nvPicPr>
+          <p:cNvPr id="3" name="Image 0" descr="preencoded.png">    </p:cNvPr>
+          <p:cNvPicPr>
+            <a:picLocks noChangeAspect="1"/>
+          </p:cNvPicPr>
+          <p:nvPr/>
+        </p:nvPicPr>
+        <p:blipFill>
+          <a:blip r:embed="rId1"/>
+          <a:stretch>
+            <a:fillRect/>
+          </a:stretch>
+        </p:blipFill>
+        <p:spPr>
+          <a:xfrm>
+            <a:off x="594360" y="521208"/>
+            <a:ext cx="256032" cy="256032"/>
+          </a:xfrm>
+          <a:prstGeom prst="rect">
+            <a:avLst/>
+          </a:prstGeom>
+        </p:spPr>
+      </p:pic>
+      <p:sp>
+        <p:nvSpPr>
+          <p:cNvPr id="4" name="Text 1"/>
+          <p:cNvSpPr/>
+          <p:nvPr/>
+        </p:nvSpPr>
+        <p:spPr>
+          <a:xfrm>
+            <a:off x="1143000" y="329184"/>
+            <a:ext cx="7498080" cy="603504"/>
           </a:xfrm>
           <a:prstGeom prst="rect">
             <a:avLst/>
@@ -5318,7 +5479,7 @@
               <a:buNone/>
             </a:pPr>
             <a:r>
-              <a:rPr lang="en-US" sz="4600" b="1" dirty="0">
+              <a:rPr lang="en-US" sz="2600" b="1" dirty="0">
                 <a:solidFill>
                   <a:srgbClr val="1F2937"/>
                 </a:solidFill>
@@ -5326,22 +5487,51 @@
                 <a:ea typeface="Arial" pitchFamily="34" charset="-122"/>
                 <a:cs typeface="Arial" pitchFamily="34" charset="-120"/>
               </a:rPr>
-              <a:t>Questions?</a:t>
-            </a:r>
-            <a:endParaRPr lang="en-US" sz="4600" dirty="0"/>
-          </a:p>
-        </p:txBody>
-      </p:sp>
-      <p:sp>
-        <p:nvSpPr>
-          <p:cNvPr id="3" name="Text 1"/>
+              <a:t>Tooling — GitHub Advanced Security (GHAS)</a:t>
+            </a:r>
+            <a:endParaRPr lang="en-US" sz="2600" dirty="0"/>
+          </a:p>
+        </p:txBody>
+      </p:sp>
+      <p:sp>
+        <p:nvSpPr>
+          <p:cNvPr id="5" name="Shape 2"/>
           <p:cNvSpPr/>
           <p:nvPr/>
         </p:nvSpPr>
         <p:spPr>
           <a:xfrm>
-            <a:off x="658368" y="2834640"/>
-            <a:ext cx="7863840" cy="731520"/>
+            <a:off x="457200" y="1325880"/>
+            <a:ext cx="8229600" cy="1719072"/>
+          </a:xfrm>
+          <a:prstGeom prst="roundRect">
+            <a:avLst>
+              <a:gd name="adj" fmla="val 4255"/>
+            </a:avLst>
+          </a:prstGeom>
+          <a:solidFill>
+            <a:srgbClr val="F1F5F9"/>
+          </a:solidFill>
+          <a:ln/>
+          <a:effectLst>
+            <a:outerShdw sx="100000" sy="100000" kx="0" ky="0" algn="bl" rotWithShape="0" blurRad="76200" dist="25400" dir="5400000">
+              <a:srgbClr val="000000">
+                <a:alpha val="12000"/>
+              </a:srgbClr>
+            </a:outerShdw>
+          </a:effectLst>
+        </p:spPr>
+      </p:sp>
+      <p:sp>
+        <p:nvSpPr>
+          <p:cNvPr id="6" name="Text 3"/>
+          <p:cNvSpPr/>
+          <p:nvPr/>
+        </p:nvSpPr>
+        <p:spPr>
+          <a:xfrm>
+            <a:off x="731520" y="1435608"/>
+            <a:ext cx="7680960" cy="1499616"/>
           </a:xfrm>
           <a:prstGeom prst="rect">
             <a:avLst/>
@@ -5350,37 +5540,509 @@
           <a:ln/>
         </p:spPr>
         <p:txBody>
-          <a:bodyPr wrap="square" lIns="0" tIns="0" rIns="0" bIns="0" rtlCol="0" anchor="ctr"/>
-          <a:lstStyle/>
-          <a:p>
-            <a:pPr indent="0" marL="0">
-              <a:buNone/>
-            </a:pPr>
-            <a:r>
-              <a:rPr lang="en-US" sz="1800" dirty="0">
-                <a:solidFill>
-                  <a:srgbClr val="E35205"/>
+          <a:bodyPr wrap="square" lIns="0" tIns="0" rIns="0" bIns="0" rtlCol="0" anchor="t">
+            <a:normAutofit/>
+          </a:bodyPr>
+          <a:lstStyle/>
+          <a:p>
+            <a:pPr marL="342900" indent="-342900">
+              <a:spcAft>
+                <a:spcPts val="600"/>
+              </a:spcAft>
+              <a:buSzPct val="100000"/>
+              <a:buChar char="•"/>
+            </a:pPr>
+            <a:r>
+              <a:rPr lang="en-US" sz="1400" dirty="0">
+                <a:solidFill>
+                  <a:srgbClr val="1F2937"/>
                 </a:solidFill>
                 <a:latin typeface="Calibri" pitchFamily="34" charset="0"/>
                 <a:ea typeface="Calibri" pitchFamily="34" charset="-122"/>
                 <a:cs typeface="Calibri" pitchFamily="34" charset="-120"/>
               </a:rPr>
-              <a:t>Next week: Cloud &amp; container security</a:t>
-            </a:r>
-            <a:endParaRPr lang="en-US" sz="1800" dirty="0"/>
+              <a:t>Secret scanning + push protection — block secrets at push time (before they reach the remote)</a:t>
+            </a:r>
+            <a:endParaRPr lang="en-US" sz="1400" dirty="0"/>
+          </a:p>
+          <a:p>
+            <a:pPr marL="342900" indent="-342900">
+              <a:spcAft>
+                <a:spcPts val="600"/>
+              </a:spcAft>
+              <a:buSzPct val="100000"/>
+              <a:buChar char="•"/>
+            </a:pPr>
+            <a:r>
+              <a:rPr lang="en-US" sz="1400" dirty="0">
+                <a:solidFill>
+                  <a:srgbClr val="1F2937"/>
+                </a:solidFill>
+                <a:latin typeface="Calibri" pitchFamily="34" charset="0"/>
+                <a:ea typeface="Calibri" pitchFamily="34" charset="-122"/>
+                <a:cs typeface="Calibri" pitchFamily="34" charset="-120"/>
+              </a:rPr>
+              <a:t>CodeQL code scanning — semantic SAST queries</a:t>
+            </a:r>
+            <a:endParaRPr lang="en-US" sz="1400" dirty="0"/>
+          </a:p>
+          <a:p>
+            <a:pPr marL="342900" indent="-342900">
+              <a:spcAft>
+                <a:spcPts val="600"/>
+              </a:spcAft>
+              <a:buSzPct val="100000"/>
+              <a:buChar char="•"/>
+            </a:pPr>
+            <a:r>
+              <a:rPr lang="en-US" sz="1400" dirty="0">
+                <a:solidFill>
+                  <a:srgbClr val="1F2937"/>
+                </a:solidFill>
+                <a:latin typeface="Calibri" pitchFamily="34" charset="0"/>
+                <a:ea typeface="Calibri" pitchFamily="34" charset="-122"/>
+                <a:cs typeface="Calibri" pitchFamily="34" charset="-120"/>
+              </a:rPr>
+              <a:t>Dependabot — alerts + auto-PRs for vulnerable deps</a:t>
+            </a:r>
+            <a:endParaRPr lang="en-US" sz="1400" dirty="0"/>
+          </a:p>
+          <a:p>
+            <a:pPr marL="342900" indent="-342900">
+              <a:spcAft>
+                <a:spcPts val="600"/>
+              </a:spcAft>
+              <a:buSzPct val="100000"/>
+              <a:buChar char="•"/>
+            </a:pPr>
+            <a:r>
+              <a:rPr lang="en-US" sz="1400" dirty="0">
+                <a:solidFill>
+                  <a:srgbClr val="1F2937"/>
+                </a:solidFill>
+                <a:latin typeface="Calibri" pitchFamily="34" charset="0"/>
+                <a:ea typeface="Calibri" pitchFamily="34" charset="-122"/>
+                <a:cs typeface="Calibri" pitchFamily="34" charset="-120"/>
+              </a:rPr>
+              <a:t>Native in the repo → results in the Security tab</a:t>
+            </a:r>
+            <a:endParaRPr lang="en-US" sz="1400" dirty="0"/>
+          </a:p>
+        </p:txBody>
+      </p:sp>
+      <p:sp>
+        <p:nvSpPr>
+          <p:cNvPr id="7" name="Text 4"/>
+          <p:cNvSpPr/>
+          <p:nvPr/>
+        </p:nvSpPr>
+        <p:spPr>
+          <a:xfrm>
+            <a:off x="457200" y="4800600"/>
+            <a:ext cx="6949440" cy="274320"/>
+          </a:xfrm>
+          <a:prstGeom prst="rect">
+            <a:avLst/>
+          </a:prstGeom>
+          <a:noFill/>
+          <a:ln/>
+        </p:spPr>
+        <p:txBody>
+          <a:bodyPr wrap="square" lIns="0" tIns="0" rIns="0" bIns="0" rtlCol="0" anchor="ctr"/>
+          <a:lstStyle/>
+          <a:p>
+            <a:pPr indent="0" marL="0">
+              <a:buNone/>
+            </a:pPr>
+            <a:r>
+              <a:rPr lang="en-US" sz="900" dirty="0">
+                <a:solidFill>
+                  <a:srgbClr val="64748B"/>
+                </a:solidFill>
+                <a:latin typeface="Calibri" pitchFamily="34" charset="0"/>
+                <a:ea typeface="Calibri" pitchFamily="34" charset="-122"/>
+                <a:cs typeface="Calibri" pitchFamily="34" charset="-120"/>
+              </a:rPr>
+              <a:t>Software Security · Week 12</a:t>
+            </a:r>
+            <a:endParaRPr lang="en-US" sz="900" dirty="0"/>
           </a:p>
         </p:txBody>
       </p:sp>
       <p:pic>
         <p:nvPicPr>
-          <p:cNvPr id="4" name="Image 0" descr="/private/tmp/claude-501/-Users-pop7-Library-CloudStorage-OneDrive-MonsterConnectCo--Ltd-Lecture-KOSEN69---software-security/e6d6556f-17de-403d-a9a0-cf2f846149b4/scratchpad/tree/slides/pptx/assets/logo-small.png">    </p:cNvPr>
+          <p:cNvPr id="8" name="Image 1" descr="/private/tmp/claude-501/-Users-pop7-Library-CloudStorage-OneDrive-MonsterConnectCo--Ltd-Lecture-KOSEN69---software-security/f63a82af-e1ad-40ed-89c4-03c6ca776e3f/scratchpad/tzfix/slides/pptx/assets/logo-small.png">    </p:cNvPr>
           <p:cNvPicPr>
             <a:picLocks noChangeAspect="1"/>
           </p:cNvPicPr>
           <p:nvPr/>
         </p:nvPicPr>
         <p:blipFill>
+          <a:blip r:embed="rId2"/>
+          <a:stretch>
+            <a:fillRect/>
+          </a:stretch>
+        </p:blipFill>
+        <p:spPr>
+          <a:xfrm>
+            <a:off x="7882128" y="4700016"/>
+            <a:ext cx="768096" cy="356616"/>
+          </a:xfrm>
+          <a:prstGeom prst="rect">
+            <a:avLst/>
+          </a:prstGeom>
+        </p:spPr>
+      </p:pic>
+    </p:spTree>
+  </p:cSld>
+  <p:clrMapOvr>
+    <a:masterClrMapping/>
+  </p:clrMapOvr>
+</p:sld>
+</file>
+
+<file path=ppt/slides/slide19.xml><?xml version="1.0" encoding="utf-8"?>
+<p:sld xmlns:a="http://schemas.openxmlformats.org/drawingml/2006/main" xmlns:r="http://schemas.openxmlformats.org/officeDocument/2006/relationships" xmlns:p="http://schemas.openxmlformats.org/presentationml/2006/main">
+  <p:cSld name="Slide 19">
+    <p:bg>
+      <p:bgPr>
+        <a:solidFill>
+          <a:srgbClr val="FFFFFF"/>
+        </a:solidFill>
+      </p:bgPr>
+    </p:bg>
+    <p:spTree>
+      <p:nvGrpSpPr>
+        <p:cNvPr id="1" name=""/>
+        <p:cNvGrpSpPr/>
+        <p:nvPr/>
+      </p:nvGrpSpPr>
+      <p:grpSpPr>
+        <a:xfrm>
+          <a:off x="0" y="0"/>
+          <a:ext cx="0" cy="0"/>
+          <a:chOff x="0" y="0"/>
+          <a:chExt cx="0" cy="0"/>
+        </a:xfrm>
+      </p:grpSpPr>
+      <p:sp>
+        <p:nvSpPr>
+          <p:cNvPr id="2" name="Shape 0"/>
+          <p:cNvSpPr/>
+          <p:nvPr/>
+        </p:nvSpPr>
+        <p:spPr>
+          <a:xfrm>
+            <a:off x="457200" y="384048"/>
+            <a:ext cx="530352" cy="530352"/>
+          </a:xfrm>
+          <a:prstGeom prst="ellipse">
+            <a:avLst/>
+          </a:prstGeom>
+          <a:solidFill>
+            <a:srgbClr val="E35205"/>
+          </a:solidFill>
+          <a:ln/>
+          <a:effectLst>
+            <a:outerShdw sx="100000" sy="100000" kx="0" ky="0" algn="bl" rotWithShape="0" blurRad="76200" dist="25400" dir="5400000">
+              <a:srgbClr val="000000">
+                <a:alpha val="12000"/>
+              </a:srgbClr>
+            </a:outerShdw>
+          </a:effectLst>
+        </p:spPr>
+      </p:sp>
+      <p:pic>
+        <p:nvPicPr>
+          <p:cNvPr id="3" name="Image 0" descr="preencoded.png">    </p:cNvPr>
+          <p:cNvPicPr>
+            <a:picLocks noChangeAspect="1"/>
+          </p:cNvPicPr>
+          <p:nvPr/>
+        </p:nvPicPr>
+        <p:blipFill>
           <a:blip r:embed="rId1"/>
+          <a:stretch>
+            <a:fillRect/>
+          </a:stretch>
+        </p:blipFill>
+        <p:spPr>
+          <a:xfrm>
+            <a:off x="594360" y="521208"/>
+            <a:ext cx="256032" cy="256032"/>
+          </a:xfrm>
+          <a:prstGeom prst="rect">
+            <a:avLst/>
+          </a:prstGeom>
+        </p:spPr>
+      </p:pic>
+      <p:sp>
+        <p:nvSpPr>
+          <p:cNvPr id="4" name="Text 1"/>
+          <p:cNvSpPr/>
+          <p:nvPr/>
+        </p:nvSpPr>
+        <p:spPr>
+          <a:xfrm>
+            <a:off x="1143000" y="329184"/>
+            <a:ext cx="7498080" cy="603504"/>
+          </a:xfrm>
+          <a:prstGeom prst="rect">
+            <a:avLst/>
+          </a:prstGeom>
+          <a:noFill/>
+          <a:ln/>
+        </p:spPr>
+        <p:txBody>
+          <a:bodyPr wrap="square" lIns="0" tIns="0" rIns="0" bIns="0" rtlCol="0" anchor="ctr"/>
+          <a:lstStyle/>
+          <a:p>
+            <a:pPr indent="0" marL="0">
+              <a:buNone/>
+            </a:pPr>
+            <a:r>
+              <a:rPr lang="en-US" sz="2600" b="1" dirty="0">
+                <a:solidFill>
+                  <a:srgbClr val="1F2937"/>
+                </a:solidFill>
+                <a:latin typeface="Arial" pitchFamily="34" charset="0"/>
+                <a:ea typeface="Arial" pitchFamily="34" charset="-122"/>
+                <a:cs typeface="Arial" pitchFamily="34" charset="-120"/>
+              </a:rPr>
+              <a:t>Defenses</a:t>
+            </a:r>
+            <a:endParaRPr lang="en-US" sz="2600" dirty="0"/>
+          </a:p>
+        </p:txBody>
+      </p:sp>
+      <p:sp>
+        <p:nvSpPr>
+          <p:cNvPr id="5" name="Shape 2"/>
+          <p:cNvSpPr/>
+          <p:nvPr/>
+        </p:nvSpPr>
+        <p:spPr>
+          <a:xfrm>
+            <a:off x="457200" y="1325880"/>
+            <a:ext cx="8229600" cy="2743200"/>
+          </a:xfrm>
+          <a:prstGeom prst="roundRect">
+            <a:avLst>
+              <a:gd name="adj" fmla="val 2667"/>
+            </a:avLst>
+          </a:prstGeom>
+          <a:solidFill>
+            <a:srgbClr val="F1F5F9"/>
+          </a:solidFill>
+          <a:ln/>
+          <a:effectLst>
+            <a:outerShdw sx="100000" sy="100000" kx="0" ky="0" algn="bl" rotWithShape="0" blurRad="76200" dist="25400" dir="5400000">
+              <a:srgbClr val="000000">
+                <a:alpha val="12000"/>
+              </a:srgbClr>
+            </a:outerShdw>
+          </a:effectLst>
+        </p:spPr>
+      </p:sp>
+      <p:sp>
+        <p:nvSpPr>
+          <p:cNvPr id="6" name="Text 3"/>
+          <p:cNvSpPr/>
+          <p:nvPr/>
+        </p:nvSpPr>
+        <p:spPr>
+          <a:xfrm>
+            <a:off x="731520" y="1435608"/>
+            <a:ext cx="7680960" cy="2523744"/>
+          </a:xfrm>
+          <a:prstGeom prst="rect">
+            <a:avLst/>
+          </a:prstGeom>
+          <a:noFill/>
+          <a:ln/>
+        </p:spPr>
+        <p:txBody>
+          <a:bodyPr wrap="square" lIns="0" tIns="0" rIns="0" bIns="0" rtlCol="0" anchor="t">
+            <a:normAutofit/>
+          </a:bodyPr>
+          <a:lstStyle/>
+          <a:p>
+            <a:pPr marL="342900" indent="-342900">
+              <a:spcAft>
+                <a:spcPts val="600"/>
+              </a:spcAft>
+              <a:buSzPct val="100000"/>
+              <a:buChar char="•"/>
+            </a:pPr>
+            <a:r>
+              <a:rPr lang="en-US" sz="1400" dirty="0">
+                <a:solidFill>
+                  <a:srgbClr val="1F2937"/>
+                </a:solidFill>
+                <a:latin typeface="Calibri" pitchFamily="34" charset="0"/>
+                <a:ea typeface="Calibri" pitchFamily="34" charset="-122"/>
+                <a:cs typeface="Calibri" pitchFamily="34" charset="-120"/>
+              </a:rPr>
+              <a:t>pip install --require-hashes — a substituted package's hash won't match; install refuses</a:t>
+            </a:r>
+            <a:endParaRPr lang="en-US" sz="1400" dirty="0"/>
+          </a:p>
+          <a:p>
+            <a:pPr marL="342900" indent="-342900">
+              <a:spcAft>
+                <a:spcPts val="600"/>
+              </a:spcAft>
+              <a:buSzPct val="100000"/>
+              <a:buChar char="•"/>
+            </a:pPr>
+            <a:r>
+              <a:rPr lang="en-US" sz="1400" dirty="0">
+                <a:solidFill>
+                  <a:srgbClr val="1F2937"/>
+                </a:solidFill>
+                <a:latin typeface="Calibri" pitchFamily="34" charset="0"/>
+                <a:ea typeface="Calibri" pitchFamily="34" charset="-122"/>
+                <a:cs typeface="Calibri" pitchFamily="34" charset="-120"/>
+              </a:rPr>
+              <a:t>Single --index-url, not --extra-index-url — one trusted index; the resolver won't "shop around" and pick a higher-versioned public package over your internal one</a:t>
+            </a:r>
+            <a:endParaRPr lang="en-US" sz="1400" dirty="0"/>
+          </a:p>
+          <a:p>
+            <a:pPr marL="342900" indent="-342900">
+              <a:spcAft>
+                <a:spcPts val="600"/>
+              </a:spcAft>
+              <a:buSzPct val="100000"/>
+              <a:buChar char="•"/>
+            </a:pPr>
+            <a:r>
+              <a:rPr lang="en-US" sz="1400" dirty="0">
+                <a:solidFill>
+                  <a:srgbClr val="1F2937"/>
+                </a:solidFill>
+                <a:latin typeface="Calibri" pitchFamily="34" charset="0"/>
+                <a:ea typeface="Calibri" pitchFamily="34" charset="-122"/>
+                <a:cs typeface="Calibri" pitchFamily="34" charset="-120"/>
+              </a:rPr>
+              <a:t>Verify signatures before deploy (admission policy)</a:t>
+            </a:r>
+            <a:endParaRPr lang="en-US" sz="1400" dirty="0"/>
+          </a:p>
+          <a:p>
+            <a:pPr marL="342900" indent="-342900">
+              <a:spcAft>
+                <a:spcPts val="600"/>
+              </a:spcAft>
+              <a:buSzPct val="100000"/>
+              <a:buChar char="•"/>
+            </a:pPr>
+            <a:r>
+              <a:rPr lang="en-US" sz="1400" dirty="0">
+                <a:solidFill>
+                  <a:srgbClr val="1F2937"/>
+                </a:solidFill>
+                <a:latin typeface="Calibri" pitchFamily="34" charset="0"/>
+                <a:ea typeface="Calibri" pitchFamily="34" charset="-122"/>
+                <a:cs typeface="Calibri" pitchFamily="34" charset="-120"/>
+              </a:rPr>
+              <a:t>Generate + store SBOMs per release</a:t>
+            </a:r>
+            <a:endParaRPr lang="en-US" sz="1400" dirty="0"/>
+          </a:p>
+          <a:p>
+            <a:pPr marL="342900" indent="-342900">
+              <a:spcAft>
+                <a:spcPts val="600"/>
+              </a:spcAft>
+              <a:buSzPct val="100000"/>
+              <a:buChar char="•"/>
+            </a:pPr>
+            <a:r>
+              <a:rPr lang="en-US" sz="1400" dirty="0">
+                <a:solidFill>
+                  <a:srgbClr val="1F2937"/>
+                </a:solidFill>
+                <a:latin typeface="Calibri" pitchFamily="34" charset="0"/>
+                <a:ea typeface="Calibri" pitchFamily="34" charset="-122"/>
+                <a:cs typeface="Calibri" pitchFamily="34" charset="-120"/>
+              </a:rPr>
+              <a:t>2FA/MFA on dev/CI/cloud accounts; least privilege</a:t>
+            </a:r>
+            <a:endParaRPr lang="en-US" sz="1400" dirty="0"/>
+          </a:p>
+          <a:p>
+            <a:pPr marL="342900" indent="-342900">
+              <a:spcAft>
+                <a:spcPts val="600"/>
+              </a:spcAft>
+              <a:buSzPct val="100000"/>
+              <a:buChar char="•"/>
+            </a:pPr>
+            <a:r>
+              <a:rPr lang="en-US" sz="1400" dirty="0">
+                <a:solidFill>
+                  <a:srgbClr val="1F2937"/>
+                </a:solidFill>
+                <a:latin typeface="Calibri" pitchFamily="34" charset="0"/>
+                <a:ea typeface="Calibri" pitchFamily="34" charset="-122"/>
+                <a:cs typeface="Calibri" pitchFamily="34" charset="-120"/>
+              </a:rPr>
+              <a:t>Automate SCA in CI (next week)</a:t>
+            </a:r>
+            <a:endParaRPr lang="en-US" sz="1400" dirty="0"/>
+          </a:p>
+        </p:txBody>
+      </p:sp>
+      <p:sp>
+        <p:nvSpPr>
+          <p:cNvPr id="7" name="Text 4"/>
+          <p:cNvSpPr/>
+          <p:nvPr/>
+        </p:nvSpPr>
+        <p:spPr>
+          <a:xfrm>
+            <a:off x="457200" y="4800600"/>
+            <a:ext cx="6949440" cy="274320"/>
+          </a:xfrm>
+          <a:prstGeom prst="rect">
+            <a:avLst/>
+          </a:prstGeom>
+          <a:noFill/>
+          <a:ln/>
+        </p:spPr>
+        <p:txBody>
+          <a:bodyPr wrap="square" lIns="0" tIns="0" rIns="0" bIns="0" rtlCol="0" anchor="ctr"/>
+          <a:lstStyle/>
+          <a:p>
+            <a:pPr indent="0" marL="0">
+              <a:buNone/>
+            </a:pPr>
+            <a:r>
+              <a:rPr lang="en-US" sz="900" dirty="0">
+                <a:solidFill>
+                  <a:srgbClr val="64748B"/>
+                </a:solidFill>
+                <a:latin typeface="Calibri" pitchFamily="34" charset="0"/>
+                <a:ea typeface="Calibri" pitchFamily="34" charset="-122"/>
+                <a:cs typeface="Calibri" pitchFamily="34" charset="-120"/>
+              </a:rPr>
+              <a:t>Software Security · Week 12</a:t>
+            </a:r>
+            <a:endParaRPr lang="en-US" sz="900" dirty="0"/>
+          </a:p>
+        </p:txBody>
+      </p:sp>
+      <p:pic>
+        <p:nvPicPr>
+          <p:cNvPr id="8" name="Image 1" descr="/private/tmp/claude-501/-Users-pop7-Library-CloudStorage-OneDrive-MonsterConnectCo--Ltd-Lecture-KOSEN69---software-security/f63a82af-e1ad-40ed-89c4-03c6ca776e3f/scratchpad/tzfix/slides/pptx/assets/logo-small.png">    </p:cNvPr>
+          <p:cNvPicPr>
+            <a:picLocks noChangeAspect="1"/>
+          </p:cNvPicPr>
+          <p:nvPr/>
+        </p:nvPicPr>
+        <p:blipFill>
+          <a:blip r:embed="rId2"/>
           <a:stretch>
             <a:fillRect/>
           </a:stretch>
@@ -5716,7 +6378,7 @@
       </p:sp>
       <p:pic>
         <p:nvPicPr>
-          <p:cNvPr id="8" name="Image 1" descr="/private/tmp/claude-501/-Users-pop7-Library-CloudStorage-OneDrive-MonsterConnectCo--Ltd-Lecture-KOSEN69---software-security/e6d6556f-17de-403d-a9a0-cf2f846149b4/scratchpad/tree/slides/pptx/assets/logo-small.png">    </p:cNvPr>
+          <p:cNvPr id="8" name="Image 1" descr="/private/tmp/claude-501/-Users-pop7-Library-CloudStorage-OneDrive-MonsterConnectCo--Ltd-Lecture-KOSEN69---software-security/f63a82af-e1ad-40ed-89c4-03c6ca776e3f/scratchpad/tzfix/slides/pptx/assets/logo-small.png">    </p:cNvPr>
           <p:cNvPicPr>
             <a:picLocks noChangeAspect="1"/>
           </p:cNvPicPr>
@@ -5724,6 +6386,1420 @@
         </p:nvPicPr>
         <p:blipFill>
           <a:blip r:embed="rId2"/>
+          <a:stretch>
+            <a:fillRect/>
+          </a:stretch>
+        </p:blipFill>
+        <p:spPr>
+          <a:xfrm>
+            <a:off x="7882128" y="4700016"/>
+            <a:ext cx="768096" cy="356616"/>
+          </a:xfrm>
+          <a:prstGeom prst="rect">
+            <a:avLst/>
+          </a:prstGeom>
+        </p:spPr>
+      </p:pic>
+    </p:spTree>
+  </p:cSld>
+  <p:clrMapOvr>
+    <a:masterClrMapping/>
+  </p:clrMapOvr>
+</p:sld>
+</file>
+
+<file path=ppt/slides/slide20.xml><?xml version="1.0" encoding="utf-8"?>
+<p:sld xmlns:a="http://schemas.openxmlformats.org/drawingml/2006/main" xmlns:r="http://schemas.openxmlformats.org/officeDocument/2006/relationships" xmlns:p="http://schemas.openxmlformats.org/presentationml/2006/main">
+  <p:cSld name="Slide 20">
+    <p:bg>
+      <p:bgPr>
+        <a:solidFill>
+          <a:srgbClr val="FFFFFF"/>
+        </a:solidFill>
+      </p:bgPr>
+    </p:bg>
+    <p:spTree>
+      <p:nvGrpSpPr>
+        <p:cNvPr id="1" name=""/>
+        <p:cNvGrpSpPr/>
+        <p:nvPr/>
+      </p:nvGrpSpPr>
+      <p:grpSpPr>
+        <a:xfrm>
+          <a:off x="0" y="0"/>
+          <a:ext cx="0" cy="0"/>
+          <a:chOff x="0" y="0"/>
+          <a:chExt cx="0" cy="0"/>
+        </a:xfrm>
+      </p:grpSpPr>
+      <p:sp>
+        <p:nvSpPr>
+          <p:cNvPr id="2" name="Shape 0"/>
+          <p:cNvSpPr/>
+          <p:nvPr/>
+        </p:nvSpPr>
+        <p:spPr>
+          <a:xfrm>
+            <a:off x="457200" y="384048"/>
+            <a:ext cx="530352" cy="530352"/>
+          </a:xfrm>
+          <a:prstGeom prst="ellipse">
+            <a:avLst/>
+          </a:prstGeom>
+          <a:solidFill>
+            <a:srgbClr val="E35205"/>
+          </a:solidFill>
+          <a:ln/>
+          <a:effectLst>
+            <a:outerShdw sx="100000" sy="100000" kx="0" ky="0" algn="bl" rotWithShape="0" blurRad="76200" dist="25400" dir="5400000">
+              <a:srgbClr val="000000">
+                <a:alpha val="12000"/>
+              </a:srgbClr>
+            </a:outerShdw>
+          </a:effectLst>
+        </p:spPr>
+      </p:sp>
+      <p:pic>
+        <p:nvPicPr>
+          <p:cNvPr id="3" name="Image 0" descr="preencoded.png">    </p:cNvPr>
+          <p:cNvPicPr>
+            <a:picLocks noChangeAspect="1"/>
+          </p:cNvPicPr>
+          <p:nvPr/>
+        </p:nvPicPr>
+        <p:blipFill>
+          <a:blip r:embed="rId1"/>
+          <a:stretch>
+            <a:fillRect/>
+          </a:stretch>
+        </p:blipFill>
+        <p:spPr>
+          <a:xfrm>
+            <a:off x="594360" y="521208"/>
+            <a:ext cx="256032" cy="256032"/>
+          </a:xfrm>
+          <a:prstGeom prst="rect">
+            <a:avLst/>
+          </a:prstGeom>
+        </p:spPr>
+      </p:pic>
+      <p:sp>
+        <p:nvSpPr>
+          <p:cNvPr id="4" name="Text 1"/>
+          <p:cNvSpPr/>
+          <p:nvPr/>
+        </p:nvSpPr>
+        <p:spPr>
+          <a:xfrm>
+            <a:off x="1143000" y="329184"/>
+            <a:ext cx="7498080" cy="603504"/>
+          </a:xfrm>
+          <a:prstGeom prst="rect">
+            <a:avLst/>
+          </a:prstGeom>
+          <a:noFill/>
+          <a:ln/>
+        </p:spPr>
+        <p:txBody>
+          <a:bodyPr wrap="square" lIns="0" tIns="0" rIns="0" bIns="0" rtlCol="0" anchor="ctr"/>
+          <a:lstStyle/>
+          <a:p>
+            <a:pPr indent="0" marL="0">
+              <a:buNone/>
+            </a:pPr>
+            <a:r>
+              <a:rPr lang="en-US" sz="2600" b="1" dirty="0">
+                <a:solidFill>
+                  <a:srgbClr val="1F2937"/>
+                </a:solidFill>
+                <a:latin typeface="Arial" pitchFamily="34" charset="0"/>
+                <a:ea typeface="Arial" pitchFamily="34" charset="-122"/>
+                <a:cs typeface="Arial" pitchFamily="34" charset="-120"/>
+              </a:rPr>
+              <a:t>The whole journey, one dependency</a:t>
+            </a:r>
+            <a:endParaRPr lang="en-US" sz="2600" dirty="0"/>
+          </a:p>
+        </p:txBody>
+      </p:sp>
+      <p:pic>
+        <p:nvPicPr>
+          <p:cNvPr id="5" name="Image 1" descr="Six hops a dependency crosses from a public registry into production, each with its own attack and the control that answers it: registry (typosquatting → one trusted index), resolver (dependency confusion → scope the namespace), fetch (compromised maintainer → lockfile with hashes), build (stale pins → SCA in CI), image (no inventory → SBOM), deploy (unsigned image → Sigstore keyless gate). &quot;We scanned our code&quot; covers none of this — SAST reads the code you wrote, all six hops are code you didn't.">    </p:cNvPr>
+          <p:cNvPicPr>
+            <a:picLocks noChangeAspect="1"/>
+          </p:cNvPicPr>
+          <p:nvPr/>
+        </p:nvPicPr>
+        <p:blipFill>
+          <a:blip r:embed="rId2"/>
+          <a:stretch>
+            <a:fillRect/>
+          </a:stretch>
+        </p:blipFill>
+        <p:spPr>
+          <a:xfrm>
+            <a:off x="2778833" y="1097280"/>
+            <a:ext cx="3586333" cy="3566160"/>
+          </a:xfrm>
+          <a:prstGeom prst="rect">
+            <a:avLst/>
+          </a:prstGeom>
+        </p:spPr>
+      </p:pic>
+      <p:sp>
+        <p:nvSpPr>
+          <p:cNvPr id="6" name="Text 2"/>
+          <p:cNvSpPr/>
+          <p:nvPr/>
+        </p:nvSpPr>
+        <p:spPr>
+          <a:xfrm>
+            <a:off x="457200" y="4800600"/>
+            <a:ext cx="6949440" cy="274320"/>
+          </a:xfrm>
+          <a:prstGeom prst="rect">
+            <a:avLst/>
+          </a:prstGeom>
+          <a:noFill/>
+          <a:ln/>
+        </p:spPr>
+        <p:txBody>
+          <a:bodyPr wrap="square" lIns="0" tIns="0" rIns="0" bIns="0" rtlCol="0" anchor="ctr"/>
+          <a:lstStyle/>
+          <a:p>
+            <a:pPr indent="0" marL="0">
+              <a:buNone/>
+            </a:pPr>
+            <a:r>
+              <a:rPr lang="en-US" sz="900" dirty="0">
+                <a:solidFill>
+                  <a:srgbClr val="64748B"/>
+                </a:solidFill>
+                <a:latin typeface="Calibri" pitchFamily="34" charset="0"/>
+                <a:ea typeface="Calibri" pitchFamily="34" charset="-122"/>
+                <a:cs typeface="Calibri" pitchFamily="34" charset="-120"/>
+              </a:rPr>
+              <a:t>Software Security · Week 12</a:t>
+            </a:r>
+            <a:endParaRPr lang="en-US" sz="900" dirty="0"/>
+          </a:p>
+        </p:txBody>
+      </p:sp>
+      <p:pic>
+        <p:nvPicPr>
+          <p:cNvPr id="7" name="Image 2" descr="/private/tmp/claude-501/-Users-pop7-Library-CloudStorage-OneDrive-MonsterConnectCo--Ltd-Lecture-KOSEN69---software-security/f63a82af-e1ad-40ed-89c4-03c6ca776e3f/scratchpad/tzfix/slides/pptx/assets/logo-small.png">    </p:cNvPr>
+          <p:cNvPicPr>
+            <a:picLocks noChangeAspect="1"/>
+          </p:cNvPicPr>
+          <p:nvPr/>
+        </p:nvPicPr>
+        <p:blipFill>
+          <a:blip r:embed="rId3"/>
+          <a:stretch>
+            <a:fillRect/>
+          </a:stretch>
+        </p:blipFill>
+        <p:spPr>
+          <a:xfrm>
+            <a:off x="7882128" y="4700016"/>
+            <a:ext cx="768096" cy="356616"/>
+          </a:xfrm>
+          <a:prstGeom prst="rect">
+            <a:avLst/>
+          </a:prstGeom>
+        </p:spPr>
+      </p:pic>
+    </p:spTree>
+  </p:cSld>
+  <p:clrMapOvr>
+    <a:masterClrMapping/>
+  </p:clrMapOvr>
+</p:sld>
+</file>
+
+<file path=ppt/slides/slide21.xml><?xml version="1.0" encoding="utf-8"?>
+<p:sld xmlns:a="http://schemas.openxmlformats.org/drawingml/2006/main" xmlns:r="http://schemas.openxmlformats.org/officeDocument/2006/relationships" xmlns:p="http://schemas.openxmlformats.org/presentationml/2006/main">
+  <p:cSld name="Slide 21">
+    <p:bg>
+      <p:bgPr>
+        <a:solidFill>
+          <a:srgbClr val="FFFFFF"/>
+        </a:solidFill>
+      </p:bgPr>
+    </p:bg>
+    <p:spTree>
+      <p:nvGrpSpPr>
+        <p:cNvPr id="1" name=""/>
+        <p:cNvGrpSpPr/>
+        <p:nvPr/>
+      </p:nvGrpSpPr>
+      <p:grpSpPr>
+        <a:xfrm>
+          <a:off x="0" y="0"/>
+          <a:ext cx="0" cy="0"/>
+          <a:chOff x="0" y="0"/>
+          <a:chExt cx="0" cy="0"/>
+        </a:xfrm>
+      </p:grpSpPr>
+      <p:sp>
+        <p:nvSpPr>
+          <p:cNvPr id="2" name="Shape 0"/>
+          <p:cNvSpPr/>
+          <p:nvPr/>
+        </p:nvSpPr>
+        <p:spPr>
+          <a:xfrm>
+            <a:off x="457200" y="384048"/>
+            <a:ext cx="530352" cy="530352"/>
+          </a:xfrm>
+          <a:prstGeom prst="ellipse">
+            <a:avLst/>
+          </a:prstGeom>
+          <a:solidFill>
+            <a:srgbClr val="E35205"/>
+          </a:solidFill>
+          <a:ln/>
+          <a:effectLst>
+            <a:outerShdw sx="100000" sy="100000" kx="0" ky="0" algn="bl" rotWithShape="0" blurRad="76200" dist="25400" dir="5400000">
+              <a:srgbClr val="000000">
+                <a:alpha val="12000"/>
+              </a:srgbClr>
+            </a:outerShdw>
+          </a:effectLst>
+        </p:spPr>
+      </p:sp>
+      <p:pic>
+        <p:nvPicPr>
+          <p:cNvPr id="3" name="Image 0" descr="preencoded.png">    </p:cNvPr>
+          <p:cNvPicPr>
+            <a:picLocks noChangeAspect="1"/>
+          </p:cNvPicPr>
+          <p:nvPr/>
+        </p:nvPicPr>
+        <p:blipFill>
+          <a:blip r:embed="rId1"/>
+          <a:stretch>
+            <a:fillRect/>
+          </a:stretch>
+        </p:blipFill>
+        <p:spPr>
+          <a:xfrm>
+            <a:off x="594360" y="521208"/>
+            <a:ext cx="256032" cy="256032"/>
+          </a:xfrm>
+          <a:prstGeom prst="rect">
+            <a:avLst/>
+          </a:prstGeom>
+        </p:spPr>
+      </p:pic>
+      <p:sp>
+        <p:nvSpPr>
+          <p:cNvPr id="4" name="Text 1"/>
+          <p:cNvSpPr/>
+          <p:nvPr/>
+        </p:nvSpPr>
+        <p:spPr>
+          <a:xfrm>
+            <a:off x="1143000" y="329184"/>
+            <a:ext cx="7498080" cy="603504"/>
+          </a:xfrm>
+          <a:prstGeom prst="rect">
+            <a:avLst/>
+          </a:prstGeom>
+          <a:noFill/>
+          <a:ln/>
+        </p:spPr>
+        <p:txBody>
+          <a:bodyPr wrap="square" lIns="0" tIns="0" rIns="0" bIns="0" rtlCol="0" anchor="ctr"/>
+          <a:lstStyle/>
+          <a:p>
+            <a:pPr indent="0" marL="0">
+              <a:buNone/>
+            </a:pPr>
+            <a:r>
+              <a:rPr lang="en-US" sz="2600" b="1" dirty="0">
+                <a:solidFill>
+                  <a:srgbClr val="1F2937"/>
+                </a:solidFill>
+                <a:latin typeface="Arial" pitchFamily="34" charset="0"/>
+                <a:ea typeface="Arial" pitchFamily="34" charset="-122"/>
+                <a:cs typeface="Arial" pitchFamily="34" charset="-120"/>
+              </a:rPr>
+              <a:t>📦 Game — Dependency Confusion Heist</a:t>
+            </a:r>
+            <a:endParaRPr lang="en-US" sz="2600" dirty="0"/>
+          </a:p>
+        </p:txBody>
+      </p:sp>
+      <p:sp>
+        <p:nvSpPr>
+          <p:cNvPr id="5" name="Shape 2"/>
+          <p:cNvSpPr/>
+          <p:nvPr/>
+        </p:nvSpPr>
+        <p:spPr>
+          <a:xfrm>
+            <a:off x="502920" y="1325880"/>
+            <a:ext cx="384048" cy="384048"/>
+          </a:xfrm>
+          <a:prstGeom prst="ellipse">
+            <a:avLst/>
+          </a:prstGeom>
+          <a:solidFill>
+            <a:srgbClr val="E35205"/>
+          </a:solidFill>
+          <a:ln/>
+        </p:spPr>
+      </p:sp>
+      <p:sp>
+        <p:nvSpPr>
+          <p:cNvPr id="6" name="Text 3"/>
+          <p:cNvSpPr/>
+          <p:nvPr/>
+        </p:nvSpPr>
+        <p:spPr>
+          <a:xfrm>
+            <a:off x="502920" y="1325880"/>
+            <a:ext cx="384048" cy="384048"/>
+          </a:xfrm>
+          <a:prstGeom prst="rect">
+            <a:avLst/>
+          </a:prstGeom>
+          <a:noFill/>
+          <a:ln/>
+        </p:spPr>
+        <p:txBody>
+          <a:bodyPr wrap="square" lIns="0" tIns="0" rIns="0" bIns="0" rtlCol="0" anchor="ctr"/>
+          <a:lstStyle/>
+          <a:p>
+            <a:pPr algn="ctr" indent="0" marL="0">
+              <a:buNone/>
+            </a:pPr>
+            <a:r>
+              <a:rPr lang="en-US" sz="1500" b="1" dirty="0">
+                <a:solidFill>
+                  <a:srgbClr val="0E1726"/>
+                </a:solidFill>
+                <a:latin typeface="Arial" pitchFamily="34" charset="0"/>
+                <a:ea typeface="Arial" pitchFamily="34" charset="-122"/>
+                <a:cs typeface="Arial" pitchFamily="34" charset="-120"/>
+              </a:rPr>
+              <a:t>1</a:t>
+            </a:r>
+            <a:endParaRPr lang="en-US" sz="1500" dirty="0"/>
+          </a:p>
+        </p:txBody>
+      </p:sp>
+      <p:sp>
+        <p:nvSpPr>
+          <p:cNvPr id="7" name="Text 4"/>
+          <p:cNvSpPr/>
+          <p:nvPr/>
+        </p:nvSpPr>
+        <p:spPr>
+          <a:xfrm>
+            <a:off x="1051560" y="1325880"/>
+            <a:ext cx="7589520" cy="658368"/>
+          </a:xfrm>
+          <a:prstGeom prst="rect">
+            <a:avLst/>
+          </a:prstGeom>
+          <a:noFill/>
+          <a:ln/>
+        </p:spPr>
+        <p:txBody>
+          <a:bodyPr wrap="square" lIns="0" tIns="0" rIns="0" bIns="0" rtlCol="0" anchor="ctr">
+            <a:normAutofit/>
+          </a:bodyPr>
+          <a:lstStyle/>
+          <a:p>
+            <a:pPr indent="0" marL="0">
+              <a:buNone/>
+            </a:pPr>
+            <a:r>
+              <a:rPr lang="en-US" sz="1350" dirty="0">
+                <a:solidFill>
+                  <a:srgbClr val="1F2937"/>
+                </a:solidFill>
+                <a:latin typeface="Calibri" pitchFamily="34" charset="0"/>
+                <a:ea typeface="Calibri" pitchFamily="34" charset="-122"/>
+                <a:cs typeface="Calibri" pitchFamily="34" charset="-120"/>
+              </a:rPr>
+              <a:t>Attack: no live registry in this lab — use the resolver simulation to watch a higher-version public pkg beat the private one</a:t>
+            </a:r>
+            <a:endParaRPr lang="en-US" sz="1350" dirty="0"/>
+          </a:p>
+        </p:txBody>
+      </p:sp>
+      <p:sp>
+        <p:nvSpPr>
+          <p:cNvPr id="8" name="Shape 5"/>
+          <p:cNvSpPr/>
+          <p:nvPr/>
+        </p:nvSpPr>
+        <p:spPr>
+          <a:xfrm>
+            <a:off x="502920" y="2057400"/>
+            <a:ext cx="384048" cy="384048"/>
+          </a:xfrm>
+          <a:prstGeom prst="ellipse">
+            <a:avLst/>
+          </a:prstGeom>
+          <a:solidFill>
+            <a:srgbClr val="E35205"/>
+          </a:solidFill>
+          <a:ln/>
+        </p:spPr>
+      </p:sp>
+      <p:sp>
+        <p:nvSpPr>
+          <p:cNvPr id="9" name="Text 6"/>
+          <p:cNvSpPr/>
+          <p:nvPr/>
+        </p:nvSpPr>
+        <p:spPr>
+          <a:xfrm>
+            <a:off x="502920" y="2057400"/>
+            <a:ext cx="384048" cy="384048"/>
+          </a:xfrm>
+          <a:prstGeom prst="rect">
+            <a:avLst/>
+          </a:prstGeom>
+          <a:noFill/>
+          <a:ln/>
+        </p:spPr>
+        <p:txBody>
+          <a:bodyPr wrap="square" lIns="0" tIns="0" rIns="0" bIns="0" rtlCol="0" anchor="ctr"/>
+          <a:lstStyle/>
+          <a:p>
+            <a:pPr algn="ctr" indent="0" marL="0">
+              <a:buNone/>
+            </a:pPr>
+            <a:r>
+              <a:rPr lang="en-US" sz="1500" b="1" dirty="0">
+                <a:solidFill>
+                  <a:srgbClr val="0E1726"/>
+                </a:solidFill>
+                <a:latin typeface="Arial" pitchFamily="34" charset="0"/>
+                <a:ea typeface="Arial" pitchFamily="34" charset="-122"/>
+                <a:cs typeface="Arial" pitchFamily="34" charset="-120"/>
+              </a:rPr>
+              <a:t>2</a:t>
+            </a:r>
+            <a:endParaRPr lang="en-US" sz="1500" dirty="0"/>
+          </a:p>
+        </p:txBody>
+      </p:sp>
+      <p:sp>
+        <p:nvSpPr>
+          <p:cNvPr id="10" name="Text 7"/>
+          <p:cNvSpPr/>
+          <p:nvPr/>
+        </p:nvSpPr>
+        <p:spPr>
+          <a:xfrm>
+            <a:off x="1051560" y="2057400"/>
+            <a:ext cx="7589520" cy="402336"/>
+          </a:xfrm>
+          <a:prstGeom prst="rect">
+            <a:avLst/>
+          </a:prstGeom>
+          <a:noFill/>
+          <a:ln/>
+        </p:spPr>
+        <p:txBody>
+          <a:bodyPr wrap="square" lIns="0" tIns="0" rIns="0" bIns="0" rtlCol="0" anchor="ctr">
+            <a:normAutofit/>
+          </a:bodyPr>
+          <a:lstStyle/>
+          <a:p>
+            <a:pPr indent="0" marL="0">
+              <a:buNone/>
+            </a:pPr>
+            <a:r>
+              <a:rPr lang="en-US" sz="1350" dirty="0">
+                <a:solidFill>
+                  <a:srgbClr val="1F2937"/>
+                </a:solidFill>
+                <a:latin typeface="Calibri" pitchFamily="34" charset="0"/>
+                <a:ea typeface="Calibri" pitchFamily="34" charset="-122"/>
+                <a:cs typeface="Calibri" pitchFamily="34" charset="-120"/>
+              </a:rPr>
+              <a:t>Defend: pin + scope; generate SBOM; sign &amp; verify with Cosign; add a provenance gate</a:t>
+            </a:r>
+            <a:endParaRPr lang="en-US" sz="1350" dirty="0"/>
+          </a:p>
+        </p:txBody>
+      </p:sp>
+      <p:sp>
+        <p:nvSpPr>
+          <p:cNvPr id="11" name="Text 8"/>
+          <p:cNvSpPr/>
+          <p:nvPr/>
+        </p:nvSpPr>
+        <p:spPr>
+          <a:xfrm>
+            <a:off x="457200" y="4800600"/>
+            <a:ext cx="6949440" cy="274320"/>
+          </a:xfrm>
+          <a:prstGeom prst="rect">
+            <a:avLst/>
+          </a:prstGeom>
+          <a:noFill/>
+          <a:ln/>
+        </p:spPr>
+        <p:txBody>
+          <a:bodyPr wrap="square" lIns="0" tIns="0" rIns="0" bIns="0" rtlCol="0" anchor="ctr"/>
+          <a:lstStyle/>
+          <a:p>
+            <a:pPr indent="0" marL="0">
+              <a:buNone/>
+            </a:pPr>
+            <a:r>
+              <a:rPr lang="en-US" sz="900" dirty="0">
+                <a:solidFill>
+                  <a:srgbClr val="64748B"/>
+                </a:solidFill>
+                <a:latin typeface="Calibri" pitchFamily="34" charset="0"/>
+                <a:ea typeface="Calibri" pitchFamily="34" charset="-122"/>
+                <a:cs typeface="Calibri" pitchFamily="34" charset="-120"/>
+              </a:rPr>
+              <a:t>Software Security · Week 12</a:t>
+            </a:r>
+            <a:endParaRPr lang="en-US" sz="900" dirty="0"/>
+          </a:p>
+        </p:txBody>
+      </p:sp>
+      <p:pic>
+        <p:nvPicPr>
+          <p:cNvPr id="12" name="Image 1" descr="/private/tmp/claude-501/-Users-pop7-Library-CloudStorage-OneDrive-MonsterConnectCo--Ltd-Lecture-KOSEN69---software-security/f63a82af-e1ad-40ed-89c4-03c6ca776e3f/scratchpad/tzfix/slides/pptx/assets/logo-small.png">    </p:cNvPr>
+          <p:cNvPicPr>
+            <a:picLocks noChangeAspect="1"/>
+          </p:cNvPicPr>
+          <p:nvPr/>
+        </p:nvPicPr>
+        <p:blipFill>
+          <a:blip r:embed="rId2"/>
+          <a:stretch>
+            <a:fillRect/>
+          </a:stretch>
+        </p:blipFill>
+        <p:spPr>
+          <a:xfrm>
+            <a:off x="7882128" y="4700016"/>
+            <a:ext cx="768096" cy="356616"/>
+          </a:xfrm>
+          <a:prstGeom prst="rect">
+            <a:avLst/>
+          </a:prstGeom>
+        </p:spPr>
+      </p:pic>
+    </p:spTree>
+  </p:cSld>
+  <p:clrMapOvr>
+    <a:masterClrMapping/>
+  </p:clrMapOvr>
+</p:sld>
+</file>
+
+<file path=ppt/slides/slide22.xml><?xml version="1.0" encoding="utf-8"?>
+<p:sld xmlns:a="http://schemas.openxmlformats.org/drawingml/2006/main" xmlns:r="http://schemas.openxmlformats.org/officeDocument/2006/relationships" xmlns:p="http://schemas.openxmlformats.org/presentationml/2006/main">
+  <p:cSld name="Slide 22">
+    <p:bg>
+      <p:bgPr>
+        <a:solidFill>
+          <a:srgbClr val="FFFFFF"/>
+        </a:solidFill>
+      </p:bgPr>
+    </p:bg>
+    <p:spTree>
+      <p:nvGrpSpPr>
+        <p:cNvPr id="1" name=""/>
+        <p:cNvGrpSpPr/>
+        <p:nvPr/>
+      </p:nvGrpSpPr>
+      <p:grpSpPr>
+        <a:xfrm>
+          <a:off x="0" y="0"/>
+          <a:ext cx="0" cy="0"/>
+          <a:chOff x="0" y="0"/>
+          <a:chExt cx="0" cy="0"/>
+        </a:xfrm>
+      </p:grpSpPr>
+      <p:sp>
+        <p:nvSpPr>
+          <p:cNvPr id="2" name="Shape 0"/>
+          <p:cNvSpPr/>
+          <p:nvPr/>
+        </p:nvSpPr>
+        <p:spPr>
+          <a:xfrm>
+            <a:off x="457200" y="384048"/>
+            <a:ext cx="530352" cy="530352"/>
+          </a:xfrm>
+          <a:prstGeom prst="ellipse">
+            <a:avLst/>
+          </a:prstGeom>
+          <a:solidFill>
+            <a:srgbClr val="E35205"/>
+          </a:solidFill>
+          <a:ln/>
+          <a:effectLst>
+            <a:outerShdw sx="100000" sy="100000" kx="0" ky="0" algn="bl" rotWithShape="0" blurRad="76200" dist="25400" dir="5400000">
+              <a:srgbClr val="000000">
+                <a:alpha val="12000"/>
+              </a:srgbClr>
+            </a:outerShdw>
+          </a:effectLst>
+        </p:spPr>
+      </p:sp>
+      <p:pic>
+        <p:nvPicPr>
+          <p:cNvPr id="3" name="Image 0" descr="preencoded.png">    </p:cNvPr>
+          <p:cNvPicPr>
+            <a:picLocks noChangeAspect="1"/>
+          </p:cNvPicPr>
+          <p:nvPr/>
+        </p:nvPicPr>
+        <p:blipFill>
+          <a:blip r:embed="rId1"/>
+          <a:stretch>
+            <a:fillRect/>
+          </a:stretch>
+        </p:blipFill>
+        <p:spPr>
+          <a:xfrm>
+            <a:off x="594360" y="521208"/>
+            <a:ext cx="256032" cy="256032"/>
+          </a:xfrm>
+          <a:prstGeom prst="rect">
+            <a:avLst/>
+          </a:prstGeom>
+        </p:spPr>
+      </p:pic>
+      <p:sp>
+        <p:nvSpPr>
+          <p:cNvPr id="4" name="Text 1"/>
+          <p:cNvSpPr/>
+          <p:nvPr/>
+        </p:nvSpPr>
+        <p:spPr>
+          <a:xfrm>
+            <a:off x="1143000" y="329184"/>
+            <a:ext cx="7498080" cy="603504"/>
+          </a:xfrm>
+          <a:prstGeom prst="rect">
+            <a:avLst/>
+          </a:prstGeom>
+          <a:noFill/>
+          <a:ln/>
+        </p:spPr>
+        <p:txBody>
+          <a:bodyPr wrap="square" lIns="0" tIns="0" rIns="0" bIns="0" rtlCol="0" anchor="ctr"/>
+          <a:lstStyle/>
+          <a:p>
+            <a:pPr indent="0" marL="0">
+              <a:buNone/>
+            </a:pPr>
+            <a:r>
+              <a:rPr lang="en-US" sz="2600" b="1" dirty="0">
+                <a:solidFill>
+                  <a:srgbClr val="1F2937"/>
+                </a:solidFill>
+                <a:latin typeface="Arial" pitchFamily="34" charset="0"/>
+                <a:ea typeface="Arial" pitchFamily="34" charset="-122"/>
+                <a:cs typeface="Arial" pitchFamily="34" charset="-120"/>
+              </a:rPr>
+              <a:t>Deliverable</a:t>
+            </a:r>
+            <a:endParaRPr lang="en-US" sz="2600" dirty="0"/>
+          </a:p>
+        </p:txBody>
+      </p:sp>
+      <p:sp>
+        <p:nvSpPr>
+          <p:cNvPr id="5" name="Shape 2"/>
+          <p:cNvSpPr/>
+          <p:nvPr/>
+        </p:nvSpPr>
+        <p:spPr>
+          <a:xfrm>
+            <a:off x="457200" y="1325880"/>
+            <a:ext cx="8229600" cy="822960"/>
+          </a:xfrm>
+          <a:prstGeom prst="roundRect">
+            <a:avLst>
+              <a:gd name="adj" fmla="val 8889"/>
+            </a:avLst>
+          </a:prstGeom>
+          <a:solidFill>
+            <a:srgbClr val="E8EDF3"/>
+          </a:solidFill>
+          <a:ln/>
+        </p:spPr>
+      </p:sp>
+      <p:sp>
+        <p:nvSpPr>
+          <p:cNvPr id="6" name="Text 3"/>
+          <p:cNvSpPr/>
+          <p:nvPr/>
+        </p:nvSpPr>
+        <p:spPr>
+          <a:xfrm>
+            <a:off x="731520" y="1325880"/>
+            <a:ext cx="7680960" cy="822960"/>
+          </a:xfrm>
+          <a:prstGeom prst="rect">
+            <a:avLst/>
+          </a:prstGeom>
+          <a:noFill/>
+          <a:ln/>
+        </p:spPr>
+        <p:txBody>
+          <a:bodyPr wrap="square" lIns="0" tIns="0" rIns="0" bIns="0" rtlCol="0" anchor="ctr">
+            <a:normAutofit/>
+          </a:bodyPr>
+          <a:lstStyle/>
+          <a:p>
+            <a:pPr indent="0" marL="0">
+              <a:buNone/>
+            </a:pPr>
+            <a:r>
+              <a:rPr lang="en-US" sz="1400" i="1" dirty="0">
+                <a:solidFill>
+                  <a:srgbClr val="E35205"/>
+                </a:solidFill>
+                <a:latin typeface="Calibri" pitchFamily="34" charset="0"/>
+                <a:ea typeface="Calibri" pitchFamily="34" charset="-122"/>
+                <a:cs typeface="Calibri" pitchFamily="34" charset="-120"/>
+              </a:rPr>
+              <a:t>📋 Worksheet 12 — labs/week12-supply-chain/worksheet.md (Parts 1–4) · kickoff: bash sca_scan.sh (trivy fs + pip-audit)</a:t>
+            </a:r>
+            <a:endParaRPr lang="en-US" sz="1400" dirty="0"/>
+          </a:p>
+        </p:txBody>
+      </p:sp>
+      <p:sp>
+        <p:nvSpPr>
+          <p:cNvPr id="7" name="Shape 4"/>
+          <p:cNvSpPr/>
+          <p:nvPr/>
+        </p:nvSpPr>
+        <p:spPr>
+          <a:xfrm>
+            <a:off x="457200" y="2313432"/>
+            <a:ext cx="8229600" cy="1517904"/>
+          </a:xfrm>
+          <a:prstGeom prst="roundRect">
+            <a:avLst>
+              <a:gd name="adj" fmla="val 4819"/>
+            </a:avLst>
+          </a:prstGeom>
+          <a:solidFill>
+            <a:srgbClr val="F1F5F9"/>
+          </a:solidFill>
+          <a:ln/>
+          <a:effectLst>
+            <a:outerShdw sx="100000" sy="100000" kx="0" ky="0" algn="bl" rotWithShape="0" blurRad="76200" dist="25400" dir="5400000">
+              <a:srgbClr val="000000">
+                <a:alpha val="12000"/>
+              </a:srgbClr>
+            </a:outerShdw>
+          </a:effectLst>
+        </p:spPr>
+      </p:sp>
+      <p:sp>
+        <p:nvSpPr>
+          <p:cNvPr id="8" name="Text 5"/>
+          <p:cNvSpPr/>
+          <p:nvPr/>
+        </p:nvSpPr>
+        <p:spPr>
+          <a:xfrm>
+            <a:off x="731520" y="2423160"/>
+            <a:ext cx="7680960" cy="1298448"/>
+          </a:xfrm>
+          <a:prstGeom prst="rect">
+            <a:avLst/>
+          </a:prstGeom>
+          <a:noFill/>
+          <a:ln/>
+        </p:spPr>
+        <p:txBody>
+          <a:bodyPr wrap="square" lIns="0" tIns="0" rIns="0" bIns="0" rtlCol="0" anchor="t">
+            <a:normAutofit/>
+          </a:bodyPr>
+          <a:lstStyle/>
+          <a:p>
+            <a:pPr marL="342900" indent="-342900">
+              <a:spcAft>
+                <a:spcPts val="600"/>
+              </a:spcAft>
+              <a:buSzPct val="100000"/>
+              <a:buChar char="•"/>
+            </a:pPr>
+            <a:r>
+              <a:rPr lang="en-US" sz="1400" dirty="0">
+                <a:solidFill>
+                  <a:srgbClr val="1F2937"/>
+                </a:solidFill>
+                <a:latin typeface="Calibri" pitchFamily="34" charset="0"/>
+                <a:ea typeface="Calibri" pitchFamily="34" charset="-122"/>
+                <a:cs typeface="Calibri" pitchFamily="34" charset="-120"/>
+              </a:rPr>
+              <a:t>SCA report + remediation plan (Part 3)</a:t>
+            </a:r>
+            <a:endParaRPr lang="en-US" sz="1400" dirty="0"/>
+          </a:p>
+          <a:p>
+            <a:pPr marL="342900" indent="-342900">
+              <a:spcAft>
+                <a:spcPts val="600"/>
+              </a:spcAft>
+              <a:buSzPct val="100000"/>
+              <a:buChar char="•"/>
+            </a:pPr>
+            <a:r>
+              <a:rPr lang="en-US" sz="1400" dirty="0">
+                <a:solidFill>
+                  <a:srgbClr val="1F2937"/>
+                </a:solidFill>
+                <a:latin typeface="Calibri" pitchFamily="34" charset="0"/>
+                <a:ea typeface="Calibri" pitchFamily="34" charset="-122"/>
+                <a:cs typeface="Calibri" pitchFamily="34" charset="-120"/>
+              </a:rPr>
+              <a:t>SBOM file + sign/verify transcript (Part 3)</a:t>
+            </a:r>
+            <a:endParaRPr lang="en-US" sz="1400" dirty="0"/>
+          </a:p>
+          <a:p>
+            <a:pPr marL="342900" indent="-342900">
+              <a:spcAft>
+                <a:spcPts val="600"/>
+              </a:spcAft>
+              <a:buSzPct val="100000"/>
+              <a:buChar char="•"/>
+            </a:pPr>
+            <a:r>
+              <a:rPr lang="en-US" sz="1400" dirty="0">
+                <a:solidFill>
+                  <a:srgbClr val="1F2937"/>
+                </a:solidFill>
+                <a:latin typeface="Calibri" pitchFamily="34" charset="0"/>
+                <a:ea typeface="Calibri" pitchFamily="34" charset="-122"/>
+                <a:cs typeface="Calibri" pitchFamily="34" charset="-120"/>
+              </a:rPr>
+              <a:t>One-paragraph SLSA self-assessment + XZ Utils case analysis (Part 4)</a:t>
+            </a:r>
+            <a:endParaRPr lang="en-US" sz="1400" dirty="0"/>
+          </a:p>
+          <a:p>
+            <a:pPr marL="342900" indent="-342900">
+              <a:spcAft>
+                <a:spcPts val="600"/>
+              </a:spcAft>
+              <a:buSzPct val="100000"/>
+              <a:buChar char="•"/>
+            </a:pPr>
+            <a:r>
+              <a:rPr lang="en-US" sz="1400" dirty="0">
+                <a:solidFill>
+                  <a:srgbClr val="1F2937"/>
+                </a:solidFill>
+                <a:latin typeface="Calibri" pitchFamily="34" charset="0"/>
+                <a:ea typeface="Calibri" pitchFamily="34" charset="-122"/>
+                <a:cs typeface="Calibri" pitchFamily="34" charset="-120"/>
+              </a:rPr>
+              <a:t>+ Audit the AI / EiPE / Prompt Problem (required, after Part 4 — see worksheet)</a:t>
+            </a:r>
+            <a:endParaRPr lang="en-US" sz="1400" dirty="0"/>
+          </a:p>
+        </p:txBody>
+      </p:sp>
+      <p:sp>
+        <p:nvSpPr>
+          <p:cNvPr id="9" name="Text 6"/>
+          <p:cNvSpPr/>
+          <p:nvPr/>
+        </p:nvSpPr>
+        <p:spPr>
+          <a:xfrm>
+            <a:off x="457200" y="4800600"/>
+            <a:ext cx="6949440" cy="274320"/>
+          </a:xfrm>
+          <a:prstGeom prst="rect">
+            <a:avLst/>
+          </a:prstGeom>
+          <a:noFill/>
+          <a:ln/>
+        </p:spPr>
+        <p:txBody>
+          <a:bodyPr wrap="square" lIns="0" tIns="0" rIns="0" bIns="0" rtlCol="0" anchor="ctr"/>
+          <a:lstStyle/>
+          <a:p>
+            <a:pPr indent="0" marL="0">
+              <a:buNone/>
+            </a:pPr>
+            <a:r>
+              <a:rPr lang="en-US" sz="900" dirty="0">
+                <a:solidFill>
+                  <a:srgbClr val="64748B"/>
+                </a:solidFill>
+                <a:latin typeface="Calibri" pitchFamily="34" charset="0"/>
+                <a:ea typeface="Calibri" pitchFamily="34" charset="-122"/>
+                <a:cs typeface="Calibri" pitchFamily="34" charset="-120"/>
+              </a:rPr>
+              <a:t>Software Security · Week 12</a:t>
+            </a:r>
+            <a:endParaRPr lang="en-US" sz="900" dirty="0"/>
+          </a:p>
+        </p:txBody>
+      </p:sp>
+      <p:pic>
+        <p:nvPicPr>
+          <p:cNvPr id="10" name="Image 1" descr="/private/tmp/claude-501/-Users-pop7-Library-CloudStorage-OneDrive-MonsterConnectCo--Ltd-Lecture-KOSEN69---software-security/f63a82af-e1ad-40ed-89c4-03c6ca776e3f/scratchpad/tzfix/slides/pptx/assets/logo-small.png">    </p:cNvPr>
+          <p:cNvPicPr>
+            <a:picLocks noChangeAspect="1"/>
+          </p:cNvPicPr>
+          <p:nvPr/>
+        </p:nvPicPr>
+        <p:blipFill>
+          <a:blip r:embed="rId2"/>
+          <a:stretch>
+            <a:fillRect/>
+          </a:stretch>
+        </p:blipFill>
+        <p:spPr>
+          <a:xfrm>
+            <a:off x="7882128" y="4700016"/>
+            <a:ext cx="768096" cy="356616"/>
+          </a:xfrm>
+          <a:prstGeom prst="rect">
+            <a:avLst/>
+          </a:prstGeom>
+        </p:spPr>
+      </p:pic>
+    </p:spTree>
+  </p:cSld>
+  <p:clrMapOvr>
+    <a:masterClrMapping/>
+  </p:clrMapOvr>
+</p:sld>
+</file>
+
+<file path=ppt/slides/slide23.xml><?xml version="1.0" encoding="utf-8"?>
+<p:sld xmlns:a="http://schemas.openxmlformats.org/drawingml/2006/main" xmlns:r="http://schemas.openxmlformats.org/officeDocument/2006/relationships" xmlns:p="http://schemas.openxmlformats.org/presentationml/2006/main">
+  <p:cSld name="Slide 23">
+    <p:bg>
+      <p:bgPr>
+        <a:solidFill>
+          <a:srgbClr val="FFFFFF"/>
+        </a:solidFill>
+      </p:bgPr>
+    </p:bg>
+    <p:spTree>
+      <p:nvGrpSpPr>
+        <p:cNvPr id="1" name=""/>
+        <p:cNvGrpSpPr/>
+        <p:nvPr/>
+      </p:nvGrpSpPr>
+      <p:grpSpPr>
+        <a:xfrm>
+          <a:off x="0" y="0"/>
+          <a:ext cx="0" cy="0"/>
+          <a:chOff x="0" y="0"/>
+          <a:chExt cx="0" cy="0"/>
+        </a:xfrm>
+      </p:grpSpPr>
+      <p:sp>
+        <p:nvSpPr>
+          <p:cNvPr id="2" name="Shape 0"/>
+          <p:cNvSpPr/>
+          <p:nvPr/>
+        </p:nvSpPr>
+        <p:spPr>
+          <a:xfrm>
+            <a:off x="457200" y="384048"/>
+            <a:ext cx="530352" cy="530352"/>
+          </a:xfrm>
+          <a:prstGeom prst="ellipse">
+            <a:avLst/>
+          </a:prstGeom>
+          <a:solidFill>
+            <a:srgbClr val="E35205"/>
+          </a:solidFill>
+          <a:ln/>
+          <a:effectLst>
+            <a:outerShdw sx="100000" sy="100000" kx="0" ky="0" algn="bl" rotWithShape="0" blurRad="76200" dist="25400" dir="5400000">
+              <a:srgbClr val="000000">
+                <a:alpha val="12000"/>
+              </a:srgbClr>
+            </a:outerShdw>
+          </a:effectLst>
+        </p:spPr>
+      </p:sp>
+      <p:pic>
+        <p:nvPicPr>
+          <p:cNvPr id="3" name="Image 0" descr="preencoded.png">    </p:cNvPr>
+          <p:cNvPicPr>
+            <a:picLocks noChangeAspect="1"/>
+          </p:cNvPicPr>
+          <p:nvPr/>
+        </p:nvPicPr>
+        <p:blipFill>
+          <a:blip r:embed="rId1"/>
+          <a:stretch>
+            <a:fillRect/>
+          </a:stretch>
+        </p:blipFill>
+        <p:spPr>
+          <a:xfrm>
+            <a:off x="594360" y="521208"/>
+            <a:ext cx="256032" cy="256032"/>
+          </a:xfrm>
+          <a:prstGeom prst="rect">
+            <a:avLst/>
+          </a:prstGeom>
+        </p:spPr>
+      </p:pic>
+      <p:sp>
+        <p:nvSpPr>
+          <p:cNvPr id="4" name="Text 1"/>
+          <p:cNvSpPr/>
+          <p:nvPr/>
+        </p:nvSpPr>
+        <p:spPr>
+          <a:xfrm>
+            <a:off x="1143000" y="329184"/>
+            <a:ext cx="7498080" cy="603504"/>
+          </a:xfrm>
+          <a:prstGeom prst="rect">
+            <a:avLst/>
+          </a:prstGeom>
+          <a:noFill/>
+          <a:ln/>
+        </p:spPr>
+        <p:txBody>
+          <a:bodyPr wrap="square" lIns="0" tIns="0" rIns="0" bIns="0" rtlCol="0" anchor="ctr"/>
+          <a:lstStyle/>
+          <a:p>
+            <a:pPr indent="0" marL="0">
+              <a:buNone/>
+            </a:pPr>
+            <a:r>
+              <a:rPr lang="en-US" sz="2600" b="1" dirty="0">
+                <a:solidFill>
+                  <a:srgbClr val="1F2937"/>
+                </a:solidFill>
+                <a:latin typeface="Arial" pitchFamily="34" charset="0"/>
+                <a:ea typeface="Arial" pitchFamily="34" charset="-122"/>
+                <a:cs typeface="Arial" pitchFamily="34" charset="-120"/>
+              </a:rPr>
+              <a:t>Key takeaways</a:t>
+            </a:r>
+            <a:endParaRPr lang="en-US" sz="2600" dirty="0"/>
+          </a:p>
+        </p:txBody>
+      </p:sp>
+      <p:sp>
+        <p:nvSpPr>
+          <p:cNvPr id="5" name="Shape 2"/>
+          <p:cNvSpPr/>
+          <p:nvPr/>
+        </p:nvSpPr>
+        <p:spPr>
+          <a:xfrm>
+            <a:off x="457200" y="1325880"/>
+            <a:ext cx="8229600" cy="1207008"/>
+          </a:xfrm>
+          <a:prstGeom prst="roundRect">
+            <a:avLst>
+              <a:gd name="adj" fmla="val 6061"/>
+            </a:avLst>
+          </a:prstGeom>
+          <a:solidFill>
+            <a:srgbClr val="F1F5F9"/>
+          </a:solidFill>
+          <a:ln/>
+          <a:effectLst>
+            <a:outerShdw sx="100000" sy="100000" kx="0" ky="0" algn="bl" rotWithShape="0" blurRad="76200" dist="25400" dir="5400000">
+              <a:srgbClr val="000000">
+                <a:alpha val="12000"/>
+              </a:srgbClr>
+            </a:outerShdw>
+          </a:effectLst>
+        </p:spPr>
+      </p:sp>
+      <p:sp>
+        <p:nvSpPr>
+          <p:cNvPr id="6" name="Text 3"/>
+          <p:cNvSpPr/>
+          <p:nvPr/>
+        </p:nvSpPr>
+        <p:spPr>
+          <a:xfrm>
+            <a:off x="731520" y="1435608"/>
+            <a:ext cx="7680960" cy="987552"/>
+          </a:xfrm>
+          <a:prstGeom prst="rect">
+            <a:avLst/>
+          </a:prstGeom>
+          <a:noFill/>
+          <a:ln/>
+        </p:spPr>
+        <p:txBody>
+          <a:bodyPr wrap="square" lIns="0" tIns="0" rIns="0" bIns="0" rtlCol="0" anchor="t">
+            <a:normAutofit/>
+          </a:bodyPr>
+          <a:lstStyle/>
+          <a:p>
+            <a:pPr marL="342900" indent="-342900">
+              <a:spcAft>
+                <a:spcPts val="600"/>
+              </a:spcAft>
+              <a:buSzPct val="100000"/>
+              <a:buChar char="•"/>
+            </a:pPr>
+            <a:r>
+              <a:rPr lang="en-US" sz="1400" dirty="0">
+                <a:solidFill>
+                  <a:srgbClr val="1F2937"/>
+                </a:solidFill>
+                <a:latin typeface="Calibri" pitchFamily="34" charset="0"/>
+                <a:ea typeface="Calibri" pitchFamily="34" charset="-122"/>
+                <a:cs typeface="Calibri" pitchFamily="34" charset="-120"/>
+              </a:rPr>
+              <a:t>Most of your attack surface is other people's code</a:t>
+            </a:r>
+            <a:endParaRPr lang="en-US" sz="1400" dirty="0"/>
+          </a:p>
+          <a:p>
+            <a:pPr marL="342900" indent="-342900">
+              <a:spcAft>
+                <a:spcPts val="600"/>
+              </a:spcAft>
+              <a:buSzPct val="100000"/>
+              <a:buChar char="•"/>
+            </a:pPr>
+            <a:r>
+              <a:rPr lang="en-US" sz="1400" dirty="0">
+                <a:solidFill>
+                  <a:srgbClr val="1F2937"/>
+                </a:solidFill>
+                <a:latin typeface="Calibri" pitchFamily="34" charset="0"/>
+                <a:ea typeface="Calibri" pitchFamily="34" charset="-122"/>
+                <a:cs typeface="Calibri" pitchFamily="34" charset="-120"/>
+              </a:rPr>
+              <a:t>Know your ingredients (SBOM), prove your build (SLSA), sign your artifacts</a:t>
+            </a:r>
+            <a:endParaRPr lang="en-US" sz="1400" dirty="0"/>
+          </a:p>
+          <a:p>
+            <a:pPr marL="342900" indent="-342900">
+              <a:spcAft>
+                <a:spcPts val="600"/>
+              </a:spcAft>
+              <a:buSzPct val="100000"/>
+              <a:buChar char="•"/>
+            </a:pPr>
+            <a:r>
+              <a:rPr lang="en-US" sz="1400" dirty="0">
+                <a:solidFill>
+                  <a:srgbClr val="1F2937"/>
+                </a:solidFill>
+                <a:latin typeface="Calibri" pitchFamily="34" charset="0"/>
+                <a:ea typeface="Calibri" pitchFamily="34" charset="-122"/>
+                <a:cs typeface="Calibri" pitchFamily="34" charset="-120"/>
+              </a:rPr>
+              <a:t>Verify before you trust</a:t>
+            </a:r>
+            <a:endParaRPr lang="en-US" sz="1400" dirty="0"/>
+          </a:p>
+        </p:txBody>
+      </p:sp>
+      <p:sp>
+        <p:nvSpPr>
+          <p:cNvPr id="7" name="Text 4"/>
+          <p:cNvSpPr/>
+          <p:nvPr/>
+        </p:nvSpPr>
+        <p:spPr>
+          <a:xfrm>
+            <a:off x="457200" y="4800600"/>
+            <a:ext cx="6949440" cy="274320"/>
+          </a:xfrm>
+          <a:prstGeom prst="rect">
+            <a:avLst/>
+          </a:prstGeom>
+          <a:noFill/>
+          <a:ln/>
+        </p:spPr>
+        <p:txBody>
+          <a:bodyPr wrap="square" lIns="0" tIns="0" rIns="0" bIns="0" rtlCol="0" anchor="ctr"/>
+          <a:lstStyle/>
+          <a:p>
+            <a:pPr indent="0" marL="0">
+              <a:buNone/>
+            </a:pPr>
+            <a:r>
+              <a:rPr lang="en-US" sz="900" dirty="0">
+                <a:solidFill>
+                  <a:srgbClr val="64748B"/>
+                </a:solidFill>
+                <a:latin typeface="Calibri" pitchFamily="34" charset="0"/>
+                <a:ea typeface="Calibri" pitchFamily="34" charset="-122"/>
+                <a:cs typeface="Calibri" pitchFamily="34" charset="-120"/>
+              </a:rPr>
+              <a:t>Software Security · Week 12</a:t>
+            </a:r>
+            <a:endParaRPr lang="en-US" sz="900" dirty="0"/>
+          </a:p>
+        </p:txBody>
+      </p:sp>
+      <p:pic>
+        <p:nvPicPr>
+          <p:cNvPr id="8" name="Image 1" descr="/private/tmp/claude-501/-Users-pop7-Library-CloudStorage-OneDrive-MonsterConnectCo--Ltd-Lecture-KOSEN69---software-security/f63a82af-e1ad-40ed-89c4-03c6ca776e3f/scratchpad/tzfix/slides/pptx/assets/logo-small.png">    </p:cNvPr>
+          <p:cNvPicPr>
+            <a:picLocks noChangeAspect="1"/>
+          </p:cNvPicPr>
+          <p:nvPr/>
+        </p:nvPicPr>
+        <p:blipFill>
+          <a:blip r:embed="rId2"/>
+          <a:stretch>
+            <a:fillRect/>
+          </a:stretch>
+        </p:blipFill>
+        <p:spPr>
+          <a:xfrm>
+            <a:off x="7882128" y="4700016"/>
+            <a:ext cx="768096" cy="356616"/>
+          </a:xfrm>
+          <a:prstGeom prst="rect">
+            <a:avLst/>
+          </a:prstGeom>
+        </p:spPr>
+      </p:pic>
+    </p:spTree>
+  </p:cSld>
+  <p:clrMapOvr>
+    <a:masterClrMapping/>
+  </p:clrMapOvr>
+</p:sld>
+</file>
+
+<file path=ppt/slides/slide24.xml><?xml version="1.0" encoding="utf-8"?>
+<p:sld xmlns:a="http://schemas.openxmlformats.org/drawingml/2006/main" xmlns:r="http://schemas.openxmlformats.org/officeDocument/2006/relationships" xmlns:p="http://schemas.openxmlformats.org/presentationml/2006/main">
+  <p:cSld name="Slide 24">
+    <p:bg>
+      <p:bgPr>
+        <a:solidFill>
+          <a:srgbClr val="FFFFFF"/>
+        </a:solidFill>
+      </p:bgPr>
+    </p:bg>
+    <p:spTree>
+      <p:nvGrpSpPr>
+        <p:cNvPr id="1" name=""/>
+        <p:cNvGrpSpPr/>
+        <p:nvPr/>
+      </p:nvGrpSpPr>
+      <p:grpSpPr>
+        <a:xfrm>
+          <a:off x="0" y="0"/>
+          <a:ext cx="0" cy="0"/>
+          <a:chOff x="0" y="0"/>
+          <a:chExt cx="0" cy="0"/>
+        </a:xfrm>
+      </p:grpSpPr>
+      <p:sp>
+        <p:nvSpPr>
+          <p:cNvPr id="2" name="Text 0"/>
+          <p:cNvSpPr/>
+          <p:nvPr/>
+        </p:nvSpPr>
+        <p:spPr>
+          <a:xfrm>
+            <a:off x="640080" y="1737360"/>
+            <a:ext cx="7863840" cy="1097280"/>
+          </a:xfrm>
+          <a:prstGeom prst="rect">
+            <a:avLst/>
+          </a:prstGeom>
+          <a:noFill/>
+          <a:ln/>
+        </p:spPr>
+        <p:txBody>
+          <a:bodyPr wrap="square" lIns="0" tIns="0" rIns="0" bIns="0" rtlCol="0" anchor="ctr"/>
+          <a:lstStyle/>
+          <a:p>
+            <a:pPr indent="0" marL="0">
+              <a:buNone/>
+            </a:pPr>
+            <a:r>
+              <a:rPr lang="en-US" sz="4600" b="1" dirty="0">
+                <a:solidFill>
+                  <a:srgbClr val="1F2937"/>
+                </a:solidFill>
+                <a:latin typeface="Arial" pitchFamily="34" charset="0"/>
+                <a:ea typeface="Arial" pitchFamily="34" charset="-122"/>
+                <a:cs typeface="Arial" pitchFamily="34" charset="-120"/>
+              </a:rPr>
+              <a:t>Questions?</a:t>
+            </a:r>
+            <a:endParaRPr lang="en-US" sz="4600" dirty="0"/>
+          </a:p>
+        </p:txBody>
+      </p:sp>
+      <p:sp>
+        <p:nvSpPr>
+          <p:cNvPr id="3" name="Text 1"/>
+          <p:cNvSpPr/>
+          <p:nvPr/>
+        </p:nvSpPr>
+        <p:spPr>
+          <a:xfrm>
+            <a:off x="658368" y="2834640"/>
+            <a:ext cx="7863840" cy="731520"/>
+          </a:xfrm>
+          <a:prstGeom prst="rect">
+            <a:avLst/>
+          </a:prstGeom>
+          <a:noFill/>
+          <a:ln/>
+        </p:spPr>
+        <p:txBody>
+          <a:bodyPr wrap="square" lIns="0" tIns="0" rIns="0" bIns="0" rtlCol="0" anchor="ctr"/>
+          <a:lstStyle/>
+          <a:p>
+            <a:pPr indent="0" marL="0">
+              <a:buNone/>
+            </a:pPr>
+            <a:r>
+              <a:rPr lang="en-US" sz="1800" dirty="0">
+                <a:solidFill>
+                  <a:srgbClr val="E35205"/>
+                </a:solidFill>
+                <a:latin typeface="Calibri" pitchFamily="34" charset="0"/>
+                <a:ea typeface="Calibri" pitchFamily="34" charset="-122"/>
+                <a:cs typeface="Calibri" pitchFamily="34" charset="-120"/>
+              </a:rPr>
+              <a:t>Next week: Cloud &amp; container security</a:t>
+            </a:r>
+            <a:endParaRPr lang="en-US" sz="1800" dirty="0"/>
+          </a:p>
+        </p:txBody>
+      </p:sp>
+      <p:pic>
+        <p:nvPicPr>
+          <p:cNvPr id="4" name="Image 0" descr="/private/tmp/claude-501/-Users-pop7-Library-CloudStorage-OneDrive-MonsterConnectCo--Ltd-Lecture-KOSEN69---software-security/f63a82af-e1ad-40ed-89c4-03c6ca776e3f/scratchpad/tzfix/slides/pptx/assets/logo-small.png">    </p:cNvPr>
+          <p:cNvPicPr>
+            <a:picLocks noChangeAspect="1"/>
+          </p:cNvPicPr>
+          <p:nvPr/>
+        </p:nvPicPr>
+        <p:blipFill>
+          <a:blip r:embed="rId1"/>
           <a:stretch>
             <a:fillRect/>
           </a:stretch>
@@ -6017,7 +8093,7 @@
       </p:sp>
       <p:pic>
         <p:nvPicPr>
-          <p:cNvPr id="8" name="Image 1" descr="/private/tmp/claude-501/-Users-pop7-Library-CloudStorage-OneDrive-MonsterConnectCo--Ltd-Lecture-KOSEN69---software-security/e6d6556f-17de-403d-a9a0-cf2f846149b4/scratchpad/tree/slides/pptx/assets/logo-small.png">    </p:cNvPr>
+          <p:cNvPr id="8" name="Image 1" descr="/private/tmp/claude-501/-Users-pop7-Library-CloudStorage-OneDrive-MonsterConnectCo--Ltd-Lecture-KOSEN69---software-security/f63a82af-e1ad-40ed-89c4-03c6ca776e3f/scratchpad/tzfix/slides/pptx/assets/logo-small.png">    </p:cNvPr>
           <p:cNvPicPr>
             <a:picLocks noChangeAspect="1"/>
           </p:cNvPicPr>
@@ -6155,6 +8231,215 @@
                 <a:ea typeface="Arial" pitchFamily="34" charset="-122"/>
                 <a:cs typeface="Arial" pitchFamily="34" charset="-120"/>
               </a:rPr>
+              <a:t>Most of your attack surface is other people's code</a:t>
+            </a:r>
+            <a:endParaRPr lang="en-US" sz="2600" dirty="0"/>
+          </a:p>
+        </p:txBody>
+      </p:sp>
+      <p:pic>
+        <p:nvPicPr>
+          <p:cNvPr id="5" name="Image 1" descr="Why the supply chain is now the top-tier risk: you write about 10% of what you ship and dependencies are the other ~90%, so every bug in that 90% ships under your name; one poisoned package fans out to thousands of downstream victims (xz-utils 2024, event-stream 2018, SolarWinds 2020); and OWASP promoted this up the list to A03:2025 Software Supply Chain Failures. You can write perfect code and still be owned through a dependency you never read.">    </p:cNvPr>
+          <p:cNvPicPr>
+            <a:picLocks noChangeAspect="1"/>
+          </p:cNvPicPr>
+          <p:nvPr/>
+        </p:nvPicPr>
+        <p:blipFill>
+          <a:blip r:embed="rId2"/>
+          <a:stretch>
+            <a:fillRect/>
+          </a:stretch>
+        </p:blipFill>
+        <p:spPr>
+          <a:xfrm>
+            <a:off x="2590800" y="1097280"/>
+            <a:ext cx="3962400" cy="3566160"/>
+          </a:xfrm>
+          <a:prstGeom prst="rect">
+            <a:avLst/>
+          </a:prstGeom>
+        </p:spPr>
+      </p:pic>
+      <p:sp>
+        <p:nvSpPr>
+          <p:cNvPr id="6" name="Text 2"/>
+          <p:cNvSpPr/>
+          <p:nvPr/>
+        </p:nvSpPr>
+        <p:spPr>
+          <a:xfrm>
+            <a:off x="457200" y="4800600"/>
+            <a:ext cx="6949440" cy="274320"/>
+          </a:xfrm>
+          <a:prstGeom prst="rect">
+            <a:avLst/>
+          </a:prstGeom>
+          <a:noFill/>
+          <a:ln/>
+        </p:spPr>
+        <p:txBody>
+          <a:bodyPr wrap="square" lIns="0" tIns="0" rIns="0" bIns="0" rtlCol="0" anchor="ctr"/>
+          <a:lstStyle/>
+          <a:p>
+            <a:pPr indent="0" marL="0">
+              <a:buNone/>
+            </a:pPr>
+            <a:r>
+              <a:rPr lang="en-US" sz="900" dirty="0">
+                <a:solidFill>
+                  <a:srgbClr val="64748B"/>
+                </a:solidFill>
+                <a:latin typeface="Calibri" pitchFamily="34" charset="0"/>
+                <a:ea typeface="Calibri" pitchFamily="34" charset="-122"/>
+                <a:cs typeface="Calibri" pitchFamily="34" charset="-120"/>
+              </a:rPr>
+              <a:t>Software Security · Week 12</a:t>
+            </a:r>
+            <a:endParaRPr lang="en-US" sz="900" dirty="0"/>
+          </a:p>
+        </p:txBody>
+      </p:sp>
+      <p:pic>
+        <p:nvPicPr>
+          <p:cNvPr id="7" name="Image 2" descr="/private/tmp/claude-501/-Users-pop7-Library-CloudStorage-OneDrive-MonsterConnectCo--Ltd-Lecture-KOSEN69---software-security/f63a82af-e1ad-40ed-89c4-03c6ca776e3f/scratchpad/tzfix/slides/pptx/assets/logo-small.png">    </p:cNvPr>
+          <p:cNvPicPr>
+            <a:picLocks noChangeAspect="1"/>
+          </p:cNvPicPr>
+          <p:nvPr/>
+        </p:nvPicPr>
+        <p:blipFill>
+          <a:blip r:embed="rId3"/>
+          <a:stretch>
+            <a:fillRect/>
+          </a:stretch>
+        </p:blipFill>
+        <p:spPr>
+          <a:xfrm>
+            <a:off x="7882128" y="4700016"/>
+            <a:ext cx="768096" cy="356616"/>
+          </a:xfrm>
+          <a:prstGeom prst="rect">
+            <a:avLst/>
+          </a:prstGeom>
+        </p:spPr>
+      </p:pic>
+    </p:spTree>
+  </p:cSld>
+  <p:clrMapOvr>
+    <a:masterClrMapping/>
+  </p:clrMapOvr>
+</p:sld>
+</file>
+
+<file path=ppt/slides/slide5.xml><?xml version="1.0" encoding="utf-8"?>
+<p:sld xmlns:a="http://schemas.openxmlformats.org/drawingml/2006/main" xmlns:r="http://schemas.openxmlformats.org/officeDocument/2006/relationships" xmlns:p="http://schemas.openxmlformats.org/presentationml/2006/main">
+  <p:cSld name="Slide 5">
+    <p:bg>
+      <p:bgPr>
+        <a:solidFill>
+          <a:srgbClr val="FFFFFF"/>
+        </a:solidFill>
+      </p:bgPr>
+    </p:bg>
+    <p:spTree>
+      <p:nvGrpSpPr>
+        <p:cNvPr id="1" name=""/>
+        <p:cNvGrpSpPr/>
+        <p:nvPr/>
+      </p:nvGrpSpPr>
+      <p:grpSpPr>
+        <a:xfrm>
+          <a:off x="0" y="0"/>
+          <a:ext cx="0" cy="0"/>
+          <a:chOff x="0" y="0"/>
+          <a:chExt cx="0" cy="0"/>
+        </a:xfrm>
+      </p:grpSpPr>
+      <p:sp>
+        <p:nvSpPr>
+          <p:cNvPr id="2" name="Shape 0"/>
+          <p:cNvSpPr/>
+          <p:nvPr/>
+        </p:nvSpPr>
+        <p:spPr>
+          <a:xfrm>
+            <a:off x="457200" y="384048"/>
+            <a:ext cx="530352" cy="530352"/>
+          </a:xfrm>
+          <a:prstGeom prst="ellipse">
+            <a:avLst/>
+          </a:prstGeom>
+          <a:solidFill>
+            <a:srgbClr val="E35205"/>
+          </a:solidFill>
+          <a:ln/>
+          <a:effectLst>
+            <a:outerShdw sx="100000" sy="100000" kx="0" ky="0" algn="bl" rotWithShape="0" blurRad="76200" dist="25400" dir="5400000">
+              <a:srgbClr val="000000">
+                <a:alpha val="12000"/>
+              </a:srgbClr>
+            </a:outerShdw>
+          </a:effectLst>
+        </p:spPr>
+      </p:sp>
+      <p:pic>
+        <p:nvPicPr>
+          <p:cNvPr id="3" name="Image 0" descr="preencoded.png">    </p:cNvPr>
+          <p:cNvPicPr>
+            <a:picLocks noChangeAspect="1"/>
+          </p:cNvPicPr>
+          <p:nvPr/>
+        </p:nvPicPr>
+        <p:blipFill>
+          <a:blip r:embed="rId1"/>
+          <a:stretch>
+            <a:fillRect/>
+          </a:stretch>
+        </p:blipFill>
+        <p:spPr>
+          <a:xfrm>
+            <a:off x="594360" y="521208"/>
+            <a:ext cx="256032" cy="256032"/>
+          </a:xfrm>
+          <a:prstGeom prst="rect">
+            <a:avLst/>
+          </a:prstGeom>
+        </p:spPr>
+      </p:pic>
+      <p:sp>
+        <p:nvSpPr>
+          <p:cNvPr id="4" name="Text 1"/>
+          <p:cNvSpPr/>
+          <p:nvPr/>
+        </p:nvSpPr>
+        <p:spPr>
+          <a:xfrm>
+            <a:off x="1143000" y="329184"/>
+            <a:ext cx="7498080" cy="603504"/>
+          </a:xfrm>
+          <a:prstGeom prst="rect">
+            <a:avLst/>
+          </a:prstGeom>
+          <a:noFill/>
+          <a:ln/>
+        </p:spPr>
+        <p:txBody>
+          <a:bodyPr wrap="square" lIns="0" tIns="0" rIns="0" bIns="0" rtlCol="0" anchor="ctr"/>
+          <a:lstStyle/>
+          <a:p>
+            <a:pPr indent="0" marL="0">
+              <a:buNone/>
+            </a:pPr>
+            <a:r>
+              <a:rPr lang="en-US" sz="2600" b="1" dirty="0">
+                <a:solidFill>
+                  <a:srgbClr val="1F2937"/>
+                </a:solidFill>
+                <a:latin typeface="Arial" pitchFamily="34" charset="0"/>
+                <a:ea typeface="Arial" pitchFamily="34" charset="-122"/>
+                <a:cs typeface="Arial" pitchFamily="34" charset="-120"/>
+              </a:rPr>
               <a:t>Real supply-chain attacks</a:t>
             </a:r>
             <a:endParaRPr lang="en-US" sz="2600" dirty="0"/>
@@ -6163,7 +8448,7 @@
       </p:sp>
       <p:graphicFrame>
         <p:nvGraphicFramePr>
-          <p:cNvPr id="5" name="Table 0"/>
+          <p:cNvPr id="6" name="Table 0"/>
           <p:cNvGraphicFramePr>
             <a:graphicFrameLocks noGrp="1"/>
           </p:cNvGraphicFramePr>
@@ -6976,255 +9261,7 @@
       </p:sp>
       <p:pic>
         <p:nvPicPr>
-          <p:cNvPr id="7" name="Image 1" descr="/private/tmp/claude-501/-Users-pop7-Library-CloudStorage-OneDrive-MonsterConnectCo--Ltd-Lecture-KOSEN69---software-security/e6d6556f-17de-403d-a9a0-cf2f846149b4/scratchpad/tree/slides/pptx/assets/logo-small.png">    </p:cNvPr>
-          <p:cNvPicPr>
-            <a:picLocks noChangeAspect="1"/>
-          </p:cNvPicPr>
-          <p:nvPr/>
-        </p:nvPicPr>
-        <p:blipFill>
-          <a:blip r:embed="rId2"/>
-          <a:stretch>
-            <a:fillRect/>
-          </a:stretch>
-        </p:blipFill>
-        <p:spPr>
-          <a:xfrm>
-            <a:off x="7882128" y="4700016"/>
-            <a:ext cx="768096" cy="356616"/>
-          </a:xfrm>
-          <a:prstGeom prst="rect">
-            <a:avLst/>
-          </a:prstGeom>
-        </p:spPr>
-      </p:pic>
-    </p:spTree>
-  </p:cSld>
-  <p:clrMapOvr>
-    <a:masterClrMapping/>
-  </p:clrMapOvr>
-</p:sld>
-</file>
-
-<file path=ppt/slides/slide5.xml><?xml version="1.0" encoding="utf-8"?>
-<p:sld xmlns:a="http://schemas.openxmlformats.org/drawingml/2006/main" xmlns:r="http://schemas.openxmlformats.org/officeDocument/2006/relationships" xmlns:p="http://schemas.openxmlformats.org/presentationml/2006/main">
-  <p:cSld name="Slide 5">
-    <p:bg>
-      <p:bgPr>
-        <a:solidFill>
-          <a:srgbClr val="FFFFFF"/>
-        </a:solidFill>
-      </p:bgPr>
-    </p:bg>
-    <p:spTree>
-      <p:nvGrpSpPr>
-        <p:cNvPr id="1" name=""/>
-        <p:cNvGrpSpPr/>
-        <p:nvPr/>
-      </p:nvGrpSpPr>
-      <p:grpSpPr>
-        <a:xfrm>
-          <a:off x="0" y="0"/>
-          <a:ext cx="0" cy="0"/>
-          <a:chOff x="0" y="0"/>
-          <a:chExt cx="0" cy="0"/>
-        </a:xfrm>
-      </p:grpSpPr>
-      <p:sp>
-        <p:nvSpPr>
-          <p:cNvPr id="2" name="Shape 0"/>
-          <p:cNvSpPr/>
-          <p:nvPr/>
-        </p:nvSpPr>
-        <p:spPr>
-          <a:xfrm>
-            <a:off x="457200" y="384048"/>
-            <a:ext cx="530352" cy="530352"/>
-          </a:xfrm>
-          <a:prstGeom prst="ellipse">
-            <a:avLst/>
-          </a:prstGeom>
-          <a:solidFill>
-            <a:srgbClr val="E35205"/>
-          </a:solidFill>
-          <a:ln/>
-          <a:effectLst>
-            <a:outerShdw sx="100000" sy="100000" kx="0" ky="0" algn="bl" rotWithShape="0" blurRad="76200" dist="25400" dir="5400000">
-              <a:srgbClr val="000000">
-                <a:alpha val="12000"/>
-              </a:srgbClr>
-            </a:outerShdw>
-          </a:effectLst>
-        </p:spPr>
-      </p:sp>
-      <p:pic>
-        <p:nvPicPr>
-          <p:cNvPr id="3" name="Image 0" descr="preencoded.png">    </p:cNvPr>
-          <p:cNvPicPr>
-            <a:picLocks noChangeAspect="1"/>
-          </p:cNvPicPr>
-          <p:nvPr/>
-        </p:nvPicPr>
-        <p:blipFill>
-          <a:blip r:embed="rId1"/>
-          <a:stretch>
-            <a:fillRect/>
-          </a:stretch>
-        </p:blipFill>
-        <p:spPr>
-          <a:xfrm>
-            <a:off x="594360" y="521208"/>
-            <a:ext cx="256032" cy="256032"/>
-          </a:xfrm>
-          <a:prstGeom prst="rect">
-            <a:avLst/>
-          </a:prstGeom>
-        </p:spPr>
-      </p:pic>
-      <p:sp>
-        <p:nvSpPr>
-          <p:cNvPr id="4" name="Text 1"/>
-          <p:cNvSpPr/>
-          <p:nvPr/>
-        </p:nvSpPr>
-        <p:spPr>
-          <a:xfrm>
-            <a:off x="1143000" y="329184"/>
-            <a:ext cx="7498080" cy="603504"/>
-          </a:xfrm>
-          <a:prstGeom prst="rect">
-            <a:avLst/>
-          </a:prstGeom>
-          <a:noFill/>
-          <a:ln/>
-        </p:spPr>
-        <p:txBody>
-          <a:bodyPr wrap="square" lIns="0" tIns="0" rIns="0" bIns="0" rtlCol="0" anchor="ctr"/>
-          <a:lstStyle/>
-          <a:p>
-            <a:pPr indent="0" marL="0">
-              <a:buNone/>
-            </a:pPr>
-            <a:r>
-              <a:rPr lang="en-US" sz="2600" b="1" dirty="0">
-                <a:solidFill>
-                  <a:srgbClr val="1F2937"/>
-                </a:solidFill>
-                <a:latin typeface="Arial" pitchFamily="34" charset="0"/>
-                <a:ea typeface="Arial" pitchFamily="34" charset="-122"/>
-                <a:cs typeface="Arial" pitchFamily="34" charset="-120"/>
-              </a:rPr>
-              <a:t>Real supply-chain attacks (cont.)</a:t>
-            </a:r>
-            <a:endParaRPr lang="en-US" sz="2600" dirty="0"/>
-          </a:p>
-        </p:txBody>
-      </p:sp>
-      <p:sp>
-        <p:nvSpPr>
-          <p:cNvPr id="5" name="Shape 2"/>
-          <p:cNvSpPr/>
-          <p:nvPr/>
-        </p:nvSpPr>
-        <p:spPr>
-          <a:xfrm>
-            <a:off x="457200" y="1325880"/>
-            <a:ext cx="8229600" cy="822960"/>
-          </a:xfrm>
-          <a:prstGeom prst="roundRect">
-            <a:avLst>
-              <a:gd name="adj" fmla="val 8889"/>
-            </a:avLst>
-          </a:prstGeom>
-          <a:solidFill>
-            <a:srgbClr val="E8EDF3"/>
-          </a:solidFill>
-          <a:ln/>
-        </p:spPr>
-      </p:sp>
-      <p:sp>
-        <p:nvSpPr>
-          <p:cNvPr id="6" name="Text 3"/>
-          <p:cNvSpPr/>
-          <p:nvPr/>
-        </p:nvSpPr>
-        <p:spPr>
-          <a:xfrm>
-            <a:off x="731520" y="1325880"/>
-            <a:ext cx="7680960" cy="822960"/>
-          </a:xfrm>
-          <a:prstGeom prst="rect">
-            <a:avLst/>
-          </a:prstGeom>
-          <a:noFill/>
-          <a:ln/>
-        </p:spPr>
-        <p:txBody>
-          <a:bodyPr wrap="square" lIns="0" tIns="0" rIns="0" bIns="0" rtlCol="0" anchor="ctr">
-            <a:normAutofit/>
-          </a:bodyPr>
-          <a:lstStyle/>
-          <a:p>
-            <a:pPr indent="0" marL="0">
-              <a:buNone/>
-            </a:pPr>
-            <a:r>
-              <a:rPr lang="en-US" sz="1400" i="1" dirty="0">
-                <a:solidFill>
-                  <a:srgbClr val="E35205"/>
-                </a:solidFill>
-                <a:latin typeface="Calibri" pitchFamily="34" charset="0"/>
-                <a:ea typeface="Calibri" pitchFamily="34" charset="-122"/>
-                <a:cs typeface="Calibri" pitchFamily="34" charset="-120"/>
-              </a:rPr>
-              <a:t>Attacks are shifting upstream: registry → maintainer → CI/CD.</a:t>
-            </a:r>
-            <a:endParaRPr lang="en-US" sz="1400" dirty="0"/>
-          </a:p>
-        </p:txBody>
-      </p:sp>
-      <p:sp>
-        <p:nvSpPr>
-          <p:cNvPr id="7" name="Text 4"/>
-          <p:cNvSpPr/>
-          <p:nvPr/>
-        </p:nvSpPr>
-        <p:spPr>
-          <a:xfrm>
-            <a:off x="457200" y="4800600"/>
-            <a:ext cx="6949440" cy="274320"/>
-          </a:xfrm>
-          <a:prstGeom prst="rect">
-            <a:avLst/>
-          </a:prstGeom>
-          <a:noFill/>
-          <a:ln/>
-        </p:spPr>
-        <p:txBody>
-          <a:bodyPr wrap="square" lIns="0" tIns="0" rIns="0" bIns="0" rtlCol="0" anchor="ctr"/>
-          <a:lstStyle/>
-          <a:p>
-            <a:pPr indent="0" marL="0">
-              <a:buNone/>
-            </a:pPr>
-            <a:r>
-              <a:rPr lang="en-US" sz="900" dirty="0">
-                <a:solidFill>
-                  <a:srgbClr val="64748B"/>
-                </a:solidFill>
-                <a:latin typeface="Calibri" pitchFamily="34" charset="0"/>
-                <a:ea typeface="Calibri" pitchFamily="34" charset="-122"/>
-                <a:cs typeface="Calibri" pitchFamily="34" charset="-120"/>
-              </a:rPr>
-              <a:t>Software Security · Week 12</a:t>
-            </a:r>
-            <a:endParaRPr lang="en-US" sz="900" dirty="0"/>
-          </a:p>
-        </p:txBody>
-      </p:sp>
-      <p:pic>
-        <p:nvPicPr>
-          <p:cNvPr id="8" name="Image 1" descr="/private/tmp/claude-501/-Users-pop7-Library-CloudStorage-OneDrive-MonsterConnectCo--Ltd-Lecture-KOSEN69---software-security/e6d6556f-17de-403d-a9a0-cf2f846149b4/scratchpad/tree/slides/pptx/assets/logo-small.png">    </p:cNvPr>
+          <p:cNvPr id="7" name="Image 1" descr="/private/tmp/claude-501/-Users-pop7-Library-CloudStorage-OneDrive-MonsterConnectCo--Ltd-Lecture-KOSEN69---software-security/f63a82af-e1ad-40ed-89c4-03c6ca776e3f/scratchpad/tzfix/slides/pptx/assets/logo-small.png">    </p:cNvPr>
           <p:cNvPicPr>
             <a:picLocks noChangeAspect="1"/>
           </p:cNvPicPr>
@@ -7362,7 +9399,7 @@
                 <a:ea typeface="Arial" pitchFamily="34" charset="-122"/>
                 <a:cs typeface="Arial" pitchFamily="34" charset="-120"/>
               </a:rPr>
-              <a:t>Attack vectors</a:t>
+              <a:t>Real supply-chain attacks (cont.)</a:t>
             </a:r>
             <a:endParaRPr lang="en-US" sz="2600" dirty="0"/>
           </a:p>
@@ -7377,24 +9414,17 @@
         <p:spPr>
           <a:xfrm>
             <a:off x="457200" y="1325880"/>
-            <a:ext cx="8229600" cy="1920240"/>
+            <a:ext cx="8229600" cy="822960"/>
           </a:xfrm>
           <a:prstGeom prst="roundRect">
             <a:avLst>
-              <a:gd name="adj" fmla="val 3810"/>
+              <a:gd name="adj" fmla="val 8889"/>
             </a:avLst>
           </a:prstGeom>
           <a:solidFill>
-            <a:srgbClr val="F1F5F9"/>
+            <a:srgbClr val="E8EDF3"/>
           </a:solidFill>
           <a:ln/>
-          <a:effectLst>
-            <a:outerShdw sx="100000" sy="100000" kx="0" ky="0" algn="bl" rotWithShape="0" blurRad="76200" dist="25400" dir="5400000">
-              <a:srgbClr val="000000">
-                <a:alpha val="12000"/>
-              </a:srgbClr>
-            </a:outerShdw>
-          </a:effectLst>
         </p:spPr>
       </p:sp>
       <p:sp>
@@ -7405,8 +9435,8 @@
         </p:nvSpPr>
         <p:spPr>
           <a:xfrm>
-            <a:off x="731520" y="1435608"/>
-            <a:ext cx="7680960" cy="1700784"/>
+            <a:off x="731520" y="1325880"/>
+            <a:ext cx="7680960" cy="822960"/>
           </a:xfrm>
           <a:prstGeom prst="rect">
             <a:avLst/>
@@ -7415,129 +9445,62 @@
           <a:ln/>
         </p:spPr>
         <p:txBody>
-          <a:bodyPr wrap="square" lIns="0" tIns="0" rIns="0" bIns="0" rtlCol="0" anchor="t">
+          <a:bodyPr wrap="square" lIns="0" tIns="0" rIns="0" bIns="0" rtlCol="0" anchor="ctr">
             <a:normAutofit/>
           </a:bodyPr>
           <a:lstStyle/>
           <a:p>
-            <a:pPr marL="342900" indent="-342900">
-              <a:spcAft>
-                <a:spcPts val="600"/>
-              </a:spcAft>
-              <a:buSzPct val="100000"/>
-              <a:buChar char="•"/>
-            </a:pPr>
-            <a:r>
-              <a:rPr lang="en-US" sz="1400" dirty="0">
-                <a:solidFill>
-                  <a:srgbClr val="1F2937"/>
+            <a:pPr indent="0" marL="0">
+              <a:buNone/>
+            </a:pPr>
+            <a:r>
+              <a:rPr lang="en-US" sz="1400" i="1" dirty="0">
+                <a:solidFill>
+                  <a:srgbClr val="E35205"/>
                 </a:solidFill>
                 <a:latin typeface="Calibri" pitchFamily="34" charset="0"/>
                 <a:ea typeface="Calibri" pitchFamily="34" charset="-122"/>
                 <a:cs typeface="Calibri" pitchFamily="34" charset="-120"/>
               </a:rPr>
-              <a:t>Typosquatting — reqeusts vs requests; the malicious package's setup.py runs at install time, before any of your code runs — you don't have to import it to be owned</a:t>
+              <a:t>Attacks are shifting upstream: registry → maintainer → CI/CD.</a:t>
             </a:r>
             <a:endParaRPr lang="en-US" sz="1400" dirty="0"/>
           </a:p>
-          <a:p>
-            <a:pPr marL="342900" indent="-342900">
-              <a:spcAft>
-                <a:spcPts val="600"/>
-              </a:spcAft>
-              <a:buSzPct val="100000"/>
-              <a:buChar char="•"/>
-            </a:pPr>
-            <a:r>
-              <a:rPr lang="en-US" sz="1400" dirty="0">
-                <a:solidFill>
-                  <a:srgbClr val="1F2937"/>
+        </p:txBody>
+      </p:sp>
+      <p:sp>
+        <p:nvSpPr>
+          <p:cNvPr id="7" name="Text 4"/>
+          <p:cNvSpPr/>
+          <p:nvPr/>
+        </p:nvSpPr>
+        <p:spPr>
+          <a:xfrm>
+            <a:off x="457200" y="4800600"/>
+            <a:ext cx="6949440" cy="274320"/>
+          </a:xfrm>
+          <a:prstGeom prst="rect">
+            <a:avLst/>
+          </a:prstGeom>
+          <a:noFill/>
+          <a:ln/>
+        </p:spPr>
+        <p:txBody>
+          <a:bodyPr wrap="square" lIns="0" tIns="0" rIns="0" bIns="0" rtlCol="0" anchor="ctr"/>
+          <a:lstStyle/>
+          <a:p>
+            <a:pPr indent="0" marL="0">
+              <a:buNone/>
+            </a:pPr>
+            <a:r>
+              <a:rPr lang="en-US" sz="900" dirty="0">
+                <a:solidFill>
+                  <a:srgbClr val="64748B"/>
                 </a:solidFill>
                 <a:latin typeface="Calibri" pitchFamily="34" charset="0"/>
                 <a:ea typeface="Calibri" pitchFamily="34" charset="-122"/>
                 <a:cs typeface="Calibri" pitchFamily="34" charset="-120"/>
               </a:rPr>
-              <a:t>Dependency confusion (CWE-1357) — public pkg shadows internal name</a:t>
-            </a:r>
-            <a:endParaRPr lang="en-US" sz="1400" dirty="0"/>
-          </a:p>
-          <a:p>
-            <a:pPr marL="342900" indent="-342900">
-              <a:spcAft>
-                <a:spcPts val="600"/>
-              </a:spcAft>
-              <a:buSzPct val="100000"/>
-              <a:buChar char="•"/>
-            </a:pPr>
-            <a:r>
-              <a:rPr lang="en-US" sz="1400" dirty="0">
-                <a:solidFill>
-                  <a:srgbClr val="1F2937"/>
-                </a:solidFill>
-                <a:latin typeface="Calibri" pitchFamily="34" charset="0"/>
-                <a:ea typeface="Calibri" pitchFamily="34" charset="-122"/>
-                <a:cs typeface="Calibri" pitchFamily="34" charset="-120"/>
-              </a:rPr>
-              <a:t>Malicious updates — compromised maintainer</a:t>
-            </a:r>
-            <a:endParaRPr lang="en-US" sz="1400" dirty="0"/>
-          </a:p>
-          <a:p>
-            <a:pPr marL="342900" indent="-342900">
-              <a:spcAft>
-                <a:spcPts val="600"/>
-              </a:spcAft>
-              <a:buSzPct val="100000"/>
-              <a:buChar char="•"/>
-            </a:pPr>
-            <a:r>
-              <a:rPr lang="en-US" sz="1400" dirty="0">
-                <a:solidFill>
-                  <a:srgbClr val="1F2937"/>
-                </a:solidFill>
-                <a:latin typeface="Calibri" pitchFamily="34" charset="0"/>
-                <a:ea typeface="Calibri" pitchFamily="34" charset="-122"/>
-                <a:cs typeface="Calibri" pitchFamily="34" charset="-120"/>
-              </a:rPr>
-              <a:t>Transitive risk — deps of deps you never chose</a:t>
-            </a:r>
-            <a:endParaRPr lang="en-US" sz="1400" dirty="0"/>
-          </a:p>
-        </p:txBody>
-      </p:sp>
-      <p:sp>
-        <p:nvSpPr>
-          <p:cNvPr id="7" name="Text 4"/>
-          <p:cNvSpPr/>
-          <p:nvPr/>
-        </p:nvSpPr>
-        <p:spPr>
-          <a:xfrm>
-            <a:off x="457200" y="4800600"/>
-            <a:ext cx="6949440" cy="274320"/>
-          </a:xfrm>
-          <a:prstGeom prst="rect">
-            <a:avLst/>
-          </a:prstGeom>
-          <a:noFill/>
-          <a:ln/>
-        </p:spPr>
-        <p:txBody>
-          <a:bodyPr wrap="square" lIns="0" tIns="0" rIns="0" bIns="0" rtlCol="0" anchor="ctr"/>
-          <a:lstStyle/>
-          <a:p>
-            <a:pPr indent="0" marL="0">
-              <a:buNone/>
-            </a:pPr>
-            <a:r>
-              <a:rPr lang="en-US" sz="900" dirty="0">
-                <a:solidFill>
-                  <a:srgbClr val="64748B"/>
-                </a:solidFill>
-                <a:latin typeface="Calibri" pitchFamily="34" charset="0"/>
-                <a:ea typeface="Calibri" pitchFamily="34" charset="-122"/>
-                <a:cs typeface="Calibri" pitchFamily="34" charset="-120"/>
-              </a:rPr>
               <a:t>Software Security · Week 12</a:t>
             </a:r>
             <a:endParaRPr lang="en-US" sz="900" dirty="0"/>
@@ -7546,7 +9509,7 @@
       </p:sp>
       <p:pic>
         <p:nvPicPr>
-          <p:cNvPr id="8" name="Image 1" descr="/private/tmp/claude-501/-Users-pop7-Library-CloudStorage-OneDrive-MonsterConnectCo--Ltd-Lecture-KOSEN69---software-security/e6d6556f-17de-403d-a9a0-cf2f846149b4/scratchpad/tree/slides/pptx/assets/logo-small.png">    </p:cNvPr>
+          <p:cNvPr id="8" name="Image 1" descr="/private/tmp/claude-501/-Users-pop7-Library-CloudStorage-OneDrive-MonsterConnectCo--Ltd-Lecture-KOSEN69---software-security/f63a82af-e1ad-40ed-89c4-03c6ca776e3f/scratchpad/tzfix/slides/pptx/assets/logo-small.png">    </p:cNvPr>
           <p:cNvPicPr>
             <a:picLocks noChangeAspect="1"/>
           </p:cNvPicPr>
@@ -7684,7 +9647,7 @@
                 <a:ea typeface="Arial" pitchFamily="34" charset="-122"/>
                 <a:cs typeface="Arial" pitchFamily="34" charset="-120"/>
               </a:rPr>
-              <a:t>Try it — which package actually installs?</a:t>
+              <a:t>Attack vectors</a:t>
             </a:r>
             <a:endParaRPr lang="en-US" sz="2600" dirty="0"/>
           </a:p>
@@ -7692,14 +9655,43 @@
       </p:sp>
       <p:sp>
         <p:nvSpPr>
-          <p:cNvPr id="5" name="Text 2"/>
+          <p:cNvPr id="5" name="Shape 2"/>
           <p:cNvSpPr/>
           <p:nvPr/>
         </p:nvSpPr>
         <p:spPr>
           <a:xfrm>
-            <a:off x="548640" y="1325880"/>
-            <a:ext cx="8046720" cy="822960"/>
+            <a:off x="457200" y="1325880"/>
+            <a:ext cx="8229600" cy="1920240"/>
+          </a:xfrm>
+          <a:prstGeom prst="roundRect">
+            <a:avLst>
+              <a:gd name="adj" fmla="val 3810"/>
+            </a:avLst>
+          </a:prstGeom>
+          <a:solidFill>
+            <a:srgbClr val="F1F5F9"/>
+          </a:solidFill>
+          <a:ln/>
+          <a:effectLst>
+            <a:outerShdw sx="100000" sy="100000" kx="0" ky="0" algn="bl" rotWithShape="0" blurRad="76200" dist="25400" dir="5400000">
+              <a:srgbClr val="000000">
+                <a:alpha val="12000"/>
+              </a:srgbClr>
+            </a:outerShdw>
+          </a:effectLst>
+        </p:spPr>
+      </p:sp>
+      <p:sp>
+        <p:nvSpPr>
+          <p:cNvPr id="6" name="Text 3"/>
+          <p:cNvSpPr/>
+          <p:nvPr/>
+        </p:nvSpPr>
+        <p:spPr>
+          <a:xfrm>
+            <a:off x="731520" y="1435608"/>
+            <a:ext cx="7680960" cy="1700784"/>
           </a:xfrm>
           <a:prstGeom prst="rect">
             <a:avLst/>
@@ -7713,8 +9705,12 @@
           </a:bodyPr>
           <a:lstStyle/>
           <a:p>
-            <a:pPr indent="0" marL="0">
-              <a:buNone/>
+            <a:pPr marL="342900" indent="-342900">
+              <a:spcAft>
+                <a:spcPts val="600"/>
+              </a:spcAft>
+              <a:buSzPct val="100000"/>
+              <a:buChar char="•"/>
             </a:pPr>
             <a:r>
               <a:rPr lang="en-US" sz="1400" dirty="0">
@@ -7725,13 +9721,17 @@
                 <a:ea typeface="Calibri" pitchFamily="34" charset="-122"/>
                 <a:cs typeface="Calibri" pitchFamily="34" charset="-120"/>
               </a:rPr>
-              <a:t>Set both versions and the index mode. The resolver's real rule decides.</a:t>
+              <a:t>Typosquatting — reqeusts vs requests; the malicious package's setup.py runs at install time, before any of your code runs — you don't have to import it to be owned</a:t>
             </a:r>
             <a:endParaRPr lang="en-US" sz="1400" dirty="0"/>
           </a:p>
           <a:p>
-            <a:pPr indent="0" marL="0">
-              <a:buNone/>
+            <a:pPr marL="342900" indent="-342900">
+              <a:spcAft>
+                <a:spcPts val="600"/>
+              </a:spcAft>
+              <a:buSzPct val="100000"/>
+              <a:buChar char="•"/>
             </a:pPr>
             <a:r>
               <a:rPr lang="en-US" sz="1400" dirty="0">
@@ -7742,45 +9742,87 @@
                 <a:ea typeface="Calibri" pitchFamily="34" charset="-122"/>
                 <a:cs typeface="Calibri" pitchFamily="34" charset="-120"/>
               </a:rPr>
-              <a:t>Try it live: /sim/resolver-confusion (interactive simulation, web only)</a:t>
+              <a:t>Dependency confusion (CWE-1357) — public pkg shadows internal name</a:t>
             </a:r>
             <a:endParaRPr lang="en-US" sz="1400" dirty="0"/>
           </a:p>
-        </p:txBody>
-      </p:sp>
-      <p:sp>
-        <p:nvSpPr>
-          <p:cNvPr id="6" name="Text 3"/>
-          <p:cNvSpPr/>
-          <p:nvPr/>
-        </p:nvSpPr>
-        <p:spPr>
-          <a:xfrm>
-            <a:off x="457200" y="4800600"/>
-            <a:ext cx="6949440" cy="274320"/>
-          </a:xfrm>
-          <a:prstGeom prst="rect">
-            <a:avLst/>
-          </a:prstGeom>
-          <a:noFill/>
-          <a:ln/>
-        </p:spPr>
-        <p:txBody>
-          <a:bodyPr wrap="square" lIns="0" tIns="0" rIns="0" bIns="0" rtlCol="0" anchor="ctr"/>
-          <a:lstStyle/>
-          <a:p>
-            <a:pPr indent="0" marL="0">
-              <a:buNone/>
-            </a:pPr>
-            <a:r>
-              <a:rPr lang="en-US" sz="900" dirty="0">
-                <a:solidFill>
-                  <a:srgbClr val="64748B"/>
+          <a:p>
+            <a:pPr marL="342900" indent="-342900">
+              <a:spcAft>
+                <a:spcPts val="600"/>
+              </a:spcAft>
+              <a:buSzPct val="100000"/>
+              <a:buChar char="•"/>
+            </a:pPr>
+            <a:r>
+              <a:rPr lang="en-US" sz="1400" dirty="0">
+                <a:solidFill>
+                  <a:srgbClr val="1F2937"/>
                 </a:solidFill>
                 <a:latin typeface="Calibri" pitchFamily="34" charset="0"/>
                 <a:ea typeface="Calibri" pitchFamily="34" charset="-122"/>
                 <a:cs typeface="Calibri" pitchFamily="34" charset="-120"/>
               </a:rPr>
+              <a:t>Malicious updates — compromised maintainer</a:t>
+            </a:r>
+            <a:endParaRPr lang="en-US" sz="1400" dirty="0"/>
+          </a:p>
+          <a:p>
+            <a:pPr marL="342900" indent="-342900">
+              <a:spcAft>
+                <a:spcPts val="600"/>
+              </a:spcAft>
+              <a:buSzPct val="100000"/>
+              <a:buChar char="•"/>
+            </a:pPr>
+            <a:r>
+              <a:rPr lang="en-US" sz="1400" dirty="0">
+                <a:solidFill>
+                  <a:srgbClr val="1F2937"/>
+                </a:solidFill>
+                <a:latin typeface="Calibri" pitchFamily="34" charset="0"/>
+                <a:ea typeface="Calibri" pitchFamily="34" charset="-122"/>
+                <a:cs typeface="Calibri" pitchFamily="34" charset="-120"/>
+              </a:rPr>
+              <a:t>Transitive risk — deps of deps you never chose</a:t>
+            </a:r>
+            <a:endParaRPr lang="en-US" sz="1400" dirty="0"/>
+          </a:p>
+        </p:txBody>
+      </p:sp>
+      <p:sp>
+        <p:nvSpPr>
+          <p:cNvPr id="7" name="Text 4"/>
+          <p:cNvSpPr/>
+          <p:nvPr/>
+        </p:nvSpPr>
+        <p:spPr>
+          <a:xfrm>
+            <a:off x="457200" y="4800600"/>
+            <a:ext cx="6949440" cy="274320"/>
+          </a:xfrm>
+          <a:prstGeom prst="rect">
+            <a:avLst/>
+          </a:prstGeom>
+          <a:noFill/>
+          <a:ln/>
+        </p:spPr>
+        <p:txBody>
+          <a:bodyPr wrap="square" lIns="0" tIns="0" rIns="0" bIns="0" rtlCol="0" anchor="ctr"/>
+          <a:lstStyle/>
+          <a:p>
+            <a:pPr indent="0" marL="0">
+              <a:buNone/>
+            </a:pPr>
+            <a:r>
+              <a:rPr lang="en-US" sz="900" dirty="0">
+                <a:solidFill>
+                  <a:srgbClr val="64748B"/>
+                </a:solidFill>
+                <a:latin typeface="Calibri" pitchFamily="34" charset="0"/>
+                <a:ea typeface="Calibri" pitchFamily="34" charset="-122"/>
+                <a:cs typeface="Calibri" pitchFamily="34" charset="-120"/>
+              </a:rPr>
               <a:t>Software Security · Week 12</a:t>
             </a:r>
             <a:endParaRPr lang="en-US" sz="900" dirty="0"/>
@@ -7789,7 +9831,7 @@
       </p:sp>
       <p:pic>
         <p:nvPicPr>
-          <p:cNvPr id="7" name="Image 1" descr="/private/tmp/claude-501/-Users-pop7-Library-CloudStorage-OneDrive-MonsterConnectCo--Ltd-Lecture-KOSEN69---software-security/e6d6556f-17de-403d-a9a0-cf2f846149b4/scratchpad/tree/slides/pptx/assets/logo-small.png">    </p:cNvPr>
+          <p:cNvPr id="8" name="Image 1" descr="/private/tmp/claude-501/-Users-pop7-Library-CloudStorage-OneDrive-MonsterConnectCo--Ltd-Lecture-KOSEN69---software-security/f63a82af-e1ad-40ed-89c4-03c6ca776e3f/scratchpad/tzfix/slides/pptx/assets/logo-small.png">    </p:cNvPr>
           <p:cNvPicPr>
             <a:picLocks noChangeAspect="1"/>
           </p:cNvPicPr>
@@ -7927,49 +9969,46 @@
                 <a:ea typeface="Arial" pitchFamily="34" charset="-122"/>
                 <a:cs typeface="Arial" pitchFamily="34" charset="-120"/>
               </a:rPr>
-              <a:t>SCA — find vulnerable deps</a:t>
+              <a:t>Four ways a dependency turns malicious</a:t>
             </a:r>
             <a:endParaRPr lang="en-US" sz="2600" dirty="0"/>
           </a:p>
         </p:txBody>
       </p:sp>
-      <p:sp>
-        <p:nvSpPr>
-          <p:cNvPr id="5" name="Shape 2"/>
+      <p:pic>
+        <p:nvPicPr>
+          <p:cNvPr id="5" name="Image 1" descr="The four supply-chain attack vectors as a taxonomy: typosquatting (a malicious package named like one you use — reqeusts for requests — whose setup.py runs at install time, before any import, so a single typo is enough to be owned); dependency confusion (CWE-1357, a public package with a higher version shadows your internal name and is pulled instead); malicious updates (a hijacked or compromised maintainer ships a bad version of a package you already trust); and transitive risk (the dependencies of your dependencies, code you never chose or reviewed but still ship). The trust boundary is bigger than your requirements.txt.">    </p:cNvPr>
+          <p:cNvPicPr>
+            <a:picLocks noChangeAspect="1"/>
+          </p:cNvPicPr>
+          <p:nvPr/>
+        </p:nvPicPr>
+        <p:blipFill>
+          <a:blip r:embed="rId2"/>
+          <a:stretch>
+            <a:fillRect/>
+          </a:stretch>
+        </p:blipFill>
+        <p:spPr>
+          <a:xfrm>
+            <a:off x="2104069" y="1097280"/>
+            <a:ext cx="4935862" cy="3566160"/>
+          </a:xfrm>
+          <a:prstGeom prst="rect">
+            <a:avLst/>
+          </a:prstGeom>
+        </p:spPr>
+      </p:pic>
+      <p:sp>
+        <p:nvSpPr>
+          <p:cNvPr id="6" name="Text 2"/>
           <p:cNvSpPr/>
           <p:nvPr/>
         </p:nvSpPr>
         <p:spPr>
           <a:xfrm>
-            <a:off x="457200" y="1325880"/>
-            <a:ext cx="8229600" cy="713232"/>
-          </a:xfrm>
-          <a:prstGeom prst="roundRect">
-            <a:avLst>
-              <a:gd name="adj" fmla="val 7692"/>
-            </a:avLst>
-          </a:prstGeom>
-          <a:solidFill>
-            <a:srgbClr val="0A1020"/>
-          </a:solidFill>
-          <a:ln w="12700">
-            <a:solidFill>
-              <a:srgbClr val="E8EDF3"/>
-            </a:solidFill>
-            <a:prstDash val="solid"/>
-          </a:ln>
-        </p:spPr>
-      </p:sp>
-      <p:sp>
-        <p:nvSpPr>
-          <p:cNvPr id="6" name="Text 3"/>
-          <p:cNvSpPr/>
-          <p:nvPr/>
-        </p:nvSpPr>
-        <p:spPr>
-          <a:xfrm>
-            <a:off x="640080" y="1399032"/>
-            <a:ext cx="7863840" cy="566928"/>
+            <a:off x="457200" y="4800600"/>
+            <a:ext cx="6949440" cy="274320"/>
           </a:xfrm>
           <a:prstGeom prst="rect">
             <a:avLst/>
@@ -7978,174 +10017,21 @@
           <a:ln/>
         </p:spPr>
         <p:txBody>
-          <a:bodyPr wrap="square" lIns="0" tIns="0" rIns="0" bIns="0" rtlCol="0" anchor="t">
-            <a:normAutofit/>
-          </a:bodyPr>
+          <a:bodyPr wrap="square" lIns="0" tIns="0" rIns="0" bIns="0" rtlCol="0" anchor="ctr"/>
           <a:lstStyle/>
           <a:p>
             <a:pPr indent="0" marL="0">
               <a:buNone/>
             </a:pPr>
             <a:r>
-              <a:rPr lang="en-US" sz="1150" dirty="0">
-                <a:solidFill>
-                  <a:srgbClr val="9FE7D6"/>
-                </a:solidFill>
-                <a:latin typeface="Courier New" pitchFamily="34" charset="0"/>
-                <a:ea typeface="Courier New" pitchFamily="34" charset="-122"/>
-                <a:cs typeface="Courier New" pitchFamily="34" charset="-120"/>
-              </a:rPr>
-              <a:t>docker run --rm -v "$PWD:/src" aquasec/trivy fs /src   # this lab's Python deps</a:t>
-            </a:r>
-            <a:endParaRPr lang="en-US" sz="1150" dirty="0"/>
-          </a:p>
-          <a:p>
-            <a:pPr indent="0" marL="0">
-              <a:buNone/>
-            </a:pPr>
-            <a:r>
-              <a:rPr lang="en-US" sz="1150" dirty="0">
-                <a:solidFill>
-                  <a:srgbClr val="9FE7D6"/>
-                </a:solidFill>
-                <a:latin typeface="Courier New" pitchFamily="34" charset="0"/>
-                <a:ea typeface="Courier New" pitchFamily="34" charset="-122"/>
-                <a:cs typeface="Courier New" pitchFamily="34" charset="-120"/>
-              </a:rPr>
-              <a:t>pip-audit                                                          # vs PyPI advisories</a:t>
-            </a:r>
-            <a:endParaRPr lang="en-US" sz="1150" dirty="0"/>
-          </a:p>
-        </p:txBody>
-      </p:sp>
-      <p:sp>
-        <p:nvSpPr>
-          <p:cNvPr id="7" name="Shape 4"/>
-          <p:cNvSpPr/>
-          <p:nvPr/>
-        </p:nvSpPr>
-        <p:spPr>
-          <a:xfrm>
-            <a:off x="457200" y="2203704"/>
-            <a:ext cx="8229600" cy="1097280"/>
-          </a:xfrm>
-          <a:prstGeom prst="roundRect">
-            <a:avLst>
-              <a:gd name="adj" fmla="val 6667"/>
-            </a:avLst>
-          </a:prstGeom>
-          <a:solidFill>
-            <a:srgbClr val="F1F5F9"/>
-          </a:solidFill>
-          <a:ln/>
-          <a:effectLst>
-            <a:outerShdw sx="100000" sy="100000" kx="0" ky="0" algn="bl" rotWithShape="0" blurRad="76200" dist="25400" dir="5400000">
-              <a:srgbClr val="000000">
-                <a:alpha val="12000"/>
-              </a:srgbClr>
-            </a:outerShdw>
-          </a:effectLst>
-        </p:spPr>
-      </p:sp>
-      <p:sp>
-        <p:nvSpPr>
-          <p:cNvPr id="8" name="Text 5"/>
-          <p:cNvSpPr/>
-          <p:nvPr/>
-        </p:nvSpPr>
-        <p:spPr>
-          <a:xfrm>
-            <a:off x="731520" y="2313432"/>
-            <a:ext cx="7680960" cy="877824"/>
-          </a:xfrm>
-          <a:prstGeom prst="rect">
-            <a:avLst/>
-          </a:prstGeom>
-          <a:noFill/>
-          <a:ln/>
-        </p:spPr>
-        <p:txBody>
-          <a:bodyPr wrap="square" lIns="0" tIns="0" rIns="0" bIns="0" rtlCol="0" anchor="t">
-            <a:normAutofit/>
-          </a:bodyPr>
-          <a:lstStyle/>
-          <a:p>
-            <a:pPr marL="342900" indent="-342900">
-              <a:spcAft>
-                <a:spcPts val="600"/>
-              </a:spcAft>
-              <a:buSzPct val="100000"/>
-              <a:buChar char="•"/>
-            </a:pPr>
-            <a:r>
-              <a:rPr lang="en-US" sz="1400" dirty="0">
-                <a:solidFill>
-                  <a:srgbClr val="1F2937"/>
+              <a:rPr lang="en-US" sz="900" dirty="0">
+                <a:solidFill>
+                  <a:srgbClr val="64748B"/>
                 </a:solidFill>
                 <a:latin typeface="Calibri" pitchFamily="34" charset="0"/>
                 <a:ea typeface="Calibri" pitchFamily="34" charset="-122"/>
                 <a:cs typeface="Calibri" pitchFamily="34" charset="-120"/>
               </a:rPr>
-              <a:t>Produces CVEs + fix versions</a:t>
-            </a:r>
-            <a:endParaRPr lang="en-US" sz="1400" dirty="0"/>
-          </a:p>
-          <a:p>
-            <a:pPr marL="342900" indent="-342900">
-              <a:spcAft>
-                <a:spcPts val="600"/>
-              </a:spcAft>
-              <a:buSzPct val="100000"/>
-              <a:buChar char="•"/>
-            </a:pPr>
-            <a:r>
-              <a:rPr lang="en-US" sz="1400" dirty="0">
-                <a:solidFill>
-                  <a:srgbClr val="1F2937"/>
-                </a:solidFill>
-                <a:latin typeface="Calibri" pitchFamily="34" charset="0"/>
-                <a:ea typeface="Calibri" pitchFamily="34" charset="-122"/>
-                <a:cs typeface="Calibri" pitchFamily="34" charset="-120"/>
-              </a:rPr>
-              <a:t>CWE-1104 (unmaintained), CWE-829 (untrusted inclusion), CWE-1395 (known-vulnerable 3rd-party dependency)</a:t>
-            </a:r>
-            <a:endParaRPr lang="en-US" sz="1400" dirty="0"/>
-          </a:p>
-        </p:txBody>
-      </p:sp>
-      <p:sp>
-        <p:nvSpPr>
-          <p:cNvPr id="9" name="Text 6"/>
-          <p:cNvSpPr/>
-          <p:nvPr/>
-        </p:nvSpPr>
-        <p:spPr>
-          <a:xfrm>
-            <a:off x="457200" y="4800600"/>
-            <a:ext cx="6949440" cy="274320"/>
-          </a:xfrm>
-          <a:prstGeom prst="rect">
-            <a:avLst/>
-          </a:prstGeom>
-          <a:noFill/>
-          <a:ln/>
-        </p:spPr>
-        <p:txBody>
-          <a:bodyPr wrap="square" lIns="0" tIns="0" rIns="0" bIns="0" rtlCol="0" anchor="ctr"/>
-          <a:lstStyle/>
-          <a:p>
-            <a:pPr indent="0" marL="0">
-              <a:buNone/>
-            </a:pPr>
-            <a:r>
-              <a:rPr lang="en-US" sz="900" dirty="0">
-                <a:solidFill>
-                  <a:srgbClr val="64748B"/>
-                </a:solidFill>
-                <a:latin typeface="Calibri" pitchFamily="34" charset="0"/>
-                <a:ea typeface="Calibri" pitchFamily="34" charset="-122"/>
-                <a:cs typeface="Calibri" pitchFamily="34" charset="-120"/>
-              </a:rPr>
               <a:t>Software Security · Week 12</a:t>
             </a:r>
             <a:endParaRPr lang="en-US" sz="900" dirty="0"/>
@@ -8154,14 +10040,14 @@
       </p:sp>
       <p:pic>
         <p:nvPicPr>
-          <p:cNvPr id="10" name="Image 1" descr="/private/tmp/claude-501/-Users-pop7-Library-CloudStorage-OneDrive-MonsterConnectCo--Ltd-Lecture-KOSEN69---software-security/e6d6556f-17de-403d-a9a0-cf2f846149b4/scratchpad/tree/slides/pptx/assets/logo-small.png">    </p:cNvPr>
+          <p:cNvPr id="7" name="Image 2" descr="/private/tmp/claude-501/-Users-pop7-Library-CloudStorage-OneDrive-MonsterConnectCo--Ltd-Lecture-KOSEN69---software-security/f63a82af-e1ad-40ed-89c4-03c6ca776e3f/scratchpad/tzfix/slides/pptx/assets/logo-small.png">    </p:cNvPr>
           <p:cNvPicPr>
             <a:picLocks noChangeAspect="1"/>
           </p:cNvPicPr>
           <p:nvPr/>
         </p:nvPicPr>
         <p:blipFill>
-          <a:blip r:embed="rId2"/>
+          <a:blip r:embed="rId3"/>
           <a:stretch>
             <a:fillRect/>
           </a:stretch>
@@ -8292,7 +10178,7 @@
                 <a:ea typeface="Arial" pitchFamily="34" charset="-122"/>
                 <a:cs typeface="Arial" pitchFamily="34" charset="-120"/>
               </a:rPr>
-              <a:t>Integrity: prove what you shipped</a:t>
+              <a:t>Try it — which package actually installs?</a:t>
             </a:r>
             <a:endParaRPr lang="en-US" sz="2600" dirty="0"/>
           </a:p>
@@ -8300,43 +10186,14 @@
       </p:sp>
       <p:sp>
         <p:nvSpPr>
-          <p:cNvPr id="5" name="Shape 2"/>
+          <p:cNvPr id="5" name="Text 2"/>
           <p:cNvSpPr/>
           <p:nvPr/>
         </p:nvSpPr>
         <p:spPr>
           <a:xfrm>
-            <a:off x="457200" y="1325880"/>
-            <a:ext cx="8229600" cy="1207008"/>
-          </a:xfrm>
-          <a:prstGeom prst="roundRect">
-            <a:avLst>
-              <a:gd name="adj" fmla="val 6061"/>
-            </a:avLst>
-          </a:prstGeom>
-          <a:solidFill>
-            <a:srgbClr val="F1F5F9"/>
-          </a:solidFill>
-          <a:ln/>
-          <a:effectLst>
-            <a:outerShdw sx="100000" sy="100000" kx="0" ky="0" algn="bl" rotWithShape="0" blurRad="76200" dist="25400" dir="5400000">
-              <a:srgbClr val="000000">
-                <a:alpha val="12000"/>
-              </a:srgbClr>
-            </a:outerShdw>
-          </a:effectLst>
-        </p:spPr>
-      </p:sp>
-      <p:sp>
-        <p:nvSpPr>
-          <p:cNvPr id="6" name="Text 3"/>
-          <p:cNvSpPr/>
-          <p:nvPr/>
-        </p:nvSpPr>
-        <p:spPr>
-          <a:xfrm>
-            <a:off x="731520" y="1435608"/>
-            <a:ext cx="7680960" cy="987552"/>
+            <a:off x="548640" y="1325880"/>
+            <a:ext cx="8046720" cy="822960"/>
           </a:xfrm>
           <a:prstGeom prst="rect">
             <a:avLst/>
@@ -8350,12 +10207,8 @@
           </a:bodyPr>
           <a:lstStyle/>
           <a:p>
-            <a:pPr marL="342900" indent="-342900">
-              <a:spcAft>
-                <a:spcPts val="600"/>
-              </a:spcAft>
-              <a:buSzPct val="100000"/>
-              <a:buChar char="•"/>
+            <a:pPr indent="0" marL="0">
+              <a:buNone/>
             </a:pPr>
             <a:r>
               <a:rPr lang="en-US" sz="1400" dirty="0">
@@ -8366,17 +10219,13 @@
                 <a:ea typeface="Calibri" pitchFamily="34" charset="-122"/>
                 <a:cs typeface="Calibri" pitchFamily="34" charset="-120"/>
               </a:rPr>
-              <a:t>SBOM (CycloneDX/SPDX) — ingredient list of the build</a:t>
+              <a:t>Set both versions and the index mode. The resolver's real rule decides.</a:t>
             </a:r>
             <a:endParaRPr lang="en-US" sz="1400" dirty="0"/>
           </a:p>
           <a:p>
-            <a:pPr marL="342900" indent="-342900">
-              <a:spcAft>
-                <a:spcPts val="600"/>
-              </a:spcAft>
-              <a:buSzPct val="100000"/>
-              <a:buChar char="•"/>
+            <a:pPr indent="0" marL="0">
+              <a:buNone/>
             </a:pPr>
             <a:r>
               <a:rPr lang="en-US" sz="1400" dirty="0">
@@ -8387,66 +10236,45 @@
                 <a:ea typeface="Calibri" pitchFamily="34" charset="-122"/>
                 <a:cs typeface="Calibri" pitchFamily="34" charset="-120"/>
               </a:rPr>
-              <a:t>SLSA — levels of build provenance &amp; tamper-resistance</a:t>
+              <a:t>Try it live: /sim/resolver-confusion (interactive simulation, web only)</a:t>
             </a:r>
             <a:endParaRPr lang="en-US" sz="1400" dirty="0"/>
           </a:p>
-          <a:p>
-            <a:pPr marL="342900" indent="-342900">
-              <a:spcAft>
-                <a:spcPts val="600"/>
-              </a:spcAft>
-              <a:buSzPct val="100000"/>
-              <a:buChar char="•"/>
-            </a:pPr>
-            <a:r>
-              <a:rPr lang="en-US" sz="1400" dirty="0">
-                <a:solidFill>
-                  <a:srgbClr val="1F2937"/>
+        </p:txBody>
+      </p:sp>
+      <p:sp>
+        <p:nvSpPr>
+          <p:cNvPr id="6" name="Text 3"/>
+          <p:cNvSpPr/>
+          <p:nvPr/>
+        </p:nvSpPr>
+        <p:spPr>
+          <a:xfrm>
+            <a:off x="457200" y="4800600"/>
+            <a:ext cx="6949440" cy="274320"/>
+          </a:xfrm>
+          <a:prstGeom prst="rect">
+            <a:avLst/>
+          </a:prstGeom>
+          <a:noFill/>
+          <a:ln/>
+        </p:spPr>
+        <p:txBody>
+          <a:bodyPr wrap="square" lIns="0" tIns="0" rIns="0" bIns="0" rtlCol="0" anchor="ctr"/>
+          <a:lstStyle/>
+          <a:p>
+            <a:pPr indent="0" marL="0">
+              <a:buNone/>
+            </a:pPr>
+            <a:r>
+              <a:rPr lang="en-US" sz="900" dirty="0">
+                <a:solidFill>
+                  <a:srgbClr val="64748B"/>
                 </a:solidFill>
                 <a:latin typeface="Calibri" pitchFamily="34" charset="0"/>
                 <a:ea typeface="Calibri" pitchFamily="34" charset="-122"/>
                 <a:cs typeface="Calibri" pitchFamily="34" charset="-120"/>
               </a:rPr>
-              <a:t>A08:2025 Software/Data Integrity Failures</a:t>
-            </a:r>
-            <a:endParaRPr lang="en-US" sz="1400" dirty="0"/>
-          </a:p>
-        </p:txBody>
-      </p:sp>
-      <p:sp>
-        <p:nvSpPr>
-          <p:cNvPr id="7" name="Text 4"/>
-          <p:cNvSpPr/>
-          <p:nvPr/>
-        </p:nvSpPr>
-        <p:spPr>
-          <a:xfrm>
-            <a:off x="457200" y="4800600"/>
-            <a:ext cx="6949440" cy="274320"/>
-          </a:xfrm>
-          <a:prstGeom prst="rect">
-            <a:avLst/>
-          </a:prstGeom>
-          <a:noFill/>
-          <a:ln/>
-        </p:spPr>
-        <p:txBody>
-          <a:bodyPr wrap="square" lIns="0" tIns="0" rIns="0" bIns="0" rtlCol="0" anchor="ctr"/>
-          <a:lstStyle/>
-          <a:p>
-            <a:pPr indent="0" marL="0">
-              <a:buNone/>
-            </a:pPr>
-            <a:r>
-              <a:rPr lang="en-US" sz="900" dirty="0">
-                <a:solidFill>
-                  <a:srgbClr val="64748B"/>
-                </a:solidFill>
-                <a:latin typeface="Calibri" pitchFamily="34" charset="0"/>
-                <a:ea typeface="Calibri" pitchFamily="34" charset="-122"/>
-                <a:cs typeface="Calibri" pitchFamily="34" charset="-120"/>
-              </a:rPr>
               <a:t>Software Security · Week 12</a:t>
             </a:r>
             <a:endParaRPr lang="en-US" sz="900" dirty="0"/>
@@ -8455,7 +10283,7 @@
       </p:sp>
       <p:pic>
         <p:nvPicPr>
-          <p:cNvPr id="8" name="Image 1" descr="/private/tmp/claude-501/-Users-pop7-Library-CloudStorage-OneDrive-MonsterConnectCo--Ltd-Lecture-KOSEN69---software-security/e6d6556f-17de-403d-a9a0-cf2f846149b4/scratchpad/tree/slides/pptx/assets/logo-small.png">    </p:cNvPr>
+          <p:cNvPr id="7" name="Image 1" descr="/private/tmp/claude-501/-Users-pop7-Library-CloudStorage-OneDrive-MonsterConnectCo--Ltd-Lecture-KOSEN69---software-security/f63a82af-e1ad-40ed-89c4-03c6ca776e3f/scratchpad/tzfix/slides/pptx/assets/logo-small.png">    </p:cNvPr>
           <p:cNvPicPr>
             <a:picLocks noChangeAspect="1"/>
           </p:cNvPicPr>
